--- a/课件/C1/C1-A-01/C1-A-01.pptx
+++ b/课件/C1/C1-A-01/C1-A-01.pptx
@@ -4002,7 +4002,7 @@
                   <a:srgbClr val="000000"/>
                 </a:solidFill>
               </a:rPr>
-              <a:t>一句话：</a:t>
+              <a:t>程序骨架：</a:t>
             </a:r>
             <a:pPr algn="l" indent="0" marL="0">
               <a:lnSpc>
@@ -4016,7 +4016,7 @@
                   <a:srgbClr val="000000"/>
                 </a:solidFill>
               </a:rPr>
-              <a:t>程序 = main入口 ＋ printf输出 ＋ 分号结尾</a:t>
+              <a:t>从main进门 ＋ printf往外打字 ＋ 分号收尾</a:t>
             </a:r>
             <a:endParaRPr lang="en-US" sz="1800" dirty="0"/>
           </a:p>
@@ -9438,7 +9438,7 @@
                   <a:srgbClr val="000000"/>
                 </a:solidFill>
               </a:rPr>
-              <a:t>计算机只懂0和1，</a:t>
+              <a:t>计算机只认0和1，</a:t>
             </a:r>
             <a:pPr algn="l" indent="0" marL="0">
               <a:buNone/>
@@ -9460,7 +9460,7 @@
                   <a:srgbClr val="000000"/>
                 </a:solidFill>
               </a:rPr>
-              <a:t>：你把想法写成C代码，它翻译给电脑执行</a:t>
+              <a:t>：你写的C代码，经编译器翻译成0和1，电脑才执行</a:t>
             </a:r>
             <a:endParaRPr lang="en-US" dirty="0"/>
           </a:p>

--- a/课件/C1/C1-A-01/C1-A-01.pptx
+++ b/课件/C1/C1-A-01/C1-A-01.pptx
@@ -20,9 +20,11 @@
     <p:sldId id="268" r:id="rId14"/>
     <p:sldId id="269" r:id="rId15"/>
     <p:sldId id="270" r:id="rId16"/>
+    <p:sldId id="271" r:id="rId17"/>
+    <p:sldId id="272" r:id="rId18"/>
   </p:sldIdLst>
   <p:notesMasterIdLst>
-    <p:notesMasterId r:id="rId17"/>
+    <p:notesMasterId r:id="rId19"/>
   </p:notesMasterIdLst>
   <p:sldSz cx="12191695" cy="6858000"/>
   <p:notesSz cx="6858000" cy="12191695"/>
@@ -1068,6 +1070,182 @@
             <a:fld id="{F7021451-1387-4CA6-816F-3879F97B5CBC}" type="slidenum">
               <a:rPr lang="en-US"/>
               <a:t>15</a:t>
+            </a:fld>
+            <a:endParaRPr lang="en-US"/>
+          </a:p>
+        </p:txBody>
+      </p:sp>
+    </p:spTree>
+    <p:extLst>
+      <p:ext uri="{BB962C8B-B14F-4D97-AF65-F5344CB8AC3E}">
+        <p14:creationId xmlns:p14="http://schemas.microsoft.com/office/powerpoint/2010/main" val="1024086991"/>
+      </p:ext>
+    </p:extLst>
+  </p:cSld>
+  <p:clrMapOvr>
+    <a:masterClrMapping/>
+  </p:clrMapOvr>
+</p:notes>
+</file>
+
+<file path=ppt/notesSlides/notesSlide16.xml><?xml version="1.0" encoding="utf-8"?>
+<p:notes xmlns:a="http://schemas.openxmlformats.org/drawingml/2006/main" xmlns:r="http://schemas.openxmlformats.org/officeDocument/2006/relationships" xmlns:p="http://schemas.openxmlformats.org/presentationml/2006/main">
+  <p:cSld>
+    <p:spTree>
+      <p:nvGrpSpPr>
+        <p:cNvPr id="1" name=""/>
+        <p:cNvGrpSpPr/>
+        <p:nvPr/>
+      </p:nvGrpSpPr>
+      <p:grpSpPr>
+        <a:xfrm>
+          <a:off x="0" y="0"/>
+          <a:ext cx="0" cy="0"/>
+          <a:chOff x="0" y="0"/>
+          <a:chExt cx="0" cy="0"/>
+        </a:xfrm>
+      </p:grpSpPr>
+      <p:sp>
+        <p:nvSpPr>
+          <p:cNvPr id="2" name="Slide Image Placeholder 1"/>
+          <p:cNvSpPr>
+            <a:spLocks noGrp="1" noRot="1" noChangeAspect="1"/>
+          </p:cNvSpPr>
+          <p:nvPr>
+            <p:ph type="sldImg"/>
+          </p:nvPr>
+        </p:nvSpPr>
+        <p:spPr/>
+      </p:sp>
+      <p:sp>
+        <p:nvSpPr>
+          <p:cNvPr id="3" name="Notes Placeholder 2"/>
+          <p:cNvSpPr>
+            <a:spLocks noGrp="1"/>
+          </p:cNvSpPr>
+          <p:nvPr>
+            <p:ph type="body" idx="1"/>
+          </p:nvPr>
+        </p:nvSpPr>
+        <p:spPr/>
+        <p:txBody>
+          <a:bodyPr/>
+          <a:lstStyle/>
+          <a:p>
+            <a:r>
+              <a:rPr lang="en-US" dirty="0"/>
+              <a:t/>
+            </a:r>
+            <a:endParaRPr lang="en-US" dirty="0"/>
+          </a:p>
+        </p:txBody>
+      </p:sp>
+      <p:sp>
+        <p:nvSpPr>
+          <p:cNvPr id="4" name="Slide Number Placeholder 3"/>
+          <p:cNvSpPr>
+            <a:spLocks noGrp="1"/>
+          </p:cNvSpPr>
+          <p:nvPr>
+            <p:ph type="sldNum" sz="quarter" idx="10"/>
+          </p:nvPr>
+        </p:nvSpPr>
+        <p:spPr/>
+        <p:txBody>
+          <a:bodyPr/>
+          <a:lstStyle/>
+          <a:p>
+            <a:fld id="{F7021451-1387-4CA6-816F-3879F97B5CBC}" type="slidenum">
+              <a:rPr lang="en-US"/>
+              <a:t>16</a:t>
+            </a:fld>
+            <a:endParaRPr lang="en-US"/>
+          </a:p>
+        </p:txBody>
+      </p:sp>
+    </p:spTree>
+    <p:extLst>
+      <p:ext uri="{BB962C8B-B14F-4D97-AF65-F5344CB8AC3E}">
+        <p14:creationId xmlns:p14="http://schemas.microsoft.com/office/powerpoint/2010/main" val="1024086991"/>
+      </p:ext>
+    </p:extLst>
+  </p:cSld>
+  <p:clrMapOvr>
+    <a:masterClrMapping/>
+  </p:clrMapOvr>
+</p:notes>
+</file>
+
+<file path=ppt/notesSlides/notesSlide17.xml><?xml version="1.0" encoding="utf-8"?>
+<p:notes xmlns:a="http://schemas.openxmlformats.org/drawingml/2006/main" xmlns:r="http://schemas.openxmlformats.org/officeDocument/2006/relationships" xmlns:p="http://schemas.openxmlformats.org/presentationml/2006/main">
+  <p:cSld>
+    <p:spTree>
+      <p:nvGrpSpPr>
+        <p:cNvPr id="1" name=""/>
+        <p:cNvGrpSpPr/>
+        <p:nvPr/>
+      </p:nvGrpSpPr>
+      <p:grpSpPr>
+        <a:xfrm>
+          <a:off x="0" y="0"/>
+          <a:ext cx="0" cy="0"/>
+          <a:chOff x="0" y="0"/>
+          <a:chExt cx="0" cy="0"/>
+        </a:xfrm>
+      </p:grpSpPr>
+      <p:sp>
+        <p:nvSpPr>
+          <p:cNvPr id="2" name="Slide Image Placeholder 1"/>
+          <p:cNvSpPr>
+            <a:spLocks noGrp="1" noRot="1" noChangeAspect="1"/>
+          </p:cNvSpPr>
+          <p:nvPr>
+            <p:ph type="sldImg"/>
+          </p:nvPr>
+        </p:nvSpPr>
+        <p:spPr/>
+      </p:sp>
+      <p:sp>
+        <p:nvSpPr>
+          <p:cNvPr id="3" name="Notes Placeholder 2"/>
+          <p:cNvSpPr>
+            <a:spLocks noGrp="1"/>
+          </p:cNvSpPr>
+          <p:nvPr>
+            <p:ph type="body" idx="1"/>
+          </p:nvPr>
+        </p:nvSpPr>
+        <p:spPr/>
+        <p:txBody>
+          <a:bodyPr/>
+          <a:lstStyle/>
+          <a:p>
+            <a:r>
+              <a:rPr lang="en-US" dirty="0"/>
+              <a:t/>
+            </a:r>
+            <a:endParaRPr lang="en-US" dirty="0"/>
+          </a:p>
+        </p:txBody>
+      </p:sp>
+      <p:sp>
+        <p:nvSpPr>
+          <p:cNvPr id="4" name="Slide Number Placeholder 3"/>
+          <p:cNvSpPr>
+            <a:spLocks noGrp="1"/>
+          </p:cNvSpPr>
+          <p:nvPr>
+            <p:ph type="sldNum" sz="quarter" idx="10"/>
+          </p:nvPr>
+        </p:nvSpPr>
+        <p:spPr/>
+        <p:txBody>
+          <a:bodyPr/>
+          <a:lstStyle/>
+          <a:p>
+            <a:fld id="{F7021451-1387-4CA6-816F-3879F97B5CBC}" type="slidenum">
+              <a:rPr lang="en-US"/>
+              <a:t>17</a:t>
             </a:fld>
             <a:endParaRPr lang="en-US"/>
           </a:p>
@@ -2161,7 +2339,7 @@
                 <a:ea typeface="微软雅黑" pitchFamily="34" charset="-122"/>
                 <a:cs typeface="微软雅黑" pitchFamily="34" charset="-120"/>
               </a:rPr>
-              <a:t>1 / 15</a:t>
+              <a:t>1 / 17</a:t>
             </a:r>
             <a:endParaRPr lang="en-US" sz="1000" dirty="0"/>
           </a:p>
@@ -2395,7 +2573,7 @@
                 <a:ea typeface="微软雅黑" pitchFamily="34" charset="-122"/>
                 <a:cs typeface="微软雅黑" pitchFamily="34" charset="-120"/>
               </a:rPr>
-              <a:t>10 / 15</a:t>
+              <a:t>10 / 17</a:t>
             </a:r>
             <a:endParaRPr lang="en-US" sz="1000" dirty="0"/>
           </a:p>
@@ -2434,7 +2612,7 @@
                 <a:ea typeface="微软雅黑" pitchFamily="34" charset="-122"/>
                 <a:cs typeface="微软雅黑" pitchFamily="34" charset="-120"/>
               </a:rPr>
-              <a:t>代码精讲</a:t>
+              <a:t>第一个完整程序</a:t>
             </a:r>
             <a:endParaRPr lang="en-US" sz="1400" dirty="0"/>
           </a:p>
@@ -2473,7 +2651,7 @@
                 <a:ea typeface="微软雅黑" pitchFamily="34" charset="-122"/>
                 <a:cs typeface="微软雅黑" pitchFamily="34" charset="-120"/>
               </a:rPr>
-              <a:t>逐行读懂：第一个程序</a:t>
+              <a:t>C程序的骨架：五部分</a:t>
             </a:r>
             <a:endParaRPr lang="en-US" sz="2800" dirty="0"/>
           </a:p>
@@ -2488,7 +2666,7 @@
         <p:spPr>
           <a:xfrm>
             <a:off x="822960" y="2395728"/>
-            <a:ext cx="10545775" cy="1984248"/>
+            <a:ext cx="10545775" cy="3172968"/>
           </a:xfrm>
           <a:prstGeom prst="rect">
             <a:avLst/>
@@ -2513,7 +2691,7 @@
         <p:spPr>
           <a:xfrm>
             <a:off x="1078992" y="2505456"/>
-            <a:ext cx="10033711" cy="1764792"/>
+            <a:ext cx="10033711" cy="2953512"/>
           </a:xfrm>
           <a:prstGeom prst="rect">
             <a:avLst/>
@@ -2532,7 +2710,7 @@
               <a:buNone/>
             </a:pPr>
             <a:r>
-              <a:rPr lang="en-US" sz="1200" dirty="0">
+              <a:rPr lang="en-US" sz="1100" dirty="0">
                 <a:solidFill>
                   <a:srgbClr val="1F2329"/>
                 </a:solidFill>
@@ -2540,15 +2718,20 @@
                 <a:ea typeface="Consolas" pitchFamily="34" charset="-122"/>
                 <a:cs typeface="Consolas" pitchFamily="34" charset="-120"/>
               </a:rPr>
-              <a:t>#include &lt;stdio.h&gt;        // 头文件：printf在这里定义
-#define MaxSize 1000      // 宏定义：以后写MaxSize就是1000
-int main(){               // 主函数：程序入口
-    printf("你好！\n");    // 输出文字，\n是换行
-    return 0;              // 正常结束
+              <a:t>// 头文件：引入别人写好的工具（printf在这里）
+#include &lt;stdio.h&gt;
+// 宏定义：给常量起名字
+#define MaxSize 1000
+// 主函数：程序从这里开始执行
+int main(){
+    // 函数体：一条条指令
+    printf("你好，重邮802！\n");
+    // return 0：告诉系统"正常结束"
+    return 0;
 }
 </a:t>
             </a:r>
-            <a:endParaRPr lang="en-US" sz="1200" dirty="0"/>
+            <a:endParaRPr lang="en-US" sz="1100" dirty="0"/>
           </a:p>
         </p:txBody>
       </p:sp>
@@ -2560,8 +2743,8 @@
         </p:nvSpPr>
         <p:spPr>
           <a:xfrm>
-            <a:off x="896112" y="4581144"/>
-            <a:ext cx="10454335" cy="378714"/>
+            <a:off x="896112" y="5769864"/>
+            <a:ext cx="10454335" cy="321564"/>
           </a:xfrm>
           <a:prstGeom prst="rect">
             <a:avLst/>
@@ -2580,7 +2763,7 @@
               <a:buNone/>
             </a:pPr>
             <a:r>
-              <a:rPr lang="en-US" sz="1700" b="1" dirty="0">
+              <a:rPr lang="en-US" sz="1400" b="1" dirty="0">
                 <a:solidFill>
                   <a:srgbClr val="1F4E9C"/>
                 </a:solidFill>
@@ -2597,12 +2780,12 @@
               <a:buNone/>
             </a:pPr>
             <a:r>
-              <a:rPr lang="en-US" sz="1700" b="1" dirty="0">
+              <a:rPr lang="en-US" sz="1400" b="1" dirty="0">
                 <a:solidFill>
                   <a:srgbClr val="000000"/>
                 </a:solidFill>
               </a:rPr>
-              <a:t>main</a:t>
+              <a:t>头文件</a:t>
             </a:r>
             <a:pPr algn="l" indent="0" marL="0">
               <a:lnSpc>
@@ -2611,14 +2794,14 @@
               <a:buNone/>
             </a:pPr>
             <a:r>
-              <a:rPr lang="en-US" sz="1700" dirty="0">
+              <a:rPr lang="en-US" sz="1400" dirty="0">
                 <a:solidFill>
                   <a:srgbClr val="000000"/>
                 </a:solidFill>
               </a:rPr>
-              <a:t>：程序的大门，不管代码多少，都从main开始执行</a:t>
-            </a:r>
-            <a:endParaRPr lang="en-US" sz="1700" dirty="0"/>
+              <a:t>：借工具，printf住在stdio.h这个仓库里，不借进来编译器不认识它</a:t>
+            </a:r>
+            <a:endParaRPr lang="en-US" sz="1400" dirty="0"/>
           </a:p>
         </p:txBody>
       </p:sp>
@@ -2630,8 +2813,8 @@
         </p:nvSpPr>
         <p:spPr>
           <a:xfrm>
-            <a:off x="896112" y="5033010"/>
-            <a:ext cx="10454335" cy="378714"/>
+            <a:off x="896112" y="6164580"/>
+            <a:ext cx="10454335" cy="321564"/>
           </a:xfrm>
           <a:prstGeom prst="rect">
             <a:avLst/>
@@ -2650,7 +2833,7 @@
               <a:buNone/>
             </a:pPr>
             <a:r>
-              <a:rPr lang="en-US" sz="1700" b="1" dirty="0">
+              <a:rPr lang="en-US" sz="1400" b="1" dirty="0">
                 <a:solidFill>
                   <a:srgbClr val="1F4E9C"/>
                 </a:solidFill>
@@ -2667,12 +2850,12 @@
               <a:buNone/>
             </a:pPr>
             <a:r>
-              <a:rPr lang="en-US" sz="1700" b="1" dirty="0">
+              <a:rPr lang="en-US" sz="1400" b="1" dirty="0">
                 <a:solidFill>
                   <a:srgbClr val="000000"/>
                 </a:solidFill>
               </a:rPr>
-              <a:t>printf</a:t>
+              <a:t>宏定义</a:t>
             </a:r>
             <a:pPr algn="l" indent="0" marL="0">
               <a:lnSpc>
@@ -2681,14 +2864,14 @@
               <a:buNone/>
             </a:pPr>
             <a:r>
-              <a:rPr lang="en-US" sz="1700" dirty="0">
+              <a:rPr lang="en-US" sz="1400" dirty="0">
                 <a:solidFill>
                   <a:srgbClr val="000000"/>
                 </a:solidFill>
               </a:rPr>
-              <a:t>：输出工具，双引号里写什么，屏幕就打印什么</a:t>
-            </a:r>
-            <a:endParaRPr lang="en-US" sz="1700" dirty="0"/>
+              <a:t>：给1000起名叫MaxSize，后面写MaxSize就是1000</a:t>
+            </a:r>
+            <a:endParaRPr lang="en-US" sz="1400" dirty="0"/>
           </a:p>
         </p:txBody>
       </p:sp>
@@ -2700,8 +2883,8 @@
         </p:nvSpPr>
         <p:spPr>
           <a:xfrm>
-            <a:off x="896112" y="5484876"/>
-            <a:ext cx="10454335" cy="378714"/>
+            <a:off x="896112" y="6559296"/>
+            <a:ext cx="10454335" cy="321564"/>
           </a:xfrm>
           <a:prstGeom prst="rect">
             <a:avLst/>
@@ -2720,7 +2903,7 @@
               <a:buNone/>
             </a:pPr>
             <a:r>
-              <a:rPr lang="en-US" sz="1700" b="1" dirty="0">
+              <a:rPr lang="en-US" sz="1400" b="1" dirty="0">
                 <a:solidFill>
                   <a:srgbClr val="1F4E9C"/>
                 </a:solidFill>
@@ -2737,12 +2920,12 @@
               <a:buNone/>
             </a:pPr>
             <a:r>
-              <a:rPr lang="en-US" sz="1700" b="1" dirty="0">
+              <a:rPr lang="en-US" sz="1400" b="1" dirty="0">
                 <a:solidFill>
                   <a:srgbClr val="000000"/>
                 </a:solidFill>
               </a:rPr>
-              <a:t>\n</a:t>
+              <a:t>主函数</a:t>
             </a:r>
             <a:pPr algn="l" indent="0" marL="0">
               <a:lnSpc>
@@ -2751,14 +2934,14 @@
               <a:buNone/>
             </a:pPr>
             <a:r>
-              <a:rPr lang="en-US" sz="1700" dirty="0">
+              <a:rPr lang="en-US" sz="1400" dirty="0">
                 <a:solidFill>
                   <a:srgbClr val="000000"/>
                 </a:solidFill>
               </a:rPr>
-              <a:t>：换行，没有它所有文字挤在一行</a:t>
-            </a:r>
-            <a:endParaRPr lang="en-US" sz="1700" dirty="0"/>
+              <a:t>：程序的大门，不管代码多少，都从main开始执行</a:t>
+            </a:r>
+            <a:endParaRPr lang="en-US" sz="1400" dirty="0"/>
           </a:p>
         </p:txBody>
       </p:sp>
@@ -2770,8 +2953,8 @@
         </p:nvSpPr>
         <p:spPr>
           <a:xfrm>
-            <a:off x="896112" y="5936742"/>
-            <a:ext cx="10454335" cy="378714"/>
+            <a:off x="896112" y="6954012"/>
+            <a:ext cx="10454335" cy="321564"/>
           </a:xfrm>
           <a:prstGeom prst="rect">
             <a:avLst/>
@@ -2790,7 +2973,7 @@
               <a:buNone/>
             </a:pPr>
             <a:r>
-              <a:rPr lang="en-US" sz="1700" b="1" dirty="0">
+              <a:rPr lang="en-US" sz="1400" b="1" dirty="0">
                 <a:solidFill>
                   <a:srgbClr val="1F4E9C"/>
                 </a:solidFill>
@@ -2807,12 +2990,12 @@
               <a:buNone/>
             </a:pPr>
             <a:r>
-              <a:rPr lang="en-US" sz="1700" b="1" dirty="0">
+              <a:rPr lang="en-US" sz="1400" b="1" dirty="0">
                 <a:solidFill>
                   <a:srgbClr val="000000"/>
                 </a:solidFill>
               </a:rPr>
-              <a:t>;</a:t>
+              <a:t>函数体</a:t>
             </a:r>
             <a:pPr algn="l" indent="0" marL="0">
               <a:lnSpc>
@@ -2821,14 +3004,84 @@
               <a:buNone/>
             </a:pPr>
             <a:r>
-              <a:rPr lang="en-US" sz="1700" dirty="0">
+              <a:rPr lang="en-US" sz="1400" dirty="0">
                 <a:solidFill>
                   <a:srgbClr val="000000"/>
                 </a:solidFill>
               </a:rPr>
-              <a:t>：一条语句的句号，不能丢</a:t>
-            </a:r>
-            <a:endParaRPr lang="en-US" sz="1700" dirty="0"/>
+              <a:t>：花括号里的指令，从上往下一条条执行</a:t>
+            </a:r>
+            <a:endParaRPr lang="en-US" sz="1400" dirty="0"/>
+          </a:p>
+        </p:txBody>
+      </p:sp>
+      <p:sp>
+        <p:nvSpPr>
+          <p:cNvPr id="11" name="Text 9"/>
+          <p:cNvSpPr/>
+          <p:nvPr/>
+        </p:nvSpPr>
+        <p:spPr>
+          <a:xfrm>
+            <a:off x="896112" y="7348728"/>
+            <a:ext cx="10454335" cy="321564"/>
+          </a:xfrm>
+          <a:prstGeom prst="rect">
+            <a:avLst/>
+          </a:prstGeom>
+          <a:noFill/>
+          <a:ln/>
+        </p:spPr>
+        <p:txBody>
+          <a:bodyPr wrap="square" rtlCol="0" anchor="t"/>
+          <a:lstStyle/>
+          <a:p>
+            <a:pPr algn="l" indent="0" marL="0">
+              <a:lnSpc>
+                <a:spcPct val="115000"/>
+              </a:lnSpc>
+              <a:buNone/>
+            </a:pPr>
+            <a:r>
+              <a:rPr lang="en-US" sz="1400" b="1" dirty="0">
+                <a:solidFill>
+                  <a:srgbClr val="1F4E9C"/>
+                </a:solidFill>
+                <a:latin typeface="微软雅黑" pitchFamily="34" charset="0"/>
+                <a:ea typeface="微软雅黑" pitchFamily="34" charset="-122"/>
+                <a:cs typeface="微软雅黑" pitchFamily="34" charset="-120"/>
+              </a:rPr>
+              <a:t>•  </a:t>
+            </a:r>
+            <a:pPr algn="l" indent="0" marL="0">
+              <a:lnSpc>
+                <a:spcPct val="115000"/>
+              </a:lnSpc>
+              <a:buNone/>
+            </a:pPr>
+            <a:r>
+              <a:rPr lang="en-US" sz="1400" b="1" dirty="0">
+                <a:solidFill>
+                  <a:srgbClr val="000000"/>
+                </a:solidFill>
+              </a:rPr>
+              <a:t>return 0</a:t>
+            </a:r>
+            <a:pPr algn="l" indent="0" marL="0">
+              <a:lnSpc>
+                <a:spcPct val="115000"/>
+              </a:lnSpc>
+              <a:buNone/>
+            </a:pPr>
+            <a:r>
+              <a:rPr lang="en-US" sz="1400" dirty="0">
+                <a:solidFill>
+                  <a:srgbClr val="000000"/>
+                </a:solidFill>
+              </a:rPr>
+              <a:t>：跟系统报信，0表示正常结束</a:t>
+            </a:r>
+            <a:endParaRPr lang="en-US" sz="1400" dirty="0"/>
           </a:p>
         </p:txBody>
       </p:sp>
@@ -2904,7 +3157,7 @@
                 <a:ea typeface="微软雅黑" pitchFamily="34" charset="-122"/>
                 <a:cs typeface="微软雅黑" pitchFamily="34" charset="-120"/>
               </a:rPr>
-              <a:t>11 / 15</a:t>
+              <a:t>11 / 17</a:t>
             </a:r>
             <a:endParaRPr lang="en-US" sz="1000" dirty="0"/>
           </a:p>
@@ -2943,7 +3196,7 @@
                 <a:ea typeface="微软雅黑" pitchFamily="34" charset="-122"/>
                 <a:cs typeface="微软雅黑" pitchFamily="34" charset="-120"/>
               </a:rPr>
-              <a:t>两个小工具</a:t>
+              <a:t>四个关键点</a:t>
             </a:r>
             <a:endParaRPr lang="en-US" sz="1400" dirty="0"/>
           </a:p>
@@ -2982,224 +3235,1073 @@
                 <a:ea typeface="微软雅黑" pitchFamily="34" charset="-122"/>
                 <a:cs typeface="微软雅黑" pitchFamily="34" charset="-120"/>
               </a:rPr>
-              <a:t>#define 与注释</a:t>
+              <a:t>初学者最容易栽的四个坑</a:t>
             </a:r>
             <a:endParaRPr lang="en-US" sz="2800" dirty="0"/>
           </a:p>
         </p:txBody>
       </p:sp>
-      <p:sp>
-        <p:nvSpPr>
-          <p:cNvPr id="5" name="Shape 3"/>
-          <p:cNvSpPr/>
-          <p:nvPr/>
-        </p:nvSpPr>
-        <p:spPr>
-          <a:xfrm>
-            <a:off x="822960" y="2395728"/>
-            <a:ext cx="10545775" cy="1984248"/>
-          </a:xfrm>
-          <a:prstGeom prst="rect">
-            <a:avLst/>
-          </a:prstGeom>
-          <a:solidFill>
-            <a:srgbClr val="F5F6F7"/>
-          </a:solidFill>
-          <a:ln w="9525">
-            <a:solidFill>
-              <a:srgbClr val="D8DBE0"/>
-            </a:solidFill>
-            <a:prstDash val="solid"/>
-          </a:ln>
-        </p:spPr>
-      </p:sp>
-      <p:sp>
-        <p:nvSpPr>
-          <p:cNvPr id="6" name="Text 4"/>
-          <p:cNvSpPr/>
-          <p:nvPr/>
-        </p:nvSpPr>
-        <p:spPr>
-          <a:xfrm>
-            <a:off x="1078992" y="2505456"/>
-            <a:ext cx="10033711" cy="1764792"/>
-          </a:xfrm>
-          <a:prstGeom prst="rect">
-            <a:avLst/>
-          </a:prstGeom>
-          <a:noFill/>
-          <a:ln/>
-        </p:spPr>
-        <p:txBody>
-          <a:bodyPr wrap="square" rtlCol="0" anchor="t"/>
-          <a:lstStyle/>
-          <a:p>
-            <a:pPr algn="l" indent="0" marL="0">
-              <a:lnSpc>
-                <a:spcPct val="125000"/>
-              </a:lnSpc>
-              <a:buNone/>
-            </a:pPr>
-            <a:r>
-              <a:rPr lang="en-US" sz="1400" dirty="0">
-                <a:solidFill>
-                  <a:srgbClr val="1F2329"/>
-                </a:solidFill>
-                <a:latin typeface="Consolas" pitchFamily="34" charset="0"/>
-                <a:ea typeface="Consolas" pitchFamily="34" charset="-122"/>
-                <a:cs typeface="Consolas" pitchFamily="34" charset="-120"/>
-              </a:rPr>
-              <a:t>#define MaxSize 1000      // 给1000起个名字：MaxSize
-#define PI 3.14            // 以后写PI，就是3.14
-// 这是单行注释：解释这行在干嘛（考试写"算法思想"靠它）
-/* 这是多行注释
-   可以写好几行 */
-</a:t>
-            </a:r>
-            <a:endParaRPr lang="en-US" sz="1400" dirty="0"/>
-          </a:p>
-        </p:txBody>
-      </p:sp>
-      <p:sp>
-        <p:nvSpPr>
-          <p:cNvPr id="7" name="Text 5"/>
-          <p:cNvSpPr/>
-          <p:nvPr/>
-        </p:nvSpPr>
-        <p:spPr>
-          <a:xfrm>
-            <a:off x="896112" y="4581144"/>
-            <a:ext cx="10454335" cy="740664"/>
-          </a:xfrm>
-          <a:prstGeom prst="rect">
-            <a:avLst/>
-          </a:prstGeom>
-          <a:noFill/>
-          <a:ln/>
-        </p:spPr>
-        <p:txBody>
-          <a:bodyPr wrap="square" rtlCol="0" anchor="t"/>
-          <a:lstStyle/>
-          <a:p>
-            <a:pPr algn="l" indent="0" marL="0">
-              <a:lnSpc>
-                <a:spcPct val="115000"/>
-              </a:lnSpc>
-              <a:buNone/>
-            </a:pPr>
-            <a:r>
-              <a:rPr lang="en-US" sz="1800" b="1" dirty="0">
-                <a:solidFill>
-                  <a:srgbClr val="1F4E9C"/>
-                </a:solidFill>
-                <a:latin typeface="微软雅黑" pitchFamily="34" charset="0"/>
-                <a:ea typeface="微软雅黑" pitchFamily="34" charset="-122"/>
-                <a:cs typeface="微软雅黑" pitchFamily="34" charset="-120"/>
-              </a:rPr>
-              <a:t>•  </a:t>
-            </a:r>
-            <a:pPr algn="l" indent="0" marL="0">
-              <a:lnSpc>
-                <a:spcPct val="115000"/>
-              </a:lnSpc>
-              <a:buNone/>
-            </a:pPr>
-            <a:r>
-              <a:rPr lang="en-US" sz="1800" b="1" dirty="0">
-                <a:solidFill>
-                  <a:srgbClr val="000000"/>
-                </a:solidFill>
-              </a:rPr>
-              <a:t>#define</a:t>
-            </a:r>
-            <a:pPr algn="l" indent="0" marL="0">
-              <a:lnSpc>
-                <a:spcPct val="115000"/>
-              </a:lnSpc>
-              <a:buNone/>
-            </a:pPr>
-            <a:r>
-              <a:rPr lang="en-US" sz="1800" dirty="0">
-                <a:solidFill>
-                  <a:srgbClr val="000000"/>
-                </a:solidFill>
-              </a:rPr>
-              <a:t>：给常量起名字，改一处全变——802真题里 MaxSize 就是这样来的</a:t>
-            </a:r>
-            <a:endParaRPr lang="en-US" sz="1800" dirty="0"/>
-          </a:p>
-        </p:txBody>
-      </p:sp>
-      <p:sp>
-        <p:nvSpPr>
-          <p:cNvPr id="8" name="Text 6"/>
-          <p:cNvSpPr/>
-          <p:nvPr/>
-        </p:nvSpPr>
-        <p:spPr>
-          <a:xfrm>
-            <a:off x="896112" y="5394960"/>
-            <a:ext cx="10454335" cy="397764"/>
-          </a:xfrm>
-          <a:prstGeom prst="rect">
-            <a:avLst/>
-          </a:prstGeom>
-          <a:noFill/>
-          <a:ln/>
-        </p:spPr>
-        <p:txBody>
-          <a:bodyPr wrap="square" rtlCol="0" anchor="t"/>
-          <a:lstStyle/>
-          <a:p>
-            <a:pPr algn="l" indent="0" marL="0">
-              <a:lnSpc>
-                <a:spcPct val="115000"/>
-              </a:lnSpc>
-              <a:buNone/>
-            </a:pPr>
-            <a:r>
-              <a:rPr lang="en-US" sz="1800" b="1" dirty="0">
-                <a:solidFill>
-                  <a:srgbClr val="1F4E9C"/>
-                </a:solidFill>
-                <a:latin typeface="微软雅黑" pitchFamily="34" charset="0"/>
-                <a:ea typeface="微软雅黑" pitchFamily="34" charset="-122"/>
-                <a:cs typeface="微软雅黑" pitchFamily="34" charset="-120"/>
-              </a:rPr>
-              <a:t>•  </a:t>
-            </a:r>
-            <a:pPr algn="l" indent="0" marL="0">
-              <a:lnSpc>
-                <a:spcPct val="115000"/>
-              </a:lnSpc>
-              <a:buNone/>
-            </a:pPr>
-            <a:r>
-              <a:rPr lang="en-US" sz="1800" b="1" dirty="0">
-                <a:solidFill>
-                  <a:srgbClr val="000000"/>
-                </a:solidFill>
-              </a:rPr>
-              <a:t>注释</a:t>
-            </a:r>
-            <a:pPr algn="l" indent="0" marL="0">
-              <a:lnSpc>
-                <a:spcPct val="115000"/>
-              </a:lnSpc>
-              <a:buNone/>
-            </a:pPr>
-            <a:r>
-              <a:rPr lang="en-US" sz="1800" dirty="0">
-                <a:solidFill>
-                  <a:srgbClr val="000000"/>
-                </a:solidFill>
-              </a:rPr>
-              <a:t>：写给人看的，电脑忽略——考试要求写算法思想，就是注释的放大版</a:t>
-            </a:r>
-            <a:endParaRPr lang="en-US" sz="1800" dirty="0"/>
-          </a:p>
-        </p:txBody>
-      </p:sp>
+      <p:graphicFrame>
+        <p:nvGraphicFramePr>
+          <p:cNvPr id="12" name="Table 0"/>
+          <p:cNvGraphicFramePr>
+            <a:graphicFrameLocks noGrp="1"/>
+          </p:cNvGraphicFramePr>
+          <p:nvPr>
+            <p:extLst>
+              <p:ext uri="{D42A27DB-BD31-4B8C-83A1-F6EECF244321}">
+                <p14:modId xmlns:p14="http://schemas.microsoft.com/office/powerpoint/2010/main" val="1579011935"/>
+              </p:ext>
+            </p:extLst>
+          </p:nvPr>
+        </p:nvGraphicFramePr>
+        <p:xfrm>
+          <a:off x="822960" y="2395728"/>
+          <a:ext cx="10545775" cy="914400"/>
+        </p:xfrm>
+        <a:graphic>
+          <a:graphicData uri="http://schemas.openxmlformats.org/drawingml/2006/table">
+            <a:tbl>
+              <a:tblPr/>
+              <a:tblGrid>
+                <a:gridCol w="3515258"/>
+                <a:gridCol w="3515258"/>
+                <a:gridCol w="3515258"/>
+              </a:tblGrid>
+              <a:tr h="420624">
+                <a:tc>
+                  <a:txBody>
+                    <a:bodyPr/>
+                    <a:lstStyle/>
+                    <a:p>
+                      <a:pPr algn="ctr" indent="0" marL="0">
+                        <a:buNone/>
+                      </a:pPr>
+                      <a:r>
+                        <a:rPr lang="en-US" sz="1500" b="1" dirty="0">
+                          <a:solidFill>
+                            <a:srgbClr val="1F4E9C"/>
+                          </a:solidFill>
+                          <a:latin typeface="微软雅黑" pitchFamily="34" charset="0"/>
+                          <a:ea typeface="微软雅黑" pitchFamily="34" charset="-122"/>
+                          <a:cs typeface="微软雅黑" pitchFamily="34" charset="-120"/>
+                        </a:rPr>
+                        <a:t>关键点</a:t>
+                      </a:r>
+                      <a:endParaRPr lang="en-US" sz="1500" dirty="0">
+                        <a:latin typeface="微软雅黑" charset="0"/>
+                        <a:ea typeface="微软雅黑" charset="0"/>
+                        <a:cs typeface="微软雅黑" charset="0"/>
+                      </a:endParaRPr>
+                    </a:p>
+                  </a:txBody>
+                  <a:tcPr marL="91440" marR="91440" marT="45720" marB="45720" anchor="ctr">
+                    <a:lnL w="9525" cap="flat" cmpd="sng" algn="ctr">
+                      <a:solidFill>
+                        <a:srgbClr val="D8DBE0"/>
+                      </a:solidFill>
+                      <a:prstDash val="solid"/>
+                      <a:round/>
+                      <a:headEnd type="none" w="med" len="med"/>
+                      <a:tailEnd type="none" w="med" len="med"/>
+                    </a:lnL>
+                    <a:lnR w="9525" cap="flat" cmpd="sng" algn="ctr">
+                      <a:solidFill>
+                        <a:srgbClr val="D8DBE0"/>
+                      </a:solidFill>
+                      <a:prstDash val="solid"/>
+                      <a:round/>
+                      <a:headEnd type="none" w="med" len="med"/>
+                      <a:tailEnd type="none" w="med" len="med"/>
+                    </a:lnR>
+                    <a:lnT w="9525" cap="flat" cmpd="sng" algn="ctr">
+                      <a:solidFill>
+                        <a:srgbClr val="D8DBE0"/>
+                      </a:solidFill>
+                      <a:prstDash val="solid"/>
+                      <a:round/>
+                      <a:headEnd type="none" w="med" len="med"/>
+                      <a:tailEnd type="none" w="med" len="med"/>
+                    </a:lnT>
+                    <a:lnB w="9525" cap="flat" cmpd="sng" algn="ctr">
+                      <a:solidFill>
+                        <a:srgbClr val="D8DBE0"/>
+                      </a:solidFill>
+                      <a:prstDash val="solid"/>
+                      <a:round/>
+                      <a:headEnd type="none" w="med" len="med"/>
+                      <a:tailEnd type="none" w="med" len="med"/>
+                    </a:lnB>
+                    <a:solidFill>
+                      <a:srgbClr val="F5F6F7"/>
+                    </a:solidFill>
+                  </a:tcPr>
+                </a:tc>
+                <a:tc>
+                  <a:txBody>
+                    <a:bodyPr/>
+                    <a:lstStyle/>
+                    <a:p>
+                      <a:pPr algn="ctr" indent="0" marL="0">
+                        <a:buNone/>
+                      </a:pPr>
+                      <a:r>
+                        <a:rPr lang="en-US" sz="1500" b="1" dirty="0">
+                          <a:solidFill>
+                            <a:srgbClr val="1F4E9C"/>
+                          </a:solidFill>
+                          <a:latin typeface="微软雅黑" pitchFamily="34" charset="0"/>
+                          <a:ea typeface="微软雅黑" pitchFamily="34" charset="-122"/>
+                          <a:cs typeface="微软雅黑" pitchFamily="34" charset="-120"/>
+                        </a:rPr>
+                        <a:t>它是干嘛的</a:t>
+                      </a:r>
+                      <a:endParaRPr lang="en-US" sz="1500" dirty="0">
+                        <a:latin typeface="微软雅黑" charset="0"/>
+                        <a:ea typeface="微软雅黑" charset="0"/>
+                        <a:cs typeface="微软雅黑" charset="0"/>
+                      </a:endParaRPr>
+                    </a:p>
+                  </a:txBody>
+                  <a:tcPr marL="91440" marR="91440" marT="45720" marB="45720" anchor="ctr">
+                    <a:lnL w="9525" cap="flat" cmpd="sng" algn="ctr">
+                      <a:solidFill>
+                        <a:srgbClr val="D8DBE0"/>
+                      </a:solidFill>
+                      <a:prstDash val="solid"/>
+                      <a:round/>
+                      <a:headEnd type="none" w="med" len="med"/>
+                      <a:tailEnd type="none" w="med" len="med"/>
+                    </a:lnL>
+                    <a:lnR w="9525" cap="flat" cmpd="sng" algn="ctr">
+                      <a:solidFill>
+                        <a:srgbClr val="D8DBE0"/>
+                      </a:solidFill>
+                      <a:prstDash val="solid"/>
+                      <a:round/>
+                      <a:headEnd type="none" w="med" len="med"/>
+                      <a:tailEnd type="none" w="med" len="med"/>
+                    </a:lnR>
+                    <a:lnT w="9525" cap="flat" cmpd="sng" algn="ctr">
+                      <a:solidFill>
+                        <a:srgbClr val="D8DBE0"/>
+                      </a:solidFill>
+                      <a:prstDash val="solid"/>
+                      <a:round/>
+                      <a:headEnd type="none" w="med" len="med"/>
+                      <a:tailEnd type="none" w="med" len="med"/>
+                    </a:lnT>
+                    <a:lnB w="9525" cap="flat" cmpd="sng" algn="ctr">
+                      <a:solidFill>
+                        <a:srgbClr val="D8DBE0"/>
+                      </a:solidFill>
+                      <a:prstDash val="solid"/>
+                      <a:round/>
+                      <a:headEnd type="none" w="med" len="med"/>
+                      <a:tailEnd type="none" w="med" len="med"/>
+                    </a:lnB>
+                    <a:solidFill>
+                      <a:srgbClr val="F5F6F7"/>
+                    </a:solidFill>
+                  </a:tcPr>
+                </a:tc>
+                <a:tc>
+                  <a:txBody>
+                    <a:bodyPr/>
+                    <a:lstStyle/>
+                    <a:p>
+                      <a:pPr algn="ctr" indent="0" marL="0">
+                        <a:buNone/>
+                      </a:pPr>
+                      <a:r>
+                        <a:rPr lang="en-US" sz="1500" b="1" dirty="0">
+                          <a:solidFill>
+                            <a:srgbClr val="1F4E9C"/>
+                          </a:solidFill>
+                          <a:latin typeface="微软雅黑" pitchFamily="34" charset="0"/>
+                          <a:ea typeface="微软雅黑" pitchFamily="34" charset="-122"/>
+                          <a:cs typeface="微软雅黑" pitchFamily="34" charset="-120"/>
+                        </a:rPr>
+                        <a:t>弄错会怎样</a:t>
+                      </a:r>
+                      <a:endParaRPr lang="en-US" sz="1500" dirty="0">
+                        <a:latin typeface="微软雅黑" charset="0"/>
+                        <a:ea typeface="微软雅黑" charset="0"/>
+                        <a:cs typeface="微软雅黑" charset="0"/>
+                      </a:endParaRPr>
+                    </a:p>
+                  </a:txBody>
+                  <a:tcPr marL="91440" marR="91440" marT="45720" marB="45720" anchor="ctr">
+                    <a:lnL w="9525" cap="flat" cmpd="sng" algn="ctr">
+                      <a:solidFill>
+                        <a:srgbClr val="D8DBE0"/>
+                      </a:solidFill>
+                      <a:prstDash val="solid"/>
+                      <a:round/>
+                      <a:headEnd type="none" w="med" len="med"/>
+                      <a:tailEnd type="none" w="med" len="med"/>
+                    </a:lnL>
+                    <a:lnR w="9525" cap="flat" cmpd="sng" algn="ctr">
+                      <a:solidFill>
+                        <a:srgbClr val="D8DBE0"/>
+                      </a:solidFill>
+                      <a:prstDash val="solid"/>
+                      <a:round/>
+                      <a:headEnd type="none" w="med" len="med"/>
+                      <a:tailEnd type="none" w="med" len="med"/>
+                    </a:lnR>
+                    <a:lnT w="9525" cap="flat" cmpd="sng" algn="ctr">
+                      <a:solidFill>
+                        <a:srgbClr val="D8DBE0"/>
+                      </a:solidFill>
+                      <a:prstDash val="solid"/>
+                      <a:round/>
+                      <a:headEnd type="none" w="med" len="med"/>
+                      <a:tailEnd type="none" w="med" len="med"/>
+                    </a:lnT>
+                    <a:lnB w="9525" cap="flat" cmpd="sng" algn="ctr">
+                      <a:solidFill>
+                        <a:srgbClr val="D8DBE0"/>
+                      </a:solidFill>
+                      <a:prstDash val="solid"/>
+                      <a:round/>
+                      <a:headEnd type="none" w="med" len="med"/>
+                      <a:tailEnd type="none" w="med" len="med"/>
+                    </a:lnB>
+                    <a:solidFill>
+                      <a:srgbClr val="F5F6F7"/>
+                    </a:solidFill>
+                  </a:tcPr>
+                </a:tc>
+              </a:tr>
+              <a:tr h="420624">
+                <a:tc>
+                  <a:txBody>
+                    <a:bodyPr/>
+                    <a:lstStyle/>
+                    <a:p>
+                      <a:pPr algn="ctr" indent="0" marL="0">
+                        <a:buNone/>
+                      </a:pPr>
+                      <a:r>
+                        <a:rPr lang="en-US" sz="1500" dirty="0">
+                          <a:solidFill>
+                            <a:srgbClr val="1F2329"/>
+                          </a:solidFill>
+                          <a:latin typeface="微软雅黑" pitchFamily="34" charset="0"/>
+                          <a:ea typeface="微软雅黑" pitchFamily="34" charset="-122"/>
+                          <a:cs typeface="微软雅黑" pitchFamily="34" charset="-120"/>
+                        </a:rPr>
+                        <a:t>main是入口</a:t>
+                      </a:r>
+                      <a:endParaRPr lang="en-US" sz="1500" dirty="0">
+                        <a:latin typeface="微软雅黑" charset="0"/>
+                        <a:ea typeface="微软雅黑" charset="0"/>
+                        <a:cs typeface="微软雅黑" charset="0"/>
+                      </a:endParaRPr>
+                    </a:p>
+                  </a:txBody>
+                  <a:tcPr marL="91440" marR="91440" marT="45720" marB="45720" anchor="ctr">
+                    <a:lnL w="9525" cap="flat" cmpd="sng" algn="ctr">
+                      <a:solidFill>
+                        <a:srgbClr val="D8DBE0"/>
+                      </a:solidFill>
+                      <a:prstDash val="solid"/>
+                      <a:round/>
+                      <a:headEnd type="none" w="med" len="med"/>
+                      <a:tailEnd type="none" w="med" len="med"/>
+                    </a:lnL>
+                    <a:lnR w="9525" cap="flat" cmpd="sng" algn="ctr">
+                      <a:solidFill>
+                        <a:srgbClr val="D8DBE0"/>
+                      </a:solidFill>
+                      <a:prstDash val="solid"/>
+                      <a:round/>
+                      <a:headEnd type="none" w="med" len="med"/>
+                      <a:tailEnd type="none" w="med" len="med"/>
+                    </a:lnR>
+                    <a:lnT w="9525" cap="flat" cmpd="sng" algn="ctr">
+                      <a:solidFill>
+                        <a:srgbClr val="D8DBE0"/>
+                      </a:solidFill>
+                      <a:prstDash val="solid"/>
+                      <a:round/>
+                      <a:headEnd type="none" w="med" len="med"/>
+                      <a:tailEnd type="none" w="med" len="med"/>
+                    </a:lnT>
+                    <a:lnB w="9525" cap="flat" cmpd="sng" algn="ctr">
+                      <a:solidFill>
+                        <a:srgbClr val="D8DBE0"/>
+                      </a:solidFill>
+                      <a:prstDash val="solid"/>
+                      <a:round/>
+                      <a:headEnd type="none" w="med" len="med"/>
+                      <a:tailEnd type="none" w="med" len="med"/>
+                    </a:lnB>
+                    <a:solidFill>
+                      <a:srgbClr val="FFFFFF"/>
+                    </a:solidFill>
+                  </a:tcPr>
+                </a:tc>
+                <a:tc>
+                  <a:txBody>
+                    <a:bodyPr/>
+                    <a:lstStyle/>
+                    <a:p>
+                      <a:pPr algn="ctr" indent="0" marL="0">
+                        <a:buNone/>
+                      </a:pPr>
+                      <a:r>
+                        <a:rPr lang="en-US" sz="1500" dirty="0">
+                          <a:solidFill>
+                            <a:srgbClr val="1F2329"/>
+                          </a:solidFill>
+                          <a:latin typeface="微软雅黑" pitchFamily="34" charset="0"/>
+                          <a:ea typeface="微软雅黑" pitchFamily="34" charset="-122"/>
+                          <a:cs typeface="微软雅黑" pitchFamily="34" charset="-120"/>
+                        </a:rPr>
+                        <a:t>程序永远从main开始执行</a:t>
+                      </a:r>
+                      <a:endParaRPr lang="en-US" sz="1500" dirty="0">
+                        <a:latin typeface="微软雅黑" charset="0"/>
+                        <a:ea typeface="微软雅黑" charset="0"/>
+                        <a:cs typeface="微软雅黑" charset="0"/>
+                      </a:endParaRPr>
+                    </a:p>
+                  </a:txBody>
+                  <a:tcPr marL="91440" marR="91440" marT="45720" marB="45720" anchor="ctr">
+                    <a:lnL w="9525" cap="flat" cmpd="sng" algn="ctr">
+                      <a:solidFill>
+                        <a:srgbClr val="D8DBE0"/>
+                      </a:solidFill>
+                      <a:prstDash val="solid"/>
+                      <a:round/>
+                      <a:headEnd type="none" w="med" len="med"/>
+                      <a:tailEnd type="none" w="med" len="med"/>
+                    </a:lnL>
+                    <a:lnR w="9525" cap="flat" cmpd="sng" algn="ctr">
+                      <a:solidFill>
+                        <a:srgbClr val="D8DBE0"/>
+                      </a:solidFill>
+                      <a:prstDash val="solid"/>
+                      <a:round/>
+                      <a:headEnd type="none" w="med" len="med"/>
+                      <a:tailEnd type="none" w="med" len="med"/>
+                    </a:lnR>
+                    <a:lnT w="9525" cap="flat" cmpd="sng" algn="ctr">
+                      <a:solidFill>
+                        <a:srgbClr val="D8DBE0"/>
+                      </a:solidFill>
+                      <a:prstDash val="solid"/>
+                      <a:round/>
+                      <a:headEnd type="none" w="med" len="med"/>
+                      <a:tailEnd type="none" w="med" len="med"/>
+                    </a:lnT>
+                    <a:lnB w="9525" cap="flat" cmpd="sng" algn="ctr">
+                      <a:solidFill>
+                        <a:srgbClr val="D8DBE0"/>
+                      </a:solidFill>
+                      <a:prstDash val="solid"/>
+                      <a:round/>
+                      <a:headEnd type="none" w="med" len="med"/>
+                      <a:tailEnd type="none" w="med" len="med"/>
+                    </a:lnB>
+                    <a:solidFill>
+                      <a:srgbClr val="FFFFFF"/>
+                    </a:solidFill>
+                  </a:tcPr>
+                </a:tc>
+                <a:tc>
+                  <a:txBody>
+                    <a:bodyPr/>
+                    <a:lstStyle/>
+                    <a:p>
+                      <a:pPr algn="ctr" indent="0" marL="0">
+                        <a:buNone/>
+                      </a:pPr>
+                      <a:r>
+                        <a:rPr lang="en-US" sz="1500" dirty="0">
+                          <a:solidFill>
+                            <a:srgbClr val="1F2329"/>
+                          </a:solidFill>
+                          <a:latin typeface="微软雅黑" pitchFamily="34" charset="0"/>
+                          <a:ea typeface="微软雅黑" pitchFamily="34" charset="-122"/>
+                          <a:cs typeface="微软雅黑" pitchFamily="34" charset="-120"/>
+                        </a:rPr>
+                        <a:t>读陌生代码先找main，找不到就读不懂</a:t>
+                      </a:r>
+                      <a:endParaRPr lang="en-US" sz="1500" dirty="0">
+                        <a:latin typeface="微软雅黑" charset="0"/>
+                        <a:ea typeface="微软雅黑" charset="0"/>
+                        <a:cs typeface="微软雅黑" charset="0"/>
+                      </a:endParaRPr>
+                    </a:p>
+                  </a:txBody>
+                  <a:tcPr marL="91440" marR="91440" marT="45720" marB="45720" anchor="ctr">
+                    <a:lnL w="9525" cap="flat" cmpd="sng" algn="ctr">
+                      <a:solidFill>
+                        <a:srgbClr val="D8DBE0"/>
+                      </a:solidFill>
+                      <a:prstDash val="solid"/>
+                      <a:round/>
+                      <a:headEnd type="none" w="med" len="med"/>
+                      <a:tailEnd type="none" w="med" len="med"/>
+                    </a:lnL>
+                    <a:lnR w="9525" cap="flat" cmpd="sng" algn="ctr">
+                      <a:solidFill>
+                        <a:srgbClr val="D8DBE0"/>
+                      </a:solidFill>
+                      <a:prstDash val="solid"/>
+                      <a:round/>
+                      <a:headEnd type="none" w="med" len="med"/>
+                      <a:tailEnd type="none" w="med" len="med"/>
+                    </a:lnR>
+                    <a:lnT w="9525" cap="flat" cmpd="sng" algn="ctr">
+                      <a:solidFill>
+                        <a:srgbClr val="D8DBE0"/>
+                      </a:solidFill>
+                      <a:prstDash val="solid"/>
+                      <a:round/>
+                      <a:headEnd type="none" w="med" len="med"/>
+                      <a:tailEnd type="none" w="med" len="med"/>
+                    </a:lnT>
+                    <a:lnB w="9525" cap="flat" cmpd="sng" algn="ctr">
+                      <a:solidFill>
+                        <a:srgbClr val="D8DBE0"/>
+                      </a:solidFill>
+                      <a:prstDash val="solid"/>
+                      <a:round/>
+                      <a:headEnd type="none" w="med" len="med"/>
+                      <a:tailEnd type="none" w="med" len="med"/>
+                    </a:lnB>
+                    <a:solidFill>
+                      <a:srgbClr val="FFFFFF"/>
+                    </a:solidFill>
+                  </a:tcPr>
+                </a:tc>
+              </a:tr>
+              <a:tr h="420624">
+                <a:tc>
+                  <a:txBody>
+                    <a:bodyPr/>
+                    <a:lstStyle/>
+                    <a:p>
+                      <a:pPr algn="ctr" indent="0" marL="0">
+                        <a:buNone/>
+                      </a:pPr>
+                      <a:r>
+                        <a:rPr lang="en-US" sz="1500" dirty="0">
+                          <a:solidFill>
+                            <a:srgbClr val="1F2329"/>
+                          </a:solidFill>
+                          <a:latin typeface="微软雅黑" pitchFamily="34" charset="0"/>
+                          <a:ea typeface="微软雅黑" pitchFamily="34" charset="-122"/>
+                          <a:cs typeface="微软雅黑" pitchFamily="34" charset="-120"/>
+                        </a:rPr>
+                        <a:t>printf原样输出</a:t>
+                      </a:r>
+                      <a:endParaRPr lang="en-US" sz="1500" dirty="0">
+                        <a:latin typeface="微软雅黑" charset="0"/>
+                        <a:ea typeface="微软雅黑" charset="0"/>
+                        <a:cs typeface="微软雅黑" charset="0"/>
+                      </a:endParaRPr>
+                    </a:p>
+                  </a:txBody>
+                  <a:tcPr marL="91440" marR="91440" marT="45720" marB="45720" anchor="ctr">
+                    <a:lnL w="9525" cap="flat" cmpd="sng" algn="ctr">
+                      <a:solidFill>
+                        <a:srgbClr val="D8DBE0"/>
+                      </a:solidFill>
+                      <a:prstDash val="solid"/>
+                      <a:round/>
+                      <a:headEnd type="none" w="med" len="med"/>
+                      <a:tailEnd type="none" w="med" len="med"/>
+                    </a:lnL>
+                    <a:lnR w="9525" cap="flat" cmpd="sng" algn="ctr">
+                      <a:solidFill>
+                        <a:srgbClr val="D8DBE0"/>
+                      </a:solidFill>
+                      <a:prstDash val="solid"/>
+                      <a:round/>
+                      <a:headEnd type="none" w="med" len="med"/>
+                      <a:tailEnd type="none" w="med" len="med"/>
+                    </a:lnR>
+                    <a:lnT w="9525" cap="flat" cmpd="sng" algn="ctr">
+                      <a:solidFill>
+                        <a:srgbClr val="D8DBE0"/>
+                      </a:solidFill>
+                      <a:prstDash val="solid"/>
+                      <a:round/>
+                      <a:headEnd type="none" w="med" len="med"/>
+                      <a:tailEnd type="none" w="med" len="med"/>
+                    </a:lnT>
+                    <a:lnB w="9525" cap="flat" cmpd="sng" algn="ctr">
+                      <a:solidFill>
+                        <a:srgbClr val="D8DBE0"/>
+                      </a:solidFill>
+                      <a:prstDash val="solid"/>
+                      <a:round/>
+                      <a:headEnd type="none" w="med" len="med"/>
+                      <a:tailEnd type="none" w="med" len="med"/>
+                    </a:lnB>
+                    <a:solidFill>
+                      <a:srgbClr val="FFFFFF"/>
+                    </a:solidFill>
+                  </a:tcPr>
+                </a:tc>
+                <a:tc>
+                  <a:txBody>
+                    <a:bodyPr/>
+                    <a:lstStyle/>
+                    <a:p>
+                      <a:pPr algn="ctr" indent="0" marL="0">
+                        <a:buNone/>
+                      </a:pPr>
+                      <a:r>
+                        <a:rPr lang="en-US" sz="1500" dirty="0">
+                          <a:solidFill>
+                            <a:srgbClr val="1F2329"/>
+                          </a:solidFill>
+                          <a:latin typeface="微软雅黑" pitchFamily="34" charset="0"/>
+                          <a:ea typeface="微软雅黑" pitchFamily="34" charset="-122"/>
+                          <a:cs typeface="微软雅黑" pitchFamily="34" charset="-120"/>
+                        </a:rPr>
+                        <a:t>双引号里写啥屏幕出啥</a:t>
+                      </a:r>
+                      <a:endParaRPr lang="en-US" sz="1500" dirty="0">
+                        <a:latin typeface="微软雅黑" charset="0"/>
+                        <a:ea typeface="微软雅黑" charset="0"/>
+                        <a:cs typeface="微软雅黑" charset="0"/>
+                      </a:endParaRPr>
+                    </a:p>
+                  </a:txBody>
+                  <a:tcPr marL="91440" marR="91440" marT="45720" marB="45720" anchor="ctr">
+                    <a:lnL w="9525" cap="flat" cmpd="sng" algn="ctr">
+                      <a:solidFill>
+                        <a:srgbClr val="D8DBE0"/>
+                      </a:solidFill>
+                      <a:prstDash val="solid"/>
+                      <a:round/>
+                      <a:headEnd type="none" w="med" len="med"/>
+                      <a:tailEnd type="none" w="med" len="med"/>
+                    </a:lnL>
+                    <a:lnR w="9525" cap="flat" cmpd="sng" algn="ctr">
+                      <a:solidFill>
+                        <a:srgbClr val="D8DBE0"/>
+                      </a:solidFill>
+                      <a:prstDash val="solid"/>
+                      <a:round/>
+                      <a:headEnd type="none" w="med" len="med"/>
+                      <a:tailEnd type="none" w="med" len="med"/>
+                    </a:lnR>
+                    <a:lnT w="9525" cap="flat" cmpd="sng" algn="ctr">
+                      <a:solidFill>
+                        <a:srgbClr val="D8DBE0"/>
+                      </a:solidFill>
+                      <a:prstDash val="solid"/>
+                      <a:round/>
+                      <a:headEnd type="none" w="med" len="med"/>
+                      <a:tailEnd type="none" w="med" len="med"/>
+                    </a:lnT>
+                    <a:lnB w="9525" cap="flat" cmpd="sng" algn="ctr">
+                      <a:solidFill>
+                        <a:srgbClr val="D8DBE0"/>
+                      </a:solidFill>
+                      <a:prstDash val="solid"/>
+                      <a:round/>
+                      <a:headEnd type="none" w="med" len="med"/>
+                      <a:tailEnd type="none" w="med" len="med"/>
+                    </a:lnB>
+                    <a:solidFill>
+                      <a:srgbClr val="FFFFFF"/>
+                    </a:solidFill>
+                  </a:tcPr>
+                </a:tc>
+                <a:tc>
+                  <a:txBody>
+                    <a:bodyPr/>
+                    <a:lstStyle/>
+                    <a:p>
+                      <a:pPr algn="ctr" indent="0" marL="0">
+                        <a:buNone/>
+                      </a:pPr>
+                      <a:r>
+                        <a:rPr lang="en-US" sz="1500" dirty="0">
+                          <a:solidFill>
+                            <a:srgbClr val="1F2329"/>
+                          </a:solidFill>
+                          <a:latin typeface="微软雅黑" pitchFamily="34" charset="0"/>
+                          <a:ea typeface="微软雅黑" pitchFamily="34" charset="-122"/>
+                          <a:cs typeface="微软雅黑" pitchFamily="34" charset="-120"/>
+                        </a:rPr>
+                        <a:t>写错别字、写空格都照打不误，电脑不纠错</a:t>
+                      </a:r>
+                      <a:endParaRPr lang="en-US" sz="1500" dirty="0">
+                        <a:latin typeface="微软雅黑" charset="0"/>
+                        <a:ea typeface="微软雅黑" charset="0"/>
+                        <a:cs typeface="微软雅黑" charset="0"/>
+                      </a:endParaRPr>
+                    </a:p>
+                  </a:txBody>
+                  <a:tcPr marL="91440" marR="91440" marT="45720" marB="45720" anchor="ctr">
+                    <a:lnL w="9525" cap="flat" cmpd="sng" algn="ctr">
+                      <a:solidFill>
+                        <a:srgbClr val="D8DBE0"/>
+                      </a:solidFill>
+                      <a:prstDash val="solid"/>
+                      <a:round/>
+                      <a:headEnd type="none" w="med" len="med"/>
+                      <a:tailEnd type="none" w="med" len="med"/>
+                    </a:lnL>
+                    <a:lnR w="9525" cap="flat" cmpd="sng" algn="ctr">
+                      <a:solidFill>
+                        <a:srgbClr val="D8DBE0"/>
+                      </a:solidFill>
+                      <a:prstDash val="solid"/>
+                      <a:round/>
+                      <a:headEnd type="none" w="med" len="med"/>
+                      <a:tailEnd type="none" w="med" len="med"/>
+                    </a:lnR>
+                    <a:lnT w="9525" cap="flat" cmpd="sng" algn="ctr">
+                      <a:solidFill>
+                        <a:srgbClr val="D8DBE0"/>
+                      </a:solidFill>
+                      <a:prstDash val="solid"/>
+                      <a:round/>
+                      <a:headEnd type="none" w="med" len="med"/>
+                      <a:tailEnd type="none" w="med" len="med"/>
+                    </a:lnT>
+                    <a:lnB w="9525" cap="flat" cmpd="sng" algn="ctr">
+                      <a:solidFill>
+                        <a:srgbClr val="D8DBE0"/>
+                      </a:solidFill>
+                      <a:prstDash val="solid"/>
+                      <a:round/>
+                      <a:headEnd type="none" w="med" len="med"/>
+                      <a:tailEnd type="none" w="med" len="med"/>
+                    </a:lnB>
+                    <a:solidFill>
+                      <a:srgbClr val="FFFFFF"/>
+                    </a:solidFill>
+                  </a:tcPr>
+                </a:tc>
+              </a:tr>
+              <a:tr h="420624">
+                <a:tc>
+                  <a:txBody>
+                    <a:bodyPr/>
+                    <a:lstStyle/>
+                    <a:p>
+                      <a:pPr algn="ctr" indent="0" marL="0">
+                        <a:buNone/>
+                      </a:pPr>
+                      <a:r>
+                        <a:rPr lang="en-US" sz="1500" dirty="0">
+                          <a:solidFill>
+                            <a:srgbClr val="1F2329"/>
+                          </a:solidFill>
+                          <a:latin typeface="微软雅黑" pitchFamily="34" charset="0"/>
+                          <a:ea typeface="微软雅黑" pitchFamily="34" charset="-122"/>
+                          <a:cs typeface="微软雅黑" pitchFamily="34" charset="-120"/>
+                        </a:rPr>
+                        <a:t>\n是一个整体</a:t>
+                      </a:r>
+                      <a:endParaRPr lang="en-US" sz="1500" dirty="0">
+                        <a:latin typeface="微软雅黑" charset="0"/>
+                        <a:ea typeface="微软雅黑" charset="0"/>
+                        <a:cs typeface="微软雅黑" charset="0"/>
+                      </a:endParaRPr>
+                    </a:p>
+                  </a:txBody>
+                  <a:tcPr marL="91440" marR="91440" marT="45720" marB="45720" anchor="ctr">
+                    <a:lnL w="9525" cap="flat" cmpd="sng" algn="ctr">
+                      <a:solidFill>
+                        <a:srgbClr val="D8DBE0"/>
+                      </a:solidFill>
+                      <a:prstDash val="solid"/>
+                      <a:round/>
+                      <a:headEnd type="none" w="med" len="med"/>
+                      <a:tailEnd type="none" w="med" len="med"/>
+                    </a:lnL>
+                    <a:lnR w="9525" cap="flat" cmpd="sng" algn="ctr">
+                      <a:solidFill>
+                        <a:srgbClr val="D8DBE0"/>
+                      </a:solidFill>
+                      <a:prstDash val="solid"/>
+                      <a:round/>
+                      <a:headEnd type="none" w="med" len="med"/>
+                      <a:tailEnd type="none" w="med" len="med"/>
+                    </a:lnR>
+                    <a:lnT w="9525" cap="flat" cmpd="sng" algn="ctr">
+                      <a:solidFill>
+                        <a:srgbClr val="D8DBE0"/>
+                      </a:solidFill>
+                      <a:prstDash val="solid"/>
+                      <a:round/>
+                      <a:headEnd type="none" w="med" len="med"/>
+                      <a:tailEnd type="none" w="med" len="med"/>
+                    </a:lnT>
+                    <a:lnB w="9525" cap="flat" cmpd="sng" algn="ctr">
+                      <a:solidFill>
+                        <a:srgbClr val="D8DBE0"/>
+                      </a:solidFill>
+                      <a:prstDash val="solid"/>
+                      <a:round/>
+                      <a:headEnd type="none" w="med" len="med"/>
+                      <a:tailEnd type="none" w="med" len="med"/>
+                    </a:lnB>
+                    <a:solidFill>
+                      <a:srgbClr val="FFFFFF"/>
+                    </a:solidFill>
+                  </a:tcPr>
+                </a:tc>
+                <a:tc>
+                  <a:txBody>
+                    <a:bodyPr/>
+                    <a:lstStyle/>
+                    <a:p>
+                      <a:pPr algn="ctr" indent="0" marL="0">
+                        <a:buNone/>
+                      </a:pPr>
+                      <a:r>
+                        <a:rPr lang="en-US" sz="1500" dirty="0">
+                          <a:solidFill>
+                            <a:srgbClr val="1F2329"/>
+                          </a:solidFill>
+                          <a:latin typeface="微软雅黑" pitchFamily="34" charset="0"/>
+                          <a:ea typeface="微软雅黑" pitchFamily="34" charset="-122"/>
+                          <a:cs typeface="微软雅黑" pitchFamily="34" charset="-120"/>
+                        </a:rPr>
+                        <a:t>换行，只让光标跳到下一行</a:t>
+                      </a:r>
+                      <a:endParaRPr lang="en-US" sz="1500" dirty="0">
+                        <a:latin typeface="微软雅黑" charset="0"/>
+                        <a:ea typeface="微软雅黑" charset="0"/>
+                        <a:cs typeface="微软雅黑" charset="0"/>
+                      </a:endParaRPr>
+                    </a:p>
+                  </a:txBody>
+                  <a:tcPr marL="91440" marR="91440" marT="45720" marB="45720" anchor="ctr">
+                    <a:lnL w="9525" cap="flat" cmpd="sng" algn="ctr">
+                      <a:solidFill>
+                        <a:srgbClr val="D8DBE0"/>
+                      </a:solidFill>
+                      <a:prstDash val="solid"/>
+                      <a:round/>
+                      <a:headEnd type="none" w="med" len="med"/>
+                      <a:tailEnd type="none" w="med" len="med"/>
+                    </a:lnL>
+                    <a:lnR w="9525" cap="flat" cmpd="sng" algn="ctr">
+                      <a:solidFill>
+                        <a:srgbClr val="D8DBE0"/>
+                      </a:solidFill>
+                      <a:prstDash val="solid"/>
+                      <a:round/>
+                      <a:headEnd type="none" w="med" len="med"/>
+                      <a:tailEnd type="none" w="med" len="med"/>
+                    </a:lnR>
+                    <a:lnT w="9525" cap="flat" cmpd="sng" algn="ctr">
+                      <a:solidFill>
+                        <a:srgbClr val="D8DBE0"/>
+                      </a:solidFill>
+                      <a:prstDash val="solid"/>
+                      <a:round/>
+                      <a:headEnd type="none" w="med" len="med"/>
+                      <a:tailEnd type="none" w="med" len="med"/>
+                    </a:lnT>
+                    <a:lnB w="9525" cap="flat" cmpd="sng" algn="ctr">
+                      <a:solidFill>
+                        <a:srgbClr val="D8DBE0"/>
+                      </a:solidFill>
+                      <a:prstDash val="solid"/>
+                      <a:round/>
+                      <a:headEnd type="none" w="med" len="med"/>
+                      <a:tailEnd type="none" w="med" len="med"/>
+                    </a:lnB>
+                    <a:solidFill>
+                      <a:srgbClr val="FFFFFF"/>
+                    </a:solidFill>
+                  </a:tcPr>
+                </a:tc>
+                <a:tc>
+                  <a:txBody>
+                    <a:bodyPr/>
+                    <a:lstStyle/>
+                    <a:p>
+                      <a:pPr algn="ctr" indent="0" marL="0">
+                        <a:buNone/>
+                      </a:pPr>
+                      <a:r>
+                        <a:rPr lang="en-US" sz="1500" dirty="0">
+                          <a:solidFill>
+                            <a:srgbClr val="1F2329"/>
+                          </a:solidFill>
+                          <a:latin typeface="微软雅黑" pitchFamily="34" charset="0"/>
+                          <a:ea typeface="微软雅黑" pitchFamily="34" charset="-122"/>
+                          <a:cs typeface="微软雅黑" pitchFamily="34" charset="-120"/>
+                        </a:rPr>
+                        <a:t>写成/n或漏写，所有输出挤成一行</a:t>
+                      </a:r>
+                      <a:endParaRPr lang="en-US" sz="1500" dirty="0">
+                        <a:latin typeface="微软雅黑" charset="0"/>
+                        <a:ea typeface="微软雅黑" charset="0"/>
+                        <a:cs typeface="微软雅黑" charset="0"/>
+                      </a:endParaRPr>
+                    </a:p>
+                  </a:txBody>
+                  <a:tcPr marL="91440" marR="91440" marT="45720" marB="45720" anchor="ctr">
+                    <a:lnL w="9525" cap="flat" cmpd="sng" algn="ctr">
+                      <a:solidFill>
+                        <a:srgbClr val="D8DBE0"/>
+                      </a:solidFill>
+                      <a:prstDash val="solid"/>
+                      <a:round/>
+                      <a:headEnd type="none" w="med" len="med"/>
+                      <a:tailEnd type="none" w="med" len="med"/>
+                    </a:lnL>
+                    <a:lnR w="9525" cap="flat" cmpd="sng" algn="ctr">
+                      <a:solidFill>
+                        <a:srgbClr val="D8DBE0"/>
+                      </a:solidFill>
+                      <a:prstDash val="solid"/>
+                      <a:round/>
+                      <a:headEnd type="none" w="med" len="med"/>
+                      <a:tailEnd type="none" w="med" len="med"/>
+                    </a:lnR>
+                    <a:lnT w="9525" cap="flat" cmpd="sng" algn="ctr">
+                      <a:solidFill>
+                        <a:srgbClr val="D8DBE0"/>
+                      </a:solidFill>
+                      <a:prstDash val="solid"/>
+                      <a:round/>
+                      <a:headEnd type="none" w="med" len="med"/>
+                      <a:tailEnd type="none" w="med" len="med"/>
+                    </a:lnT>
+                    <a:lnB w="9525" cap="flat" cmpd="sng" algn="ctr">
+                      <a:solidFill>
+                        <a:srgbClr val="D8DBE0"/>
+                      </a:solidFill>
+                      <a:prstDash val="solid"/>
+                      <a:round/>
+                      <a:headEnd type="none" w="med" len="med"/>
+                      <a:tailEnd type="none" w="med" len="med"/>
+                    </a:lnB>
+                    <a:solidFill>
+                      <a:srgbClr val="FFFFFF"/>
+                    </a:solidFill>
+                  </a:tcPr>
+                </a:tc>
+              </a:tr>
+              <a:tr h="420624">
+                <a:tc>
+                  <a:txBody>
+                    <a:bodyPr/>
+                    <a:lstStyle/>
+                    <a:p>
+                      <a:pPr algn="ctr" indent="0" marL="0">
+                        <a:buNone/>
+                      </a:pPr>
+                      <a:r>
+                        <a:rPr lang="en-US" sz="1500" dirty="0">
+                          <a:solidFill>
+                            <a:srgbClr val="1F2329"/>
+                          </a:solidFill>
+                          <a:latin typeface="微软雅黑" pitchFamily="34" charset="0"/>
+                          <a:ea typeface="微软雅黑" pitchFamily="34" charset="-122"/>
+                          <a:cs typeface="微软雅黑" pitchFamily="34" charset="-120"/>
+                        </a:rPr>
+                        <a:t>分号收尾</a:t>
+                      </a:r>
+                      <a:endParaRPr lang="en-US" sz="1500" dirty="0">
+                        <a:latin typeface="微软雅黑" charset="0"/>
+                        <a:ea typeface="微软雅黑" charset="0"/>
+                        <a:cs typeface="微软雅黑" charset="0"/>
+                      </a:endParaRPr>
+                    </a:p>
+                  </a:txBody>
+                  <a:tcPr marL="91440" marR="91440" marT="45720" marB="45720" anchor="ctr">
+                    <a:lnL w="9525" cap="flat" cmpd="sng" algn="ctr">
+                      <a:solidFill>
+                        <a:srgbClr val="D8DBE0"/>
+                      </a:solidFill>
+                      <a:prstDash val="solid"/>
+                      <a:round/>
+                      <a:headEnd type="none" w="med" len="med"/>
+                      <a:tailEnd type="none" w="med" len="med"/>
+                    </a:lnL>
+                    <a:lnR w="9525" cap="flat" cmpd="sng" algn="ctr">
+                      <a:solidFill>
+                        <a:srgbClr val="D8DBE0"/>
+                      </a:solidFill>
+                      <a:prstDash val="solid"/>
+                      <a:round/>
+                      <a:headEnd type="none" w="med" len="med"/>
+                      <a:tailEnd type="none" w="med" len="med"/>
+                    </a:lnR>
+                    <a:lnT w="9525" cap="flat" cmpd="sng" algn="ctr">
+                      <a:solidFill>
+                        <a:srgbClr val="D8DBE0"/>
+                      </a:solidFill>
+                      <a:prstDash val="solid"/>
+                      <a:round/>
+                      <a:headEnd type="none" w="med" len="med"/>
+                      <a:tailEnd type="none" w="med" len="med"/>
+                    </a:lnT>
+                    <a:lnB w="9525" cap="flat" cmpd="sng" algn="ctr">
+                      <a:solidFill>
+                        <a:srgbClr val="D8DBE0"/>
+                      </a:solidFill>
+                      <a:prstDash val="solid"/>
+                      <a:round/>
+                      <a:headEnd type="none" w="med" len="med"/>
+                      <a:tailEnd type="none" w="med" len="med"/>
+                    </a:lnB>
+                    <a:solidFill>
+                      <a:srgbClr val="FFFFFF"/>
+                    </a:solidFill>
+                  </a:tcPr>
+                </a:tc>
+                <a:tc>
+                  <a:txBody>
+                    <a:bodyPr/>
+                    <a:lstStyle/>
+                    <a:p>
+                      <a:pPr algn="ctr" indent="0" marL="0">
+                        <a:buNone/>
+                      </a:pPr>
+                      <a:r>
+                        <a:rPr lang="en-US" sz="1500" dirty="0">
+                          <a:solidFill>
+                            <a:srgbClr val="1F2329"/>
+                          </a:solidFill>
+                          <a:latin typeface="微软雅黑" pitchFamily="34" charset="0"/>
+                          <a:ea typeface="微软雅黑" pitchFamily="34" charset="-122"/>
+                          <a:cs typeface="微软雅黑" pitchFamily="34" charset="-120"/>
+                        </a:rPr>
+                        <a:t>每条语句末尾必须有分号</a:t>
+                      </a:r>
+                      <a:endParaRPr lang="en-US" sz="1500" dirty="0">
+                        <a:latin typeface="微软雅黑" charset="0"/>
+                        <a:ea typeface="微软雅黑" charset="0"/>
+                        <a:cs typeface="微软雅黑" charset="0"/>
+                      </a:endParaRPr>
+                    </a:p>
+                  </a:txBody>
+                  <a:tcPr marL="91440" marR="91440" marT="45720" marB="45720" anchor="ctr">
+                    <a:lnL w="9525" cap="flat" cmpd="sng" algn="ctr">
+                      <a:solidFill>
+                        <a:srgbClr val="D8DBE0"/>
+                      </a:solidFill>
+                      <a:prstDash val="solid"/>
+                      <a:round/>
+                      <a:headEnd type="none" w="med" len="med"/>
+                      <a:tailEnd type="none" w="med" len="med"/>
+                    </a:lnL>
+                    <a:lnR w="9525" cap="flat" cmpd="sng" algn="ctr">
+                      <a:solidFill>
+                        <a:srgbClr val="D8DBE0"/>
+                      </a:solidFill>
+                      <a:prstDash val="solid"/>
+                      <a:round/>
+                      <a:headEnd type="none" w="med" len="med"/>
+                      <a:tailEnd type="none" w="med" len="med"/>
+                    </a:lnR>
+                    <a:lnT w="9525" cap="flat" cmpd="sng" algn="ctr">
+                      <a:solidFill>
+                        <a:srgbClr val="D8DBE0"/>
+                      </a:solidFill>
+                      <a:prstDash val="solid"/>
+                      <a:round/>
+                      <a:headEnd type="none" w="med" len="med"/>
+                      <a:tailEnd type="none" w="med" len="med"/>
+                    </a:lnT>
+                    <a:lnB w="9525" cap="flat" cmpd="sng" algn="ctr">
+                      <a:solidFill>
+                        <a:srgbClr val="D8DBE0"/>
+                      </a:solidFill>
+                      <a:prstDash val="solid"/>
+                      <a:round/>
+                      <a:headEnd type="none" w="med" len="med"/>
+                      <a:tailEnd type="none" w="med" len="med"/>
+                    </a:lnB>
+                    <a:solidFill>
+                      <a:srgbClr val="FFFFFF"/>
+                    </a:solidFill>
+                  </a:tcPr>
+                </a:tc>
+                <a:tc>
+                  <a:txBody>
+                    <a:bodyPr/>
+                    <a:lstStyle/>
+                    <a:p>
+                      <a:pPr algn="ctr" indent="0" marL="0">
+                        <a:buNone/>
+                      </a:pPr>
+                      <a:r>
+                        <a:rPr lang="en-US" sz="1500" dirty="0">
+                          <a:solidFill>
+                            <a:srgbClr val="1F2329"/>
+                          </a:solidFill>
+                          <a:latin typeface="微软雅黑" pitchFamily="34" charset="0"/>
+                          <a:ea typeface="微软雅黑" pitchFamily="34" charset="-122"/>
+                          <a:cs typeface="微软雅黑" pitchFamily="34" charset="-120"/>
+                        </a:rPr>
+                        <a:t>漏一个就编译报错，报错位置还常不在漏的那行</a:t>
+                      </a:r>
+                      <a:endParaRPr lang="en-US" sz="1500" dirty="0">
+                        <a:latin typeface="微软雅黑" charset="0"/>
+                        <a:ea typeface="微软雅黑" charset="0"/>
+                        <a:cs typeface="微软雅黑" charset="0"/>
+                      </a:endParaRPr>
+                    </a:p>
+                  </a:txBody>
+                  <a:tcPr marL="91440" marR="91440" marT="45720" marB="45720" anchor="ctr">
+                    <a:lnL w="9525" cap="flat" cmpd="sng" algn="ctr">
+                      <a:solidFill>
+                        <a:srgbClr val="D8DBE0"/>
+                      </a:solidFill>
+                      <a:prstDash val="solid"/>
+                      <a:round/>
+                      <a:headEnd type="none" w="med" len="med"/>
+                      <a:tailEnd type="none" w="med" len="med"/>
+                    </a:lnL>
+                    <a:lnR w="9525" cap="flat" cmpd="sng" algn="ctr">
+                      <a:solidFill>
+                        <a:srgbClr val="D8DBE0"/>
+                      </a:solidFill>
+                      <a:prstDash val="solid"/>
+                      <a:round/>
+                      <a:headEnd type="none" w="med" len="med"/>
+                      <a:tailEnd type="none" w="med" len="med"/>
+                    </a:lnR>
+                    <a:lnT w="9525" cap="flat" cmpd="sng" algn="ctr">
+                      <a:solidFill>
+                        <a:srgbClr val="D8DBE0"/>
+                      </a:solidFill>
+                      <a:prstDash val="solid"/>
+                      <a:round/>
+                      <a:headEnd type="none" w="med" len="med"/>
+                      <a:tailEnd type="none" w="med" len="med"/>
+                    </a:lnT>
+                    <a:lnB w="9525" cap="flat" cmpd="sng" algn="ctr">
+                      <a:solidFill>
+                        <a:srgbClr val="D8DBE0"/>
+                      </a:solidFill>
+                      <a:prstDash val="solid"/>
+                      <a:round/>
+                      <a:headEnd type="none" w="med" len="med"/>
+                      <a:tailEnd type="none" w="med" len="med"/>
+                    </a:lnB>
+                    <a:solidFill>
+                      <a:srgbClr val="FFFFFF"/>
+                    </a:solidFill>
+                  </a:tcPr>
+                </a:tc>
+              </a:tr>
+            </a:tbl>
+          </a:graphicData>
+        </a:graphic>
+      </p:graphicFrame>
     </p:spTree>
   </p:cSld>
   <p:clrMapOvr>
@@ -3272,7 +4374,7 @@
                 <a:ea typeface="微软雅黑" pitchFamily="34" charset="-122"/>
                 <a:cs typeface="微软雅黑" pitchFamily="34" charset="-120"/>
               </a:rPr>
-              <a:t>12 / 15</a:t>
+              <a:t>12 / 17</a:t>
             </a:r>
             <a:endParaRPr lang="en-US" sz="1000" dirty="0"/>
           </a:p>
@@ -3311,7 +4413,7 @@
                 <a:ea typeface="微软雅黑" pitchFamily="34" charset="-122"/>
                 <a:cs typeface="微软雅黑" pitchFamily="34" charset="-120"/>
               </a:rPr>
-              <a:t>板书推演</a:t>
+              <a:t>两个小工具</a:t>
             </a:r>
             <a:endParaRPr lang="en-US" sz="1400" dirty="0"/>
           </a:p>
@@ -3350,7 +4452,7 @@
                 <a:ea typeface="微软雅黑" pitchFamily="34" charset="-122"/>
                 <a:cs typeface="微软雅黑" pitchFamily="34" charset="-120"/>
               </a:rPr>
-              <a:t>从零手写第一个程序</a:t>
+              <a:t>#define 与注释</a:t>
             </a:r>
             <a:endParaRPr lang="en-US" sz="2800" dirty="0"/>
           </a:p>
@@ -3358,14 +4460,39 @@
       </p:sp>
       <p:sp>
         <p:nvSpPr>
-          <p:cNvPr id="5" name="Text 3"/>
+          <p:cNvPr id="5" name="Shape 3"/>
           <p:cNvSpPr/>
           <p:nvPr/>
         </p:nvSpPr>
         <p:spPr>
           <a:xfrm>
-            <a:off x="822960" y="2194560"/>
-            <a:ext cx="10545775" cy="685800"/>
+            <a:off x="822960" y="2395728"/>
+            <a:ext cx="10545775" cy="1984248"/>
+          </a:xfrm>
+          <a:prstGeom prst="rect">
+            <a:avLst/>
+          </a:prstGeom>
+          <a:solidFill>
+            <a:srgbClr val="F5F6F7"/>
+          </a:solidFill>
+          <a:ln w="9525">
+            <a:solidFill>
+              <a:srgbClr val="D8DBE0"/>
+            </a:solidFill>
+            <a:prstDash val="solid"/>
+          </a:ln>
+        </p:spPr>
+      </p:sp>
+      <p:sp>
+        <p:nvSpPr>
+          <p:cNvPr id="6" name="Text 4"/>
+          <p:cNvSpPr/>
+          <p:nvPr/>
+        </p:nvSpPr>
+        <p:spPr>
+          <a:xfrm>
+            <a:off x="1078992" y="2505456"/>
+            <a:ext cx="10033711" cy="1764792"/>
           </a:xfrm>
           <a:prstGeom prst="rect">
             <a:avLst/>
@@ -3378,47 +4505,30 @@
           <a:lstStyle/>
           <a:p>
             <a:pPr algn="l" indent="0" marL="0">
-              <a:buNone/>
-            </a:pPr>
-            <a:r>
-              <a:rPr lang="en-US" sz="1600" dirty="0">
+              <a:lnSpc>
+                <a:spcPct val="125000"/>
+              </a:lnSpc>
+              <a:buNone/>
+            </a:pPr>
+            <a:r>
+              <a:rPr lang="en-US" sz="1400" dirty="0">
                 <a:solidFill>
                   <a:srgbClr val="1F2329"/>
                 </a:solidFill>
-                <a:latin typeface="微软雅黑" pitchFamily="34" charset="0"/>
-                <a:ea typeface="微软雅黑" pitchFamily="34" charset="-122"/>
-                <a:cs typeface="微软雅黑" pitchFamily="34" charset="-120"/>
-              </a:rPr>
-              <a:t>任务：在白纸上写出完整程序，让屏幕打印两行字（含换行、分号、return 0）。分六步：头文件 → main开头 → 第一行printf → 第二行printf → return 0 → 补右花括号</a:t>
-            </a:r>
-            <a:endParaRPr lang="en-US" sz="1600" dirty="0"/>
-          </a:p>
-        </p:txBody>
-      </p:sp>
-      <p:sp>
-        <p:nvSpPr>
-          <p:cNvPr id="6" name="Shape 4"/>
-          <p:cNvSpPr/>
-          <p:nvPr/>
-        </p:nvSpPr>
-        <p:spPr>
-          <a:xfrm>
-            <a:off x="822960" y="3017520"/>
-            <a:ext cx="10545775" cy="2788920"/>
-          </a:xfrm>
-          <a:prstGeom prst="rect">
-            <a:avLst/>
-          </a:prstGeom>
-          <a:solidFill>
-            <a:srgbClr val="FFFFFF"/>
-          </a:solidFill>
-          <a:ln w="12700">
-            <a:solidFill>
-              <a:srgbClr val="B9C0C9"/>
-            </a:solidFill>
-            <a:prstDash val="dash"/>
-          </a:ln>
-        </p:spPr>
+                <a:latin typeface="Consolas" pitchFamily="34" charset="0"/>
+                <a:ea typeface="Consolas" pitchFamily="34" charset="-122"/>
+                <a:cs typeface="Consolas" pitchFamily="34" charset="-120"/>
+              </a:rPr>
+              <a:t>#define MaxSize 1000      // 给1000起个名字：MaxSize
+#define PI 3.14            // 以后写PI，就是3.14
+// 这是单行注释：解释这行在干嘛（考试写"算法思想"靠它）
+/* 这是多行注释
+   可以写好几行 */
+</a:t>
+            </a:r>
+            <a:endParaRPr lang="en-US" sz="1400" dirty="0"/>
+          </a:p>
+        </p:txBody>
       </p:sp>
       <p:sp>
         <p:nvSpPr>
@@ -3428,8 +4538,8 @@
         </p:nvSpPr>
         <p:spPr>
           <a:xfrm>
-            <a:off x="822960" y="5349240"/>
-            <a:ext cx="10545775" cy="365760"/>
+            <a:off x="896112" y="4581144"/>
+            <a:ext cx="10454335" cy="740664"/>
           </a:xfrm>
           <a:prstGeom prst="rect">
             <a:avLst/>
@@ -3438,24 +4548,125 @@
           <a:ln/>
         </p:spPr>
         <p:txBody>
-          <a:bodyPr wrap="square" rtlCol="0" anchor="ctr"/>
+          <a:bodyPr wrap="square" rtlCol="0" anchor="t"/>
           <a:lstStyle/>
           <a:p>
-            <a:pPr algn="r" indent="0" marL="0">
-              <a:buNone/>
-            </a:pPr>
-            <a:r>
-              <a:rPr lang="en-US" sz="1200" dirty="0">
-                <a:solidFill>
-                  <a:srgbClr val="8A9099"/>
+            <a:pPr algn="l" indent="0" marL="0">
+              <a:lnSpc>
+                <a:spcPct val="115000"/>
+              </a:lnSpc>
+              <a:buNone/>
+            </a:pPr>
+            <a:r>
+              <a:rPr lang="en-US" sz="1800" b="1" dirty="0">
+                <a:solidFill>
+                  <a:srgbClr val="1F4E9C"/>
                 </a:solidFill>
                 <a:latin typeface="微软雅黑" pitchFamily="34" charset="0"/>
                 <a:ea typeface="微软雅黑" pitchFamily="34" charset="-122"/>
                 <a:cs typeface="微软雅黑" pitchFamily="34" charset="-120"/>
               </a:rPr>
-              <a:t>此处板书推演</a:t>
-            </a:r>
-            <a:endParaRPr lang="en-US" sz="1200" dirty="0"/>
+              <a:t>•  </a:t>
+            </a:r>
+            <a:pPr algn="l" indent="0" marL="0">
+              <a:lnSpc>
+                <a:spcPct val="115000"/>
+              </a:lnSpc>
+              <a:buNone/>
+            </a:pPr>
+            <a:r>
+              <a:rPr lang="en-US" sz="1800" b="1" dirty="0">
+                <a:solidFill>
+                  <a:srgbClr val="000000"/>
+                </a:solidFill>
+              </a:rPr>
+              <a:t>#define</a:t>
+            </a:r>
+            <a:pPr algn="l" indent="0" marL="0">
+              <a:lnSpc>
+                <a:spcPct val="115000"/>
+              </a:lnSpc>
+              <a:buNone/>
+            </a:pPr>
+            <a:r>
+              <a:rPr lang="en-US" sz="1800" dirty="0">
+                <a:solidFill>
+                  <a:srgbClr val="000000"/>
+                </a:solidFill>
+              </a:rPr>
+              <a:t>：给常量起名字，改一处全变——802真题里 MaxSize 就是这样来的</a:t>
+            </a:r>
+            <a:endParaRPr lang="en-US" sz="1800" dirty="0"/>
+          </a:p>
+        </p:txBody>
+      </p:sp>
+      <p:sp>
+        <p:nvSpPr>
+          <p:cNvPr id="8" name="Text 6"/>
+          <p:cNvSpPr/>
+          <p:nvPr/>
+        </p:nvSpPr>
+        <p:spPr>
+          <a:xfrm>
+            <a:off x="896112" y="5394960"/>
+            <a:ext cx="10454335" cy="397764"/>
+          </a:xfrm>
+          <a:prstGeom prst="rect">
+            <a:avLst/>
+          </a:prstGeom>
+          <a:noFill/>
+          <a:ln/>
+        </p:spPr>
+        <p:txBody>
+          <a:bodyPr wrap="square" rtlCol="0" anchor="t"/>
+          <a:lstStyle/>
+          <a:p>
+            <a:pPr algn="l" indent="0" marL="0">
+              <a:lnSpc>
+                <a:spcPct val="115000"/>
+              </a:lnSpc>
+              <a:buNone/>
+            </a:pPr>
+            <a:r>
+              <a:rPr lang="en-US" sz="1800" b="1" dirty="0">
+                <a:solidFill>
+                  <a:srgbClr val="1F4E9C"/>
+                </a:solidFill>
+                <a:latin typeface="微软雅黑" pitchFamily="34" charset="0"/>
+                <a:ea typeface="微软雅黑" pitchFamily="34" charset="-122"/>
+                <a:cs typeface="微软雅黑" pitchFamily="34" charset="-120"/>
+              </a:rPr>
+              <a:t>•  </a:t>
+            </a:r>
+            <a:pPr algn="l" indent="0" marL="0">
+              <a:lnSpc>
+                <a:spcPct val="115000"/>
+              </a:lnSpc>
+              <a:buNone/>
+            </a:pPr>
+            <a:r>
+              <a:rPr lang="en-US" sz="1800" b="1" dirty="0">
+                <a:solidFill>
+                  <a:srgbClr val="000000"/>
+                </a:solidFill>
+              </a:rPr>
+              <a:t>注释</a:t>
+            </a:r>
+            <a:pPr algn="l" indent="0" marL="0">
+              <a:lnSpc>
+                <a:spcPct val="115000"/>
+              </a:lnSpc>
+              <a:buNone/>
+            </a:pPr>
+            <a:r>
+              <a:rPr lang="en-US" sz="1800" dirty="0">
+                <a:solidFill>
+                  <a:srgbClr val="000000"/>
+                </a:solidFill>
+              </a:rPr>
+              <a:t>：写给人看的，电脑忽略——考试要求写算法思想，就是注释的放大版</a:t>
+            </a:r>
+            <a:endParaRPr lang="en-US" sz="1800" dirty="0"/>
           </a:p>
         </p:txBody>
       </p:sp>
@@ -3531,7 +4742,7 @@
                 <a:ea typeface="微软雅黑" pitchFamily="34" charset="-122"/>
                 <a:cs typeface="微软雅黑" pitchFamily="34" charset="-120"/>
               </a:rPr>
-              <a:t>13 / 15</a:t>
+              <a:t>13 / 17</a:t>
             </a:r>
             <a:endParaRPr lang="en-US" sz="1000" dirty="0"/>
           </a:p>
@@ -3570,7 +4781,7 @@
                 <a:ea typeface="微软雅黑" pitchFamily="34" charset="-122"/>
                 <a:cs typeface="微软雅黑" pitchFamily="34" charset="-120"/>
               </a:rPr>
-              <a:t>板书结论</a:t>
+              <a:t>亲眼看报错</a:t>
             </a:r>
             <a:endParaRPr lang="en-US" sz="1400" dirty="0"/>
           </a:p>
@@ -3609,7 +4820,7 @@
                 <a:ea typeface="微软雅黑" pitchFamily="34" charset="-122"/>
                 <a:cs typeface="微软雅黑" pitchFamily="34" charset="-120"/>
               </a:rPr>
-              <a:t>写出来的程序长这样</a:t>
+              <a:t>编译器会怎么骂你</a:t>
             </a:r>
             <a:endParaRPr lang="en-US" sz="2800" dirty="0"/>
           </a:p>
@@ -3624,7 +4835,7 @@
         <p:spPr>
           <a:xfrm>
             <a:off x="822960" y="2395728"/>
-            <a:ext cx="10545775" cy="1984248"/>
+            <a:ext cx="10545775" cy="1508760"/>
           </a:xfrm>
           <a:prstGeom prst="rect">
             <a:avLst/>
@@ -3649,7 +4860,7 @@
         <p:spPr>
           <a:xfrm>
             <a:off x="1078992" y="2505456"/>
-            <a:ext cx="10033711" cy="1764792"/>
+            <a:ext cx="10033711" cy="1289304"/>
           </a:xfrm>
           <a:prstGeom prst="rect">
             <a:avLst/>
@@ -3668,7 +4879,7 @@
               <a:buNone/>
             </a:pPr>
             <a:r>
-              <a:rPr lang="en-US" sz="1300" dirty="0">
+              <a:rPr lang="en-US" sz="1400" dirty="0">
                 <a:solidFill>
                   <a:srgbClr val="1F2329"/>
                 </a:solidFill>
@@ -3676,15 +4887,13 @@
                 <a:ea typeface="Consolas" pitchFamily="34" charset="-122"/>
                 <a:cs typeface="Consolas" pitchFamily="34" charset="-120"/>
               </a:rPr>
-              <a:t>#include &lt;stdio.h&gt;
-int main(){
-    printf("第一行\n");
-    printf("第二行\n");
-    return 0;
-}
+              <a:t>printf("你好")          // 少分号
+Int main()              // 大小写写混，int必须小写
+printf("你好");         // 中文引号
+int main(){             // 左花括号没配右花括号
 </a:t>
             </a:r>
-            <a:endParaRPr lang="en-US" sz="1300" dirty="0"/>
+            <a:endParaRPr lang="en-US" sz="1400" dirty="0"/>
           </a:p>
         </p:txBody>
       </p:sp>
@@ -3696,8 +4905,8 @@
         </p:nvSpPr>
         <p:spPr>
           <a:xfrm>
-            <a:off x="822960" y="4581144"/>
-            <a:ext cx="10545775" cy="358902"/>
+            <a:off x="896112" y="4105656"/>
+            <a:ext cx="10454335" cy="397764"/>
           </a:xfrm>
           <a:prstGeom prst="rect">
             <a:avLst/>
@@ -3710,58 +4919,78 @@
           <a:lstStyle/>
           <a:p>
             <a:pPr algn="l" indent="0" marL="0">
-              <a:buNone/>
-            </a:pPr>
-            <a:r>
-              <a:rPr lang="en-US" sz="1500" dirty="0">
-                <a:solidFill>
-                  <a:srgbClr val="8A9099"/>
+              <a:lnSpc>
+                <a:spcPct val="115000"/>
+              </a:lnSpc>
+              <a:buNone/>
+            </a:pPr>
+            <a:r>
+              <a:rPr lang="en-US" sz="1800" b="1" dirty="0">
+                <a:solidFill>
+                  <a:srgbClr val="1F4E9C"/>
                 </a:solidFill>
                 <a:latin typeface="微软雅黑" pitchFamily="34" charset="0"/>
                 <a:ea typeface="微软雅黑" pitchFamily="34" charset="-122"/>
                 <a:cs typeface="微软雅黑" pitchFamily="34" charset="-120"/>
               </a:rPr>
-              <a:t>运行结果：</a:t>
-            </a:r>
-            <a:endParaRPr lang="en-US" sz="1500" dirty="0"/>
-          </a:p>
-        </p:txBody>
-      </p:sp>
-      <p:sp>
-        <p:nvSpPr>
-          <p:cNvPr id="8" name="Shape 6"/>
+              <a:t>•  </a:t>
+            </a:r>
+            <a:pPr algn="l" indent="0" marL="0">
+              <a:lnSpc>
+                <a:spcPct val="115000"/>
+              </a:lnSpc>
+              <a:buNone/>
+            </a:pPr>
+            <a:r>
+              <a:rPr lang="en-US" sz="1800" dirty="0">
+                <a:solidFill>
+                  <a:srgbClr val="000000"/>
+                </a:solidFill>
+              </a:rPr>
+              <a:t>这四种错，</a:t>
+            </a:r>
+            <a:pPr algn="l" indent="0" marL="0">
+              <a:lnSpc>
+                <a:spcPct val="115000"/>
+              </a:lnSpc>
+              <a:buNone/>
+            </a:pPr>
+            <a:r>
+              <a:rPr lang="en-US" sz="1800" b="1" dirty="0">
+                <a:solidFill>
+                  <a:srgbClr val="000000"/>
+                </a:solidFill>
+              </a:rPr>
+              <a:t>犯一个编译器报一个</a:t>
+            </a:r>
+            <a:pPr algn="l" indent="0" marL="0">
+              <a:lnSpc>
+                <a:spcPct val="115000"/>
+              </a:lnSpc>
+              <a:buNone/>
+            </a:pPr>
+            <a:r>
+              <a:rPr lang="en-US" sz="1800" dirty="0">
+                <a:solidFill>
+                  <a:srgbClr val="000000"/>
+                </a:solidFill>
+              </a:rPr>
+              <a:t>，报错信息是英文，但翻来覆去就这四类</a:t>
+            </a:r>
+            <a:endParaRPr lang="en-US" sz="1800" dirty="0"/>
+          </a:p>
+        </p:txBody>
+      </p:sp>
+      <p:sp>
+        <p:nvSpPr>
+          <p:cNvPr id="8" name="Text 6"/>
           <p:cNvSpPr/>
           <p:nvPr/>
         </p:nvSpPr>
         <p:spPr>
           <a:xfrm>
-            <a:off x="822960" y="5049774"/>
-            <a:ext cx="10545775" cy="1033272"/>
-          </a:xfrm>
-          <a:prstGeom prst="rect">
-            <a:avLst/>
-          </a:prstGeom>
-          <a:solidFill>
-            <a:srgbClr val="F5F6F7"/>
-          </a:solidFill>
-          <a:ln w="9525">
-            <a:solidFill>
-              <a:srgbClr val="D8DBE0"/>
-            </a:solidFill>
-            <a:prstDash val="solid"/>
-          </a:ln>
-        </p:spPr>
-      </p:sp>
-      <p:sp>
-        <p:nvSpPr>
-          <p:cNvPr id="9" name="Text 7"/>
-          <p:cNvSpPr/>
-          <p:nvPr/>
-        </p:nvSpPr>
-        <p:spPr>
-          <a:xfrm>
-            <a:off x="1078992" y="5159502"/>
-            <a:ext cx="10033711" cy="813816"/>
+            <a:off x="896112" y="4576572"/>
+            <a:ext cx="10454335" cy="397764"/>
           </a:xfrm>
           <a:prstGeom prst="rect">
             <a:avLst/>
@@ -3775,24 +5004,64 @@
           <a:p>
             <a:pPr algn="l" indent="0" marL="0">
               <a:lnSpc>
-                <a:spcPct val="125000"/>
+                <a:spcPct val="115000"/>
               </a:lnSpc>
               <a:buNone/>
             </a:pPr>
             <a:r>
-              <a:rPr lang="en-US" sz="1300" dirty="0">
-                <a:solidFill>
-                  <a:srgbClr val="1F2329"/>
-                </a:solidFill>
-                <a:latin typeface="Consolas" pitchFamily="34" charset="0"/>
-                <a:ea typeface="Consolas" pitchFamily="34" charset="-122"/>
-                <a:cs typeface="Consolas" pitchFamily="34" charset="-120"/>
-              </a:rPr>
-              <a:t>第一行
-第二行
-</a:t>
-            </a:r>
-            <a:endParaRPr lang="en-US" sz="1300" dirty="0"/>
+              <a:rPr lang="en-US" sz="1800" b="1" dirty="0">
+                <a:solidFill>
+                  <a:srgbClr val="1F4E9C"/>
+                </a:solidFill>
+                <a:latin typeface="微软雅黑" pitchFamily="34" charset="0"/>
+                <a:ea typeface="微软雅黑" pitchFamily="34" charset="-122"/>
+                <a:cs typeface="微软雅黑" pitchFamily="34" charset="-120"/>
+              </a:rPr>
+              <a:t>•  </a:t>
+            </a:r>
+            <a:pPr algn="l" indent="0" marL="0">
+              <a:lnSpc>
+                <a:spcPct val="115000"/>
+              </a:lnSpc>
+              <a:buNone/>
+            </a:pPr>
+            <a:r>
+              <a:rPr lang="en-US" sz="1800" dirty="0">
+                <a:solidFill>
+                  <a:srgbClr val="000000"/>
+                </a:solidFill>
+              </a:rPr>
+              <a:t>养成习惯：</a:t>
+            </a:r>
+            <a:pPr algn="l" indent="0" marL="0">
+              <a:lnSpc>
+                <a:spcPct val="115000"/>
+              </a:lnSpc>
+              <a:buNone/>
+            </a:pPr>
+            <a:r>
+              <a:rPr lang="en-US" sz="1800" b="1" dirty="0">
+                <a:solidFill>
+                  <a:srgbClr val="000000"/>
+                </a:solidFill>
+              </a:rPr>
+              <a:t>写完先扫一遍分号、引号、花括号</a:t>
+            </a:r>
+            <a:pPr algn="l" indent="0" marL="0">
+              <a:lnSpc>
+                <a:spcPct val="115000"/>
+              </a:lnSpc>
+              <a:buNone/>
+            </a:pPr>
+            <a:r>
+              <a:rPr lang="en-US" sz="1800" dirty="0">
+                <a:solidFill>
+                  <a:srgbClr val="000000"/>
+                </a:solidFill>
+              </a:rPr>
+              <a:t>，再编译</a:t>
+            </a:r>
+            <a:endParaRPr lang="en-US" sz="1800" dirty="0"/>
           </a:p>
         </p:txBody>
       </p:sp>
@@ -3868,7 +5137,7 @@
                 <a:ea typeface="微软雅黑" pitchFamily="34" charset="-122"/>
                 <a:cs typeface="微软雅黑" pitchFamily="34" charset="-120"/>
               </a:rPr>
-              <a:t>14 / 15</a:t>
+              <a:t>14 / 17</a:t>
             </a:r>
             <a:endParaRPr lang="en-US" sz="1000" dirty="0"/>
           </a:p>
@@ -3907,7 +5176,7 @@
                 <a:ea typeface="微软雅黑" pitchFamily="34" charset="-122"/>
                 <a:cs typeface="微软雅黑" pitchFamily="34" charset="-120"/>
               </a:rPr>
-              <a:t>本节总结</a:t>
+              <a:t>板书推演</a:t>
             </a:r>
             <a:endParaRPr lang="en-US" sz="1400" dirty="0"/>
           </a:p>
@@ -3946,7 +5215,7 @@
                 <a:ea typeface="微软雅黑" pitchFamily="34" charset="-122"/>
                 <a:cs typeface="微软雅黑" pitchFamily="34" charset="-120"/>
               </a:rPr>
-              <a:t>总结</a:t>
+              <a:t>从零手写第一个程序</a:t>
             </a:r>
             <a:endParaRPr lang="en-US" sz="2800" dirty="0"/>
           </a:p>
@@ -3960,8 +5229,8 @@
         </p:nvSpPr>
         <p:spPr>
           <a:xfrm>
-            <a:off x="896112" y="2395728"/>
-            <a:ext cx="10454335" cy="397764"/>
+            <a:off x="822960" y="2194560"/>
+            <a:ext cx="10545775" cy="685800"/>
           </a:xfrm>
           <a:prstGeom prst="rect">
             <a:avLst/>
@@ -3974,64 +5243,58 @@
           <a:lstStyle/>
           <a:p>
             <a:pPr algn="l" indent="0" marL="0">
-              <a:lnSpc>
-                <a:spcPct val="115000"/>
-              </a:lnSpc>
-              <a:buNone/>
-            </a:pPr>
-            <a:r>
-              <a:rPr lang="en-US" sz="1800" b="1" dirty="0">
-                <a:solidFill>
-                  <a:srgbClr val="1F4E9C"/>
+              <a:buNone/>
+            </a:pPr>
+            <a:r>
+              <a:rPr lang="en-US" sz="1600" dirty="0">
+                <a:solidFill>
+                  <a:srgbClr val="1F2329"/>
                 </a:solidFill>
                 <a:latin typeface="微软雅黑" pitchFamily="34" charset="0"/>
                 <a:ea typeface="微软雅黑" pitchFamily="34" charset="-122"/>
                 <a:cs typeface="微软雅黑" pitchFamily="34" charset="-120"/>
               </a:rPr>
-              <a:t>•  </a:t>
-            </a:r>
-            <a:pPr algn="l" indent="0" marL="0">
-              <a:lnSpc>
-                <a:spcPct val="115000"/>
-              </a:lnSpc>
-              <a:buNone/>
-            </a:pPr>
-            <a:r>
-              <a:rPr lang="en-US" sz="1800" dirty="0">
-                <a:solidFill>
-                  <a:srgbClr val="000000"/>
-                </a:solidFill>
-              </a:rPr>
-              <a:t>程序骨架：</a:t>
-            </a:r>
-            <a:pPr algn="l" indent="0" marL="0">
-              <a:lnSpc>
-                <a:spcPct val="115000"/>
-              </a:lnSpc>
-              <a:buNone/>
-            </a:pPr>
-            <a:r>
-              <a:rPr lang="en-US" sz="1800" b="1" dirty="0">
-                <a:solidFill>
-                  <a:srgbClr val="000000"/>
-                </a:solidFill>
-              </a:rPr>
-              <a:t>从main进门 ＋ printf往外打字 ＋ 分号收尾</a:t>
-            </a:r>
-            <a:endParaRPr lang="en-US" sz="1800" dirty="0"/>
-          </a:p>
-        </p:txBody>
-      </p:sp>
-      <p:sp>
-        <p:nvSpPr>
-          <p:cNvPr id="6" name="Text 4"/>
+              <a:t>任务：在白纸上写出完整程序，让屏幕打印两行字（含换行、分号、return 0）。分六步：头文件 → main开头 → 第一行printf → 第二行printf → return 0 → 补右花括号</a:t>
+            </a:r>
+            <a:endParaRPr lang="en-US" sz="1600" dirty="0"/>
+          </a:p>
+        </p:txBody>
+      </p:sp>
+      <p:sp>
+        <p:nvSpPr>
+          <p:cNvPr id="6" name="Shape 4"/>
           <p:cNvSpPr/>
           <p:nvPr/>
         </p:nvSpPr>
         <p:spPr>
           <a:xfrm>
-            <a:off x="896112" y="2866644"/>
-            <a:ext cx="10454335" cy="397764"/>
+            <a:off x="822960" y="3017520"/>
+            <a:ext cx="10545775" cy="2788920"/>
+          </a:xfrm>
+          <a:prstGeom prst="rect">
+            <a:avLst/>
+          </a:prstGeom>
+          <a:solidFill>
+            <a:srgbClr val="FFFFFF"/>
+          </a:solidFill>
+          <a:ln w="12700">
+            <a:solidFill>
+              <a:srgbClr val="B9C0C9"/>
+            </a:solidFill>
+            <a:prstDash val="dash"/>
+          </a:ln>
+        </p:spPr>
+      </p:sp>
+      <p:sp>
+        <p:nvSpPr>
+          <p:cNvPr id="7" name="Text 5"/>
+          <p:cNvSpPr/>
+          <p:nvPr/>
+        </p:nvSpPr>
+        <p:spPr>
+          <a:xfrm>
+            <a:off x="822960" y="5349240"/>
+            <a:ext cx="10545775" cy="365760"/>
           </a:xfrm>
           <a:prstGeom prst="rect">
             <a:avLst/>
@@ -4040,136 +5303,24 @@
           <a:ln/>
         </p:spPr>
         <p:txBody>
-          <a:bodyPr wrap="square" rtlCol="0" anchor="t"/>
+          <a:bodyPr wrap="square" rtlCol="0" anchor="ctr"/>
           <a:lstStyle/>
           <a:p>
-            <a:pPr algn="l" indent="0" marL="0">
-              <a:lnSpc>
-                <a:spcPct val="115000"/>
-              </a:lnSpc>
-              <a:buNone/>
-            </a:pPr>
-            <a:r>
-              <a:rPr lang="en-US" sz="1800" b="1" dirty="0">
-                <a:solidFill>
-                  <a:srgbClr val="1F4E9C"/>
+            <a:pPr algn="r" indent="0" marL="0">
+              <a:buNone/>
+            </a:pPr>
+            <a:r>
+              <a:rPr lang="en-US" sz="1200" dirty="0">
+                <a:solidFill>
+                  <a:srgbClr val="8A9099"/>
                 </a:solidFill>
                 <a:latin typeface="微软雅黑" pitchFamily="34" charset="0"/>
                 <a:ea typeface="微软雅黑" pitchFamily="34" charset="-122"/>
                 <a:cs typeface="微软雅黑" pitchFamily="34" charset="-120"/>
               </a:rPr>
-              <a:t>•  </a:t>
-            </a:r>
-            <a:pPr algn="l" indent="0" marL="0">
-              <a:lnSpc>
-                <a:spcPct val="115000"/>
-              </a:lnSpc>
-              <a:buNone/>
-            </a:pPr>
-            <a:r>
-              <a:rPr lang="en-US" sz="1800" dirty="0">
-                <a:solidFill>
-                  <a:srgbClr val="000000"/>
-                </a:solidFill>
-              </a:rPr>
-              <a:t>本节没有算法，不分析复杂度，这个环节从下一节开始</a:t>
-            </a:r>
-            <a:endParaRPr lang="en-US" sz="1800" dirty="0"/>
-          </a:p>
-        </p:txBody>
-      </p:sp>
-      <p:sp>
-        <p:nvSpPr>
-          <p:cNvPr id="7" name="Text 5"/>
-          <p:cNvSpPr/>
-          <p:nvPr/>
-        </p:nvSpPr>
-        <p:spPr>
-          <a:xfrm>
-            <a:off x="896112" y="3337560"/>
-            <a:ext cx="10454335" cy="397764"/>
-          </a:xfrm>
-          <a:prstGeom prst="rect">
-            <a:avLst/>
-          </a:prstGeom>
-          <a:noFill/>
-          <a:ln/>
-        </p:spPr>
-        <p:txBody>
-          <a:bodyPr wrap="square" rtlCol="0" anchor="t"/>
-          <a:lstStyle/>
-          <a:p>
-            <a:pPr algn="l" indent="0" marL="0">
-              <a:lnSpc>
-                <a:spcPct val="115000"/>
-              </a:lnSpc>
-              <a:buNone/>
-            </a:pPr>
-            <a:r>
-              <a:rPr lang="en-US" sz="1800" b="1" dirty="0">
-                <a:solidFill>
-                  <a:srgbClr val="1F4E9C"/>
-                </a:solidFill>
-                <a:latin typeface="微软雅黑" pitchFamily="34" charset="0"/>
-                <a:ea typeface="微软雅黑" pitchFamily="34" charset="-122"/>
-                <a:cs typeface="微软雅黑" pitchFamily="34" charset="-120"/>
-              </a:rPr>
-              <a:t>•  </a:t>
-            </a:r>
-            <a:pPr algn="l" indent="0" marL="0">
-              <a:lnSpc>
-                <a:spcPct val="115000"/>
-              </a:lnSpc>
-              <a:buNone/>
-            </a:pPr>
-            <a:r>
-              <a:rPr lang="en-US" sz="1800" dirty="0">
-                <a:solidFill>
-                  <a:srgbClr val="000000"/>
-                </a:solidFill>
-              </a:rPr>
-              <a:t>易错点：忘分号 / 大小写混用 / 中文引号 / 花括号不配对</a:t>
-            </a:r>
-            <a:endParaRPr lang="en-US" sz="1800" dirty="0"/>
-          </a:p>
-        </p:txBody>
-      </p:sp>
-      <p:sp>
-        <p:nvSpPr>
-          <p:cNvPr id="8" name="Text 6"/>
-          <p:cNvSpPr/>
-          <p:nvPr/>
-        </p:nvSpPr>
-        <p:spPr>
-          <a:xfrm>
-            <a:off x="822960" y="3899916"/>
-            <a:ext cx="10545775" cy="358902"/>
-          </a:xfrm>
-          <a:prstGeom prst="rect">
-            <a:avLst/>
-          </a:prstGeom>
-          <a:noFill/>
-          <a:ln/>
-        </p:spPr>
-        <p:txBody>
-          <a:bodyPr wrap="square" rtlCol="0" anchor="t"/>
-          <a:lstStyle/>
-          <a:p>
-            <a:pPr algn="l" indent="0" marL="0">
-              <a:buNone/>
-            </a:pPr>
-            <a:r>
-              <a:rPr lang="en-US" sz="1500" dirty="0">
-                <a:solidFill>
-                  <a:srgbClr val="8A9099"/>
-                </a:solidFill>
-                <a:latin typeface="微软雅黑" pitchFamily="34" charset="0"/>
-                <a:ea typeface="微软雅黑" pitchFamily="34" charset="-122"/>
-                <a:cs typeface="微软雅黑" pitchFamily="34" charset="-120"/>
-              </a:rPr>
-              <a:t>这四个错，初学阶段人人都会犯，写完检查一遍就行</a:t>
-            </a:r>
-            <a:endParaRPr lang="en-US" sz="1500" dirty="0"/>
+              <a:t>此处板书推演</a:t>
+            </a:r>
+            <a:endParaRPr lang="en-US" sz="1200" dirty="0"/>
           </a:p>
         </p:txBody>
       </p:sp>
@@ -4245,7 +5396,7 @@
                 <a:ea typeface="微软雅黑" pitchFamily="34" charset="-122"/>
                 <a:cs typeface="微软雅黑" pitchFamily="34" charset="-120"/>
               </a:rPr>
-              <a:t>15 / 15</a:t>
+              <a:t>15 / 17</a:t>
             </a:r>
             <a:endParaRPr lang="en-US" sz="1000" dirty="0"/>
           </a:p>
@@ -4284,7 +5435,7 @@
                 <a:ea typeface="微软雅黑" pitchFamily="34" charset="-122"/>
                 <a:cs typeface="微软雅黑" pitchFamily="34" charset="-120"/>
               </a:rPr>
-              <a:t>课后任务</a:t>
+              <a:t>板书结论</a:t>
             </a:r>
             <a:endParaRPr lang="en-US" sz="1400" dirty="0"/>
           </a:p>
@@ -4323,7 +5474,344 @@
                 <a:ea typeface="微软雅黑" pitchFamily="34" charset="-122"/>
                 <a:cs typeface="微软雅黑" pitchFamily="34" charset="-120"/>
               </a:rPr>
-              <a:t>1道跟练 ＋ 1道模仿</a:t>
+              <a:t>写出来的程序长这样</a:t>
+            </a:r>
+            <a:endParaRPr lang="en-US" sz="2800" dirty="0"/>
+          </a:p>
+        </p:txBody>
+      </p:sp>
+      <p:sp>
+        <p:nvSpPr>
+          <p:cNvPr id="5" name="Shape 3"/>
+          <p:cNvSpPr/>
+          <p:nvPr/>
+        </p:nvSpPr>
+        <p:spPr>
+          <a:xfrm>
+            <a:off x="822960" y="2395728"/>
+            <a:ext cx="10545775" cy="1984248"/>
+          </a:xfrm>
+          <a:prstGeom prst="rect">
+            <a:avLst/>
+          </a:prstGeom>
+          <a:solidFill>
+            <a:srgbClr val="F5F6F7"/>
+          </a:solidFill>
+          <a:ln w="9525">
+            <a:solidFill>
+              <a:srgbClr val="D8DBE0"/>
+            </a:solidFill>
+            <a:prstDash val="solid"/>
+          </a:ln>
+        </p:spPr>
+      </p:sp>
+      <p:sp>
+        <p:nvSpPr>
+          <p:cNvPr id="6" name="Text 4"/>
+          <p:cNvSpPr/>
+          <p:nvPr/>
+        </p:nvSpPr>
+        <p:spPr>
+          <a:xfrm>
+            <a:off x="1078992" y="2505456"/>
+            <a:ext cx="10033711" cy="1764792"/>
+          </a:xfrm>
+          <a:prstGeom prst="rect">
+            <a:avLst/>
+          </a:prstGeom>
+          <a:noFill/>
+          <a:ln/>
+        </p:spPr>
+        <p:txBody>
+          <a:bodyPr wrap="square" rtlCol="0" anchor="t"/>
+          <a:lstStyle/>
+          <a:p>
+            <a:pPr algn="l" indent="0" marL="0">
+              <a:lnSpc>
+                <a:spcPct val="125000"/>
+              </a:lnSpc>
+              <a:buNone/>
+            </a:pPr>
+            <a:r>
+              <a:rPr lang="en-US" sz="1300" dirty="0">
+                <a:solidFill>
+                  <a:srgbClr val="1F2329"/>
+                </a:solidFill>
+                <a:latin typeface="Consolas" pitchFamily="34" charset="0"/>
+                <a:ea typeface="Consolas" pitchFamily="34" charset="-122"/>
+                <a:cs typeface="Consolas" pitchFamily="34" charset="-120"/>
+              </a:rPr>
+              <a:t>#include &lt;stdio.h&gt;
+int main(){
+    printf("第一行\n");
+    printf("第二行\n");
+    return 0;
+}
+</a:t>
+            </a:r>
+            <a:endParaRPr lang="en-US" sz="1300" dirty="0"/>
+          </a:p>
+        </p:txBody>
+      </p:sp>
+      <p:sp>
+        <p:nvSpPr>
+          <p:cNvPr id="7" name="Text 5"/>
+          <p:cNvSpPr/>
+          <p:nvPr/>
+        </p:nvSpPr>
+        <p:spPr>
+          <a:xfrm>
+            <a:off x="822960" y="4581144"/>
+            <a:ext cx="10545775" cy="358902"/>
+          </a:xfrm>
+          <a:prstGeom prst="rect">
+            <a:avLst/>
+          </a:prstGeom>
+          <a:noFill/>
+          <a:ln/>
+        </p:spPr>
+        <p:txBody>
+          <a:bodyPr wrap="square" rtlCol="0" anchor="t"/>
+          <a:lstStyle/>
+          <a:p>
+            <a:pPr algn="l" indent="0" marL="0">
+              <a:buNone/>
+            </a:pPr>
+            <a:r>
+              <a:rPr lang="en-US" sz="1500" dirty="0">
+                <a:solidFill>
+                  <a:srgbClr val="8A9099"/>
+                </a:solidFill>
+                <a:latin typeface="微软雅黑" pitchFamily="34" charset="0"/>
+                <a:ea typeface="微软雅黑" pitchFamily="34" charset="-122"/>
+                <a:cs typeface="微软雅黑" pitchFamily="34" charset="-120"/>
+              </a:rPr>
+              <a:t>运行结果：</a:t>
+            </a:r>
+            <a:endParaRPr lang="en-US" sz="1500" dirty="0"/>
+          </a:p>
+        </p:txBody>
+      </p:sp>
+      <p:sp>
+        <p:nvSpPr>
+          <p:cNvPr id="8" name="Shape 6"/>
+          <p:cNvSpPr/>
+          <p:nvPr/>
+        </p:nvSpPr>
+        <p:spPr>
+          <a:xfrm>
+            <a:off x="822960" y="5049774"/>
+            <a:ext cx="10545775" cy="1033272"/>
+          </a:xfrm>
+          <a:prstGeom prst="rect">
+            <a:avLst/>
+          </a:prstGeom>
+          <a:solidFill>
+            <a:srgbClr val="F5F6F7"/>
+          </a:solidFill>
+          <a:ln w="9525">
+            <a:solidFill>
+              <a:srgbClr val="D8DBE0"/>
+            </a:solidFill>
+            <a:prstDash val="solid"/>
+          </a:ln>
+        </p:spPr>
+      </p:sp>
+      <p:sp>
+        <p:nvSpPr>
+          <p:cNvPr id="9" name="Text 7"/>
+          <p:cNvSpPr/>
+          <p:nvPr/>
+        </p:nvSpPr>
+        <p:spPr>
+          <a:xfrm>
+            <a:off x="1078992" y="5159502"/>
+            <a:ext cx="10033711" cy="813816"/>
+          </a:xfrm>
+          <a:prstGeom prst="rect">
+            <a:avLst/>
+          </a:prstGeom>
+          <a:noFill/>
+          <a:ln/>
+        </p:spPr>
+        <p:txBody>
+          <a:bodyPr wrap="square" rtlCol="0" anchor="t"/>
+          <a:lstStyle/>
+          <a:p>
+            <a:pPr algn="l" indent="0" marL="0">
+              <a:lnSpc>
+                <a:spcPct val="125000"/>
+              </a:lnSpc>
+              <a:buNone/>
+            </a:pPr>
+            <a:r>
+              <a:rPr lang="en-US" sz="1300" dirty="0">
+                <a:solidFill>
+                  <a:srgbClr val="1F2329"/>
+                </a:solidFill>
+                <a:latin typeface="Consolas" pitchFamily="34" charset="0"/>
+                <a:ea typeface="Consolas" pitchFamily="34" charset="-122"/>
+                <a:cs typeface="Consolas" pitchFamily="34" charset="-120"/>
+              </a:rPr>
+              <a:t>第一行
+第二行
+</a:t>
+            </a:r>
+            <a:endParaRPr lang="en-US" sz="1300" dirty="0"/>
+          </a:p>
+        </p:txBody>
+      </p:sp>
+    </p:spTree>
+  </p:cSld>
+  <p:clrMapOvr>
+    <a:masterClrMapping/>
+  </p:clrMapOvr>
+</p:sld>
+</file>
+
+<file path=ppt/slides/slide16.xml><?xml version="1.0" encoding="utf-8"?>
+<p:sld xmlns:a="http://schemas.openxmlformats.org/drawingml/2006/main" xmlns:r="http://schemas.openxmlformats.org/officeDocument/2006/relationships" xmlns:p="http://schemas.openxmlformats.org/presentationml/2006/main">
+  <p:cSld name="Slide 16">
+    <p:bg>
+      <p:bgPr>
+        <a:blipFill dpi="0" rotWithShape="1">
+          <a:blip r:embed="rId1">
+            <a:lum/>
+          </a:blip>
+          <a:srcRect/>
+          <a:stretch>
+            <a:fillRect/>
+          </a:stretch>
+        </a:blipFill>
+        <a:effectLst/>
+      </p:bgPr>
+    </p:bg>
+    <p:spTree>
+      <p:nvGrpSpPr>
+        <p:cNvPr id="1" name=""/>
+        <p:cNvGrpSpPr/>
+        <p:nvPr/>
+      </p:nvGrpSpPr>
+      <p:grpSpPr>
+        <a:xfrm>
+          <a:off x="0" y="0"/>
+          <a:ext cx="0" cy="0"/>
+          <a:chOff x="0" y="0"/>
+          <a:chExt cx="0" cy="0"/>
+        </a:xfrm>
+      </p:grpSpPr>
+      <p:sp>
+        <p:nvSpPr>
+          <p:cNvPr id="2" name="Text 0"/>
+          <p:cNvSpPr/>
+          <p:nvPr/>
+        </p:nvSpPr>
+        <p:spPr>
+          <a:xfrm>
+            <a:off x="10362895" y="6016752"/>
+            <a:ext cx="1463040" cy="320040"/>
+          </a:xfrm>
+          <a:prstGeom prst="rect">
+            <a:avLst/>
+          </a:prstGeom>
+          <a:noFill/>
+          <a:ln/>
+        </p:spPr>
+        <p:txBody>
+          <a:bodyPr wrap="square" rtlCol="0" anchor="ctr"/>
+          <a:lstStyle/>
+          <a:p>
+            <a:pPr algn="r" indent="0" marL="0">
+              <a:buNone/>
+            </a:pPr>
+            <a:r>
+              <a:rPr lang="en-US" sz="1000" dirty="0">
+                <a:solidFill>
+                  <a:srgbClr val="8A9099"/>
+                </a:solidFill>
+                <a:latin typeface="微软雅黑" pitchFamily="34" charset="0"/>
+                <a:ea typeface="微软雅黑" pitchFamily="34" charset="-122"/>
+                <a:cs typeface="微软雅黑" pitchFamily="34" charset="-120"/>
+              </a:rPr>
+              <a:t>16 / 17</a:t>
+            </a:r>
+            <a:endParaRPr lang="en-US" sz="1000" dirty="0"/>
+          </a:p>
+        </p:txBody>
+      </p:sp>
+      <p:sp>
+        <p:nvSpPr>
+          <p:cNvPr id="3" name="Text 1"/>
+          <p:cNvSpPr/>
+          <p:nvPr/>
+        </p:nvSpPr>
+        <p:spPr>
+          <a:xfrm>
+            <a:off x="822960" y="960120"/>
+            <a:ext cx="10545775" cy="365760"/>
+          </a:xfrm>
+          <a:prstGeom prst="rect">
+            <a:avLst/>
+          </a:prstGeom>
+          <a:noFill/>
+          <a:ln/>
+        </p:spPr>
+        <p:txBody>
+          <a:bodyPr wrap="square" rtlCol="0" anchor="ctr"/>
+          <a:lstStyle/>
+          <a:p>
+            <a:pPr algn="l" indent="0" marL="0">
+              <a:buNone/>
+            </a:pPr>
+            <a:r>
+              <a:rPr lang="en-US" sz="1400" b="1" dirty="0">
+                <a:solidFill>
+                  <a:srgbClr val="1F4E9C"/>
+                </a:solidFill>
+                <a:latin typeface="微软雅黑" pitchFamily="34" charset="0"/>
+                <a:ea typeface="微软雅黑" pitchFamily="34" charset="-122"/>
+                <a:cs typeface="微软雅黑" pitchFamily="34" charset="-120"/>
+              </a:rPr>
+              <a:t>本节总结</a:t>
+            </a:r>
+            <a:endParaRPr lang="en-US" sz="1400" dirty="0"/>
+          </a:p>
+        </p:txBody>
+      </p:sp>
+      <p:sp>
+        <p:nvSpPr>
+          <p:cNvPr id="4" name="Text 2"/>
+          <p:cNvSpPr/>
+          <p:nvPr/>
+        </p:nvSpPr>
+        <p:spPr>
+          <a:xfrm>
+            <a:off x="822960" y="1344168"/>
+            <a:ext cx="10545775" cy="731520"/>
+          </a:xfrm>
+          <a:prstGeom prst="rect">
+            <a:avLst/>
+          </a:prstGeom>
+          <a:noFill/>
+          <a:ln/>
+        </p:spPr>
+        <p:txBody>
+          <a:bodyPr wrap="square" rtlCol="0" anchor="ctr"/>
+          <a:lstStyle/>
+          <a:p>
+            <a:pPr algn="l" indent="0" marL="0">
+              <a:buNone/>
+            </a:pPr>
+            <a:r>
+              <a:rPr lang="en-US" sz="2800" b="1" dirty="0">
+                <a:solidFill>
+                  <a:srgbClr val="1F2329"/>
+                </a:solidFill>
+                <a:latin typeface="微软雅黑" pitchFamily="34" charset="0"/>
+                <a:ea typeface="微软雅黑" pitchFamily="34" charset="-122"/>
+                <a:cs typeface="微软雅黑" pitchFamily="34" charset="-120"/>
+              </a:rPr>
+              <a:t>总结</a:t>
             </a:r>
             <a:endParaRPr lang="en-US" sz="2800" dirty="0"/>
           </a:p>
@@ -4374,6 +5862,358 @@
               <a:buNone/>
             </a:pPr>
             <a:r>
+              <a:rPr lang="en-US" sz="1800" dirty="0">
+                <a:solidFill>
+                  <a:srgbClr val="000000"/>
+                </a:solidFill>
+              </a:rPr>
+              <a:t>程序骨架：</a:t>
+            </a:r>
+            <a:pPr algn="l" indent="0" marL="0">
+              <a:lnSpc>
+                <a:spcPct val="115000"/>
+              </a:lnSpc>
+              <a:buNone/>
+            </a:pPr>
+            <a:r>
+              <a:rPr lang="en-US" sz="1800" b="1" dirty="0">
+                <a:solidFill>
+                  <a:srgbClr val="000000"/>
+                </a:solidFill>
+              </a:rPr>
+              <a:t>头文件 ＋ 宏定义 ＋ main函数 ＋ 函数体 ＋ return</a:t>
+            </a:r>
+            <a:endParaRPr lang="en-US" sz="1800" dirty="0"/>
+          </a:p>
+        </p:txBody>
+      </p:sp>
+      <p:sp>
+        <p:nvSpPr>
+          <p:cNvPr id="6" name="Text 4"/>
+          <p:cNvSpPr/>
+          <p:nvPr/>
+        </p:nvSpPr>
+        <p:spPr>
+          <a:xfrm>
+            <a:off x="896112" y="2866644"/>
+            <a:ext cx="10454335" cy="397764"/>
+          </a:xfrm>
+          <a:prstGeom prst="rect">
+            <a:avLst/>
+          </a:prstGeom>
+          <a:noFill/>
+          <a:ln/>
+        </p:spPr>
+        <p:txBody>
+          <a:bodyPr wrap="square" rtlCol="0" anchor="t"/>
+          <a:lstStyle/>
+          <a:p>
+            <a:pPr algn="l" indent="0" marL="0">
+              <a:lnSpc>
+                <a:spcPct val="115000"/>
+              </a:lnSpc>
+              <a:buNone/>
+            </a:pPr>
+            <a:r>
+              <a:rPr lang="en-US" sz="1800" b="1" dirty="0">
+                <a:solidFill>
+                  <a:srgbClr val="1F4E9C"/>
+                </a:solidFill>
+                <a:latin typeface="微软雅黑" pitchFamily="34" charset="0"/>
+                <a:ea typeface="微软雅黑" pitchFamily="34" charset="-122"/>
+                <a:cs typeface="微软雅黑" pitchFamily="34" charset="-120"/>
+              </a:rPr>
+              <a:t>•  </a:t>
+            </a:r>
+            <a:pPr algn="l" indent="0" marL="0">
+              <a:lnSpc>
+                <a:spcPct val="115000"/>
+              </a:lnSpc>
+              <a:buNone/>
+            </a:pPr>
+            <a:r>
+              <a:rPr lang="en-US" sz="1800" dirty="0">
+                <a:solidFill>
+                  <a:srgbClr val="000000"/>
+                </a:solidFill>
+              </a:rPr>
+              <a:t>程序跑起来的路：</a:t>
+            </a:r>
+            <a:pPr algn="l" indent="0" marL="0">
+              <a:lnSpc>
+                <a:spcPct val="115000"/>
+              </a:lnSpc>
+              <a:buNone/>
+            </a:pPr>
+            <a:r>
+              <a:rPr lang="en-US" sz="1800" b="1" dirty="0">
+                <a:solidFill>
+                  <a:srgbClr val="000000"/>
+                </a:solidFill>
+              </a:rPr>
+              <a:t>源代码 → 编译 → 运行</a:t>
+            </a:r>
+            <a:endParaRPr lang="en-US" sz="1800" dirty="0"/>
+          </a:p>
+        </p:txBody>
+      </p:sp>
+      <p:sp>
+        <p:nvSpPr>
+          <p:cNvPr id="7" name="Text 5"/>
+          <p:cNvSpPr/>
+          <p:nvPr/>
+        </p:nvSpPr>
+        <p:spPr>
+          <a:xfrm>
+            <a:off x="896112" y="3337560"/>
+            <a:ext cx="10454335" cy="397764"/>
+          </a:xfrm>
+          <a:prstGeom prst="rect">
+            <a:avLst/>
+          </a:prstGeom>
+          <a:noFill/>
+          <a:ln/>
+        </p:spPr>
+        <p:txBody>
+          <a:bodyPr wrap="square" rtlCol="0" anchor="t"/>
+          <a:lstStyle/>
+          <a:p>
+            <a:pPr algn="l" indent="0" marL="0">
+              <a:lnSpc>
+                <a:spcPct val="115000"/>
+              </a:lnSpc>
+              <a:buNone/>
+            </a:pPr>
+            <a:r>
+              <a:rPr lang="en-US" sz="1800" b="1" dirty="0">
+                <a:solidFill>
+                  <a:srgbClr val="1F4E9C"/>
+                </a:solidFill>
+                <a:latin typeface="微软雅黑" pitchFamily="34" charset="0"/>
+                <a:ea typeface="微软雅黑" pitchFamily="34" charset="-122"/>
+                <a:cs typeface="微软雅黑" pitchFamily="34" charset="-120"/>
+              </a:rPr>
+              <a:t>•  </a:t>
+            </a:r>
+            <a:pPr algn="l" indent="0" marL="0">
+              <a:lnSpc>
+                <a:spcPct val="115000"/>
+              </a:lnSpc>
+              <a:buNone/>
+            </a:pPr>
+            <a:r>
+              <a:rPr lang="en-US" sz="1800" dirty="0">
+                <a:solidFill>
+                  <a:srgbClr val="000000"/>
+                </a:solidFill>
+              </a:rPr>
+              <a:t>易错点：忘分号 / 大小写混用 / 中文引号 / 花括号不配对</a:t>
+            </a:r>
+            <a:endParaRPr lang="en-US" sz="1800" dirty="0"/>
+          </a:p>
+        </p:txBody>
+      </p:sp>
+    </p:spTree>
+  </p:cSld>
+  <p:clrMapOvr>
+    <a:masterClrMapping/>
+  </p:clrMapOvr>
+</p:sld>
+</file>
+
+<file path=ppt/slides/slide17.xml><?xml version="1.0" encoding="utf-8"?>
+<p:sld xmlns:a="http://schemas.openxmlformats.org/drawingml/2006/main" xmlns:r="http://schemas.openxmlformats.org/officeDocument/2006/relationships" xmlns:p="http://schemas.openxmlformats.org/presentationml/2006/main">
+  <p:cSld name="Slide 17">
+    <p:bg>
+      <p:bgPr>
+        <a:blipFill dpi="0" rotWithShape="1">
+          <a:blip r:embed="rId1">
+            <a:lum/>
+          </a:blip>
+          <a:srcRect/>
+          <a:stretch>
+            <a:fillRect/>
+          </a:stretch>
+        </a:blipFill>
+        <a:effectLst/>
+      </p:bgPr>
+    </p:bg>
+    <p:spTree>
+      <p:nvGrpSpPr>
+        <p:cNvPr id="1" name=""/>
+        <p:cNvGrpSpPr/>
+        <p:nvPr/>
+      </p:nvGrpSpPr>
+      <p:grpSpPr>
+        <a:xfrm>
+          <a:off x="0" y="0"/>
+          <a:ext cx="0" cy="0"/>
+          <a:chOff x="0" y="0"/>
+          <a:chExt cx="0" cy="0"/>
+        </a:xfrm>
+      </p:grpSpPr>
+      <p:sp>
+        <p:nvSpPr>
+          <p:cNvPr id="2" name="Text 0"/>
+          <p:cNvSpPr/>
+          <p:nvPr/>
+        </p:nvSpPr>
+        <p:spPr>
+          <a:xfrm>
+            <a:off x="10362895" y="6016752"/>
+            <a:ext cx="1463040" cy="320040"/>
+          </a:xfrm>
+          <a:prstGeom prst="rect">
+            <a:avLst/>
+          </a:prstGeom>
+          <a:noFill/>
+          <a:ln/>
+        </p:spPr>
+        <p:txBody>
+          <a:bodyPr wrap="square" rtlCol="0" anchor="ctr"/>
+          <a:lstStyle/>
+          <a:p>
+            <a:pPr algn="r" indent="0" marL="0">
+              <a:buNone/>
+            </a:pPr>
+            <a:r>
+              <a:rPr lang="en-US" sz="1000" dirty="0">
+                <a:solidFill>
+                  <a:srgbClr val="8A9099"/>
+                </a:solidFill>
+                <a:latin typeface="微软雅黑" pitchFamily="34" charset="0"/>
+                <a:ea typeface="微软雅黑" pitchFamily="34" charset="-122"/>
+                <a:cs typeface="微软雅黑" pitchFamily="34" charset="-120"/>
+              </a:rPr>
+              <a:t>17 / 17</a:t>
+            </a:r>
+            <a:endParaRPr lang="en-US" sz="1000" dirty="0"/>
+          </a:p>
+        </p:txBody>
+      </p:sp>
+      <p:sp>
+        <p:nvSpPr>
+          <p:cNvPr id="3" name="Text 1"/>
+          <p:cNvSpPr/>
+          <p:nvPr/>
+        </p:nvSpPr>
+        <p:spPr>
+          <a:xfrm>
+            <a:off x="822960" y="960120"/>
+            <a:ext cx="10545775" cy="365760"/>
+          </a:xfrm>
+          <a:prstGeom prst="rect">
+            <a:avLst/>
+          </a:prstGeom>
+          <a:noFill/>
+          <a:ln/>
+        </p:spPr>
+        <p:txBody>
+          <a:bodyPr wrap="square" rtlCol="0" anchor="ctr"/>
+          <a:lstStyle/>
+          <a:p>
+            <a:pPr algn="l" indent="0" marL="0">
+              <a:buNone/>
+            </a:pPr>
+            <a:r>
+              <a:rPr lang="en-US" sz="1400" b="1" dirty="0">
+                <a:solidFill>
+                  <a:srgbClr val="1F4E9C"/>
+                </a:solidFill>
+                <a:latin typeface="微软雅黑" pitchFamily="34" charset="0"/>
+                <a:ea typeface="微软雅黑" pitchFamily="34" charset="-122"/>
+                <a:cs typeface="微软雅黑" pitchFamily="34" charset="-120"/>
+              </a:rPr>
+              <a:t>课后任务</a:t>
+            </a:r>
+            <a:endParaRPr lang="en-US" sz="1400" dirty="0"/>
+          </a:p>
+        </p:txBody>
+      </p:sp>
+      <p:sp>
+        <p:nvSpPr>
+          <p:cNvPr id="4" name="Text 2"/>
+          <p:cNvSpPr/>
+          <p:nvPr/>
+        </p:nvSpPr>
+        <p:spPr>
+          <a:xfrm>
+            <a:off x="822960" y="1344168"/>
+            <a:ext cx="10545775" cy="731520"/>
+          </a:xfrm>
+          <a:prstGeom prst="rect">
+            <a:avLst/>
+          </a:prstGeom>
+          <a:noFill/>
+          <a:ln/>
+        </p:spPr>
+        <p:txBody>
+          <a:bodyPr wrap="square" rtlCol="0" anchor="ctr"/>
+          <a:lstStyle/>
+          <a:p>
+            <a:pPr algn="l" indent="0" marL="0">
+              <a:buNone/>
+            </a:pPr>
+            <a:r>
+              <a:rPr lang="en-US" sz="2800" b="1" dirty="0">
+                <a:solidFill>
+                  <a:srgbClr val="1F2329"/>
+                </a:solidFill>
+                <a:latin typeface="微软雅黑" pitchFamily="34" charset="0"/>
+                <a:ea typeface="微软雅黑" pitchFamily="34" charset="-122"/>
+                <a:cs typeface="微软雅黑" pitchFamily="34" charset="-120"/>
+              </a:rPr>
+              <a:t>1道跟练 ＋ 1道模仿</a:t>
+            </a:r>
+            <a:endParaRPr lang="en-US" sz="2800" dirty="0"/>
+          </a:p>
+        </p:txBody>
+      </p:sp>
+      <p:sp>
+        <p:nvSpPr>
+          <p:cNvPr id="5" name="Text 3"/>
+          <p:cNvSpPr/>
+          <p:nvPr/>
+        </p:nvSpPr>
+        <p:spPr>
+          <a:xfrm>
+            <a:off x="896112" y="2395728"/>
+            <a:ext cx="10454335" cy="397764"/>
+          </a:xfrm>
+          <a:prstGeom prst="rect">
+            <a:avLst/>
+          </a:prstGeom>
+          <a:noFill/>
+          <a:ln/>
+        </p:spPr>
+        <p:txBody>
+          <a:bodyPr wrap="square" rtlCol="0" anchor="t"/>
+          <a:lstStyle/>
+          <a:p>
+            <a:pPr algn="l" indent="0" marL="0">
+              <a:lnSpc>
+                <a:spcPct val="115000"/>
+              </a:lnSpc>
+              <a:buNone/>
+            </a:pPr>
+            <a:r>
+              <a:rPr lang="en-US" sz="1800" b="1" dirty="0">
+                <a:solidFill>
+                  <a:srgbClr val="1F4E9C"/>
+                </a:solidFill>
+                <a:latin typeface="微软雅黑" pitchFamily="34" charset="0"/>
+                <a:ea typeface="微软雅黑" pitchFamily="34" charset="-122"/>
+                <a:cs typeface="微软雅黑" pitchFamily="34" charset="-120"/>
+              </a:rPr>
+              <a:t>•  </a:t>
+            </a:r>
+            <a:pPr algn="l" indent="0" marL="0">
+              <a:lnSpc>
+                <a:spcPct val="115000"/>
+              </a:lnSpc>
+              <a:buNone/>
+            </a:pPr>
+            <a:r>
               <a:rPr lang="en-US" sz="1800" b="1" dirty="0">
                 <a:solidFill>
                   <a:srgbClr val="000000"/>
@@ -4463,7 +6303,24 @@
                   <a:srgbClr val="000000"/>
                 </a:solidFill>
               </a:rPr>
-              <a:t>：把课上你好程序改一改，用一条printf打印三行诗（提示：\n可以放在中间）</a:t>
+              <a:t>：把课上的程序改一改，用一条printf打印三行诗（提示：</a:t>
+            </a:r>
+            <a:endParaRPr lang="en-US" sz="1800" dirty="0"/>
+          </a:p>
+          <a:p>
+            <a:pPr algn="l" indent="0" marL="0">
+              <a:lnSpc>
+                <a:spcPct val="115000"/>
+              </a:lnSpc>
+              <a:buNone/>
+            </a:pPr>
+            <a:r>
+              <a:rPr lang="en-US" sz="1800" dirty="0">
+                <a:solidFill>
+                  <a:srgbClr val="000000"/>
+                </a:solidFill>
+              </a:rPr>
+              <a:t>可以放在中间）</a:t>
             </a:r>
             <a:endParaRPr lang="en-US" sz="1800" dirty="0"/>
           </a:p>
@@ -4580,7 +6437,7 @@
                 <a:ea typeface="微软雅黑" pitchFamily="34" charset="-122"/>
                 <a:cs typeface="微软雅黑" pitchFamily="34" charset="-120"/>
               </a:rPr>
-              <a:t>2 / 15</a:t>
+              <a:t>2 / 17</a:t>
             </a:r>
             <a:endParaRPr lang="en-US" sz="1000" dirty="0"/>
           </a:p>
@@ -5504,7 +7361,7 @@
                 <a:ea typeface="微软雅黑" pitchFamily="34" charset="-122"/>
                 <a:cs typeface="微软雅黑" pitchFamily="34" charset="-120"/>
               </a:rPr>
-              <a:t>3 / 15</a:t>
+              <a:t>3 / 17</a:t>
             </a:r>
             <a:endParaRPr lang="en-US" sz="1000" dirty="0"/>
           </a:p>
@@ -6966,7 +8823,7 @@
                 <a:ea typeface="微软雅黑" pitchFamily="34" charset="-122"/>
                 <a:cs typeface="微软雅黑" pitchFamily="34" charset="-120"/>
               </a:rPr>
-              <a:t>4 / 15</a:t>
+              <a:t>4 / 17</a:t>
             </a:r>
             <a:endParaRPr lang="en-US" sz="1000" dirty="0"/>
           </a:p>
@@ -7704,7 +9561,7 @@
                 <a:ea typeface="微软雅黑" pitchFamily="34" charset="-122"/>
                 <a:cs typeface="微软雅黑" pitchFamily="34" charset="-120"/>
               </a:rPr>
-              <a:t>5 / 15</a:t>
+              <a:t>5 / 17</a:t>
             </a:r>
             <a:endParaRPr lang="en-US" sz="1000" dirty="0"/>
           </a:p>
@@ -8198,7 +10055,7 @@
                 <a:ea typeface="微软雅黑" pitchFamily="34" charset="-122"/>
                 <a:cs typeface="微软雅黑" pitchFamily="34" charset="-120"/>
               </a:rPr>
-              <a:t>6 / 15</a:t>
+              <a:t>6 / 17</a:t>
             </a:r>
             <a:endParaRPr lang="en-US" sz="1000" dirty="0"/>
           </a:p>
@@ -8393,7 +10250,7 @@
                 <a:ea typeface="微软雅黑" pitchFamily="34" charset="-122"/>
                 <a:cs typeface="微软雅黑" pitchFamily="34" charset="-120"/>
               </a:rPr>
-              <a:t>7 / 15</a:t>
+              <a:t>7 / 17</a:t>
             </a:r>
             <a:endParaRPr lang="en-US" sz="1000" dirty="0"/>
           </a:p>
@@ -8742,7 +10599,7 @@
                 <a:ea typeface="微软雅黑" pitchFamily="34" charset="-122"/>
                 <a:cs typeface="微软雅黑" pitchFamily="34" charset="-120"/>
               </a:rPr>
-              <a:t>8 / 15</a:t>
+              <a:t>8 / 17</a:t>
             </a:r>
             <a:endParaRPr lang="en-US" sz="1000" dirty="0"/>
           </a:p>
@@ -9499,7 +11356,7 @@
                 <a:ea typeface="微软雅黑" pitchFamily="34" charset="-122"/>
                 <a:cs typeface="微软雅黑" pitchFamily="34" charset="-120"/>
               </a:rPr>
-              <a:t>802考的是伪代码——翻译官的标准动作，我们一个个学</a:t>
+              <a:t>802考的是伪代码——现在先学完整程序，骨架熟练后再谈简化</a:t>
             </a:r>
             <a:endParaRPr lang="en-US" sz="1500" dirty="0"/>
           </a:p>
@@ -9577,7 +11434,7 @@
                 <a:ea typeface="微软雅黑" pitchFamily="34" charset="-122"/>
                 <a:cs typeface="微软雅黑" pitchFamily="34" charset="-120"/>
               </a:rPr>
-              <a:t>9 / 15</a:t>
+              <a:t>9 / 17</a:t>
             </a:r>
             <a:endParaRPr lang="en-US" sz="1000" dirty="0"/>
           </a:p>
@@ -9616,7 +11473,7 @@
                 <a:ea typeface="微软雅黑" pitchFamily="34" charset="-122"/>
                 <a:cs typeface="微软雅黑" pitchFamily="34" charset="-120"/>
               </a:rPr>
-              <a:t>第一个完整程序</a:t>
+              <a:t>思想先行 · 程序怎么跑起来</a:t>
             </a:r>
             <a:endParaRPr lang="en-US" sz="1400" dirty="0"/>
           </a:p>
@@ -9655,47 +11512,877 @@
                 <a:ea typeface="微软雅黑" pitchFamily="34" charset="-122"/>
                 <a:cs typeface="微软雅黑" pitchFamily="34" charset="-120"/>
               </a:rPr>
-              <a:t>C程序的骨架：五部分</a:t>
+              <a:t>从源代码到屏幕上的字</a:t>
             </a:r>
             <a:endParaRPr lang="en-US" sz="2800" dirty="0"/>
           </a:p>
         </p:txBody>
       </p:sp>
-      <p:sp>
-        <p:nvSpPr>
-          <p:cNvPr id="5" name="Shape 3"/>
+      <p:graphicFrame>
+        <p:nvGraphicFramePr>
+          <p:cNvPr id="10" name="Table 0"/>
+          <p:cNvGraphicFramePr>
+            <a:graphicFrameLocks noGrp="1"/>
+          </p:cNvGraphicFramePr>
+          <p:nvPr>
+            <p:extLst>
+              <p:ext uri="{D42A27DB-BD31-4B8C-83A1-F6EECF244321}">
+                <p14:modId xmlns:p14="http://schemas.microsoft.com/office/powerpoint/2010/main" val="1579011935"/>
+              </p:ext>
+            </p:extLst>
+          </p:nvPr>
+        </p:nvGraphicFramePr>
+        <p:xfrm>
+          <a:off x="822960" y="2395728"/>
+          <a:ext cx="10545775" cy="914400"/>
+        </p:xfrm>
+        <a:graphic>
+          <a:graphicData uri="http://schemas.openxmlformats.org/drawingml/2006/table">
+            <a:tbl>
+              <a:tblPr/>
+              <a:tblGrid>
+                <a:gridCol w="3515258"/>
+                <a:gridCol w="3515258"/>
+                <a:gridCol w="3515258"/>
+              </a:tblGrid>
+              <a:tr h="420624">
+                <a:tc>
+                  <a:txBody>
+                    <a:bodyPr/>
+                    <a:lstStyle/>
+                    <a:p>
+                      <a:pPr algn="ctr" indent="0" marL="0">
+                        <a:buNone/>
+                      </a:pPr>
+                      <a:r>
+                        <a:rPr lang="en-US" sz="1500" b="1" dirty="0">
+                          <a:solidFill>
+                            <a:srgbClr val="1F4E9C"/>
+                          </a:solidFill>
+                          <a:latin typeface="微软雅黑" pitchFamily="34" charset="0"/>
+                          <a:ea typeface="微软雅黑" pitchFamily="34" charset="-122"/>
+                          <a:cs typeface="微软雅黑" pitchFamily="34" charset="-120"/>
+                        </a:rPr>
+                        <a:t>阶段</a:t>
+                      </a:r>
+                      <a:endParaRPr lang="en-US" sz="1500" dirty="0">
+                        <a:latin typeface="微软雅黑" charset="0"/>
+                        <a:ea typeface="微软雅黑" charset="0"/>
+                        <a:cs typeface="微软雅黑" charset="0"/>
+                      </a:endParaRPr>
+                    </a:p>
+                  </a:txBody>
+                  <a:tcPr marL="91440" marR="91440" marT="45720" marB="45720" anchor="ctr">
+                    <a:lnL w="9525" cap="flat" cmpd="sng" algn="ctr">
+                      <a:solidFill>
+                        <a:srgbClr val="D8DBE0"/>
+                      </a:solidFill>
+                      <a:prstDash val="solid"/>
+                      <a:round/>
+                      <a:headEnd type="none" w="med" len="med"/>
+                      <a:tailEnd type="none" w="med" len="med"/>
+                    </a:lnL>
+                    <a:lnR w="9525" cap="flat" cmpd="sng" algn="ctr">
+                      <a:solidFill>
+                        <a:srgbClr val="D8DBE0"/>
+                      </a:solidFill>
+                      <a:prstDash val="solid"/>
+                      <a:round/>
+                      <a:headEnd type="none" w="med" len="med"/>
+                      <a:tailEnd type="none" w="med" len="med"/>
+                    </a:lnR>
+                    <a:lnT w="9525" cap="flat" cmpd="sng" algn="ctr">
+                      <a:solidFill>
+                        <a:srgbClr val="D8DBE0"/>
+                      </a:solidFill>
+                      <a:prstDash val="solid"/>
+                      <a:round/>
+                      <a:headEnd type="none" w="med" len="med"/>
+                      <a:tailEnd type="none" w="med" len="med"/>
+                    </a:lnT>
+                    <a:lnB w="9525" cap="flat" cmpd="sng" algn="ctr">
+                      <a:solidFill>
+                        <a:srgbClr val="D8DBE0"/>
+                      </a:solidFill>
+                      <a:prstDash val="solid"/>
+                      <a:round/>
+                      <a:headEnd type="none" w="med" len="med"/>
+                      <a:tailEnd type="none" w="med" len="med"/>
+                    </a:lnB>
+                    <a:solidFill>
+                      <a:srgbClr val="F5F6F7"/>
+                    </a:solidFill>
+                  </a:tcPr>
+                </a:tc>
+                <a:tc>
+                  <a:txBody>
+                    <a:bodyPr/>
+                    <a:lstStyle/>
+                    <a:p>
+                      <a:pPr algn="ctr" indent="0" marL="0">
+                        <a:buNone/>
+                      </a:pPr>
+                      <a:r>
+                        <a:rPr lang="en-US" sz="1500" b="1" dirty="0">
+                          <a:solidFill>
+                            <a:srgbClr val="1F4E9C"/>
+                          </a:solidFill>
+                          <a:latin typeface="微软雅黑" pitchFamily="34" charset="0"/>
+                          <a:ea typeface="微软雅黑" pitchFamily="34" charset="-122"/>
+                          <a:cs typeface="微软雅黑" pitchFamily="34" charset="-120"/>
+                        </a:rPr>
+                        <a:t>产物</a:t>
+                      </a:r>
+                      <a:endParaRPr lang="en-US" sz="1500" dirty="0">
+                        <a:latin typeface="微软雅黑" charset="0"/>
+                        <a:ea typeface="微软雅黑" charset="0"/>
+                        <a:cs typeface="微软雅黑" charset="0"/>
+                      </a:endParaRPr>
+                    </a:p>
+                  </a:txBody>
+                  <a:tcPr marL="91440" marR="91440" marT="45720" marB="45720" anchor="ctr">
+                    <a:lnL w="9525" cap="flat" cmpd="sng" algn="ctr">
+                      <a:solidFill>
+                        <a:srgbClr val="D8DBE0"/>
+                      </a:solidFill>
+                      <a:prstDash val="solid"/>
+                      <a:round/>
+                      <a:headEnd type="none" w="med" len="med"/>
+                      <a:tailEnd type="none" w="med" len="med"/>
+                    </a:lnL>
+                    <a:lnR w="9525" cap="flat" cmpd="sng" algn="ctr">
+                      <a:solidFill>
+                        <a:srgbClr val="D8DBE0"/>
+                      </a:solidFill>
+                      <a:prstDash val="solid"/>
+                      <a:round/>
+                      <a:headEnd type="none" w="med" len="med"/>
+                      <a:tailEnd type="none" w="med" len="med"/>
+                    </a:lnR>
+                    <a:lnT w="9525" cap="flat" cmpd="sng" algn="ctr">
+                      <a:solidFill>
+                        <a:srgbClr val="D8DBE0"/>
+                      </a:solidFill>
+                      <a:prstDash val="solid"/>
+                      <a:round/>
+                      <a:headEnd type="none" w="med" len="med"/>
+                      <a:tailEnd type="none" w="med" len="med"/>
+                    </a:lnT>
+                    <a:lnB w="9525" cap="flat" cmpd="sng" algn="ctr">
+                      <a:solidFill>
+                        <a:srgbClr val="D8DBE0"/>
+                      </a:solidFill>
+                      <a:prstDash val="solid"/>
+                      <a:round/>
+                      <a:headEnd type="none" w="med" len="med"/>
+                      <a:tailEnd type="none" w="med" len="med"/>
+                    </a:lnB>
+                    <a:solidFill>
+                      <a:srgbClr val="F5F6F7"/>
+                    </a:solidFill>
+                  </a:tcPr>
+                </a:tc>
+                <a:tc>
+                  <a:txBody>
+                    <a:bodyPr/>
+                    <a:lstStyle/>
+                    <a:p>
+                      <a:pPr algn="ctr" indent="0" marL="0">
+                        <a:buNone/>
+                      </a:pPr>
+                      <a:r>
+                        <a:rPr lang="en-US" sz="1500" b="1" dirty="0">
+                          <a:solidFill>
+                            <a:srgbClr val="1F4E9C"/>
+                          </a:solidFill>
+                          <a:latin typeface="微软雅黑" pitchFamily="34" charset="0"/>
+                          <a:ea typeface="微软雅黑" pitchFamily="34" charset="-122"/>
+                          <a:cs typeface="微软雅黑" pitchFamily="34" charset="-120"/>
+                        </a:rPr>
+                        <a:t>发生了什么</a:t>
+                      </a:r>
+                      <a:endParaRPr lang="en-US" sz="1500" dirty="0">
+                        <a:latin typeface="微软雅黑" charset="0"/>
+                        <a:ea typeface="微软雅黑" charset="0"/>
+                        <a:cs typeface="微软雅黑" charset="0"/>
+                      </a:endParaRPr>
+                    </a:p>
+                  </a:txBody>
+                  <a:tcPr marL="91440" marR="91440" marT="45720" marB="45720" anchor="ctr">
+                    <a:lnL w="9525" cap="flat" cmpd="sng" algn="ctr">
+                      <a:solidFill>
+                        <a:srgbClr val="D8DBE0"/>
+                      </a:solidFill>
+                      <a:prstDash val="solid"/>
+                      <a:round/>
+                      <a:headEnd type="none" w="med" len="med"/>
+                      <a:tailEnd type="none" w="med" len="med"/>
+                    </a:lnL>
+                    <a:lnR w="9525" cap="flat" cmpd="sng" algn="ctr">
+                      <a:solidFill>
+                        <a:srgbClr val="D8DBE0"/>
+                      </a:solidFill>
+                      <a:prstDash val="solid"/>
+                      <a:round/>
+                      <a:headEnd type="none" w="med" len="med"/>
+                      <a:tailEnd type="none" w="med" len="med"/>
+                    </a:lnR>
+                    <a:lnT w="9525" cap="flat" cmpd="sng" algn="ctr">
+                      <a:solidFill>
+                        <a:srgbClr val="D8DBE0"/>
+                      </a:solidFill>
+                      <a:prstDash val="solid"/>
+                      <a:round/>
+                      <a:headEnd type="none" w="med" len="med"/>
+                      <a:tailEnd type="none" w="med" len="med"/>
+                    </a:lnT>
+                    <a:lnB w="9525" cap="flat" cmpd="sng" algn="ctr">
+                      <a:solidFill>
+                        <a:srgbClr val="D8DBE0"/>
+                      </a:solidFill>
+                      <a:prstDash val="solid"/>
+                      <a:round/>
+                      <a:headEnd type="none" w="med" len="med"/>
+                      <a:tailEnd type="none" w="med" len="med"/>
+                    </a:lnB>
+                    <a:solidFill>
+                      <a:srgbClr val="F5F6F7"/>
+                    </a:solidFill>
+                  </a:tcPr>
+                </a:tc>
+              </a:tr>
+              <a:tr h="420624">
+                <a:tc>
+                  <a:txBody>
+                    <a:bodyPr/>
+                    <a:lstStyle/>
+                    <a:p>
+                      <a:pPr algn="ctr" indent="0" marL="0">
+                        <a:buNone/>
+                      </a:pPr>
+                      <a:r>
+                        <a:rPr lang="en-US" sz="1500" dirty="0">
+                          <a:solidFill>
+                            <a:srgbClr val="1F2329"/>
+                          </a:solidFill>
+                          <a:latin typeface="微软雅黑" pitchFamily="34" charset="0"/>
+                          <a:ea typeface="微软雅黑" pitchFamily="34" charset="-122"/>
+                          <a:cs typeface="微软雅黑" pitchFamily="34" charset="-120"/>
+                        </a:rPr>
+                        <a:t>写代码</a:t>
+                      </a:r>
+                      <a:endParaRPr lang="en-US" sz="1500" dirty="0">
+                        <a:latin typeface="微软雅黑" charset="0"/>
+                        <a:ea typeface="微软雅黑" charset="0"/>
+                        <a:cs typeface="微软雅黑" charset="0"/>
+                      </a:endParaRPr>
+                    </a:p>
+                  </a:txBody>
+                  <a:tcPr marL="91440" marR="91440" marT="45720" marB="45720" anchor="ctr">
+                    <a:lnL w="9525" cap="flat" cmpd="sng" algn="ctr">
+                      <a:solidFill>
+                        <a:srgbClr val="D8DBE0"/>
+                      </a:solidFill>
+                      <a:prstDash val="solid"/>
+                      <a:round/>
+                      <a:headEnd type="none" w="med" len="med"/>
+                      <a:tailEnd type="none" w="med" len="med"/>
+                    </a:lnL>
+                    <a:lnR w="9525" cap="flat" cmpd="sng" algn="ctr">
+                      <a:solidFill>
+                        <a:srgbClr val="D8DBE0"/>
+                      </a:solidFill>
+                      <a:prstDash val="solid"/>
+                      <a:round/>
+                      <a:headEnd type="none" w="med" len="med"/>
+                      <a:tailEnd type="none" w="med" len="med"/>
+                    </a:lnR>
+                    <a:lnT w="9525" cap="flat" cmpd="sng" algn="ctr">
+                      <a:solidFill>
+                        <a:srgbClr val="D8DBE0"/>
+                      </a:solidFill>
+                      <a:prstDash val="solid"/>
+                      <a:round/>
+                      <a:headEnd type="none" w="med" len="med"/>
+                      <a:tailEnd type="none" w="med" len="med"/>
+                    </a:lnT>
+                    <a:lnB w="9525" cap="flat" cmpd="sng" algn="ctr">
+                      <a:solidFill>
+                        <a:srgbClr val="D8DBE0"/>
+                      </a:solidFill>
+                      <a:prstDash val="solid"/>
+                      <a:round/>
+                      <a:headEnd type="none" w="med" len="med"/>
+                      <a:tailEnd type="none" w="med" len="med"/>
+                    </a:lnB>
+                    <a:solidFill>
+                      <a:srgbClr val="FFFFFF"/>
+                    </a:solidFill>
+                  </a:tcPr>
+                </a:tc>
+                <a:tc>
+                  <a:txBody>
+                    <a:bodyPr/>
+                    <a:lstStyle/>
+                    <a:p>
+                      <a:pPr algn="ctr" indent="0" marL="0">
+                        <a:buNone/>
+                      </a:pPr>
+                      <a:r>
+                        <a:rPr lang="en-US" sz="1500" dirty="0">
+                          <a:solidFill>
+                            <a:srgbClr val="1F2329"/>
+                          </a:solidFill>
+                          <a:latin typeface="微软雅黑" pitchFamily="34" charset="0"/>
+                          <a:ea typeface="微软雅黑" pitchFamily="34" charset="-122"/>
+                          <a:cs typeface="微软雅黑" pitchFamily="34" charset="-120"/>
+                        </a:rPr>
+                        <a:t>hello.c（源代码）</a:t>
+                      </a:r>
+                      <a:endParaRPr lang="en-US" sz="1500" dirty="0">
+                        <a:latin typeface="微软雅黑" charset="0"/>
+                        <a:ea typeface="微软雅黑" charset="0"/>
+                        <a:cs typeface="微软雅黑" charset="0"/>
+                      </a:endParaRPr>
+                    </a:p>
+                  </a:txBody>
+                  <a:tcPr marL="91440" marR="91440" marT="45720" marB="45720" anchor="ctr">
+                    <a:lnL w="9525" cap="flat" cmpd="sng" algn="ctr">
+                      <a:solidFill>
+                        <a:srgbClr val="D8DBE0"/>
+                      </a:solidFill>
+                      <a:prstDash val="solid"/>
+                      <a:round/>
+                      <a:headEnd type="none" w="med" len="med"/>
+                      <a:tailEnd type="none" w="med" len="med"/>
+                    </a:lnL>
+                    <a:lnR w="9525" cap="flat" cmpd="sng" algn="ctr">
+                      <a:solidFill>
+                        <a:srgbClr val="D8DBE0"/>
+                      </a:solidFill>
+                      <a:prstDash val="solid"/>
+                      <a:round/>
+                      <a:headEnd type="none" w="med" len="med"/>
+                      <a:tailEnd type="none" w="med" len="med"/>
+                    </a:lnR>
+                    <a:lnT w="9525" cap="flat" cmpd="sng" algn="ctr">
+                      <a:solidFill>
+                        <a:srgbClr val="D8DBE0"/>
+                      </a:solidFill>
+                      <a:prstDash val="solid"/>
+                      <a:round/>
+                      <a:headEnd type="none" w="med" len="med"/>
+                      <a:tailEnd type="none" w="med" len="med"/>
+                    </a:lnT>
+                    <a:lnB w="9525" cap="flat" cmpd="sng" algn="ctr">
+                      <a:solidFill>
+                        <a:srgbClr val="D8DBE0"/>
+                      </a:solidFill>
+                      <a:prstDash val="solid"/>
+                      <a:round/>
+                      <a:headEnd type="none" w="med" len="med"/>
+                      <a:tailEnd type="none" w="med" len="med"/>
+                    </a:lnB>
+                    <a:solidFill>
+                      <a:srgbClr val="FFFFFF"/>
+                    </a:solidFill>
+                  </a:tcPr>
+                </a:tc>
+                <a:tc>
+                  <a:txBody>
+                    <a:bodyPr/>
+                    <a:lstStyle/>
+                    <a:p>
+                      <a:pPr algn="ctr" indent="0" marL="0">
+                        <a:buNone/>
+                      </a:pPr>
+                      <a:r>
+                        <a:rPr lang="en-US" sz="1500" dirty="0">
+                          <a:solidFill>
+                            <a:srgbClr val="1F2329"/>
+                          </a:solidFill>
+                          <a:latin typeface="微软雅黑" pitchFamily="34" charset="0"/>
+                          <a:ea typeface="微软雅黑" pitchFamily="34" charset="-122"/>
+                          <a:cs typeface="微软雅黑" pitchFamily="34" charset="-120"/>
+                        </a:rPr>
+                        <a:t>你用C语言写下想法</a:t>
+                      </a:r>
+                      <a:endParaRPr lang="en-US" sz="1500" dirty="0">
+                        <a:latin typeface="微软雅黑" charset="0"/>
+                        <a:ea typeface="微软雅黑" charset="0"/>
+                        <a:cs typeface="微软雅黑" charset="0"/>
+                      </a:endParaRPr>
+                    </a:p>
+                  </a:txBody>
+                  <a:tcPr marL="91440" marR="91440" marT="45720" marB="45720" anchor="ctr">
+                    <a:lnL w="9525" cap="flat" cmpd="sng" algn="ctr">
+                      <a:solidFill>
+                        <a:srgbClr val="D8DBE0"/>
+                      </a:solidFill>
+                      <a:prstDash val="solid"/>
+                      <a:round/>
+                      <a:headEnd type="none" w="med" len="med"/>
+                      <a:tailEnd type="none" w="med" len="med"/>
+                    </a:lnL>
+                    <a:lnR w="9525" cap="flat" cmpd="sng" algn="ctr">
+                      <a:solidFill>
+                        <a:srgbClr val="D8DBE0"/>
+                      </a:solidFill>
+                      <a:prstDash val="solid"/>
+                      <a:round/>
+                      <a:headEnd type="none" w="med" len="med"/>
+                      <a:tailEnd type="none" w="med" len="med"/>
+                    </a:lnR>
+                    <a:lnT w="9525" cap="flat" cmpd="sng" algn="ctr">
+                      <a:solidFill>
+                        <a:srgbClr val="D8DBE0"/>
+                      </a:solidFill>
+                      <a:prstDash val="solid"/>
+                      <a:round/>
+                      <a:headEnd type="none" w="med" len="med"/>
+                      <a:tailEnd type="none" w="med" len="med"/>
+                    </a:lnT>
+                    <a:lnB w="9525" cap="flat" cmpd="sng" algn="ctr">
+                      <a:solidFill>
+                        <a:srgbClr val="D8DBE0"/>
+                      </a:solidFill>
+                      <a:prstDash val="solid"/>
+                      <a:round/>
+                      <a:headEnd type="none" w="med" len="med"/>
+                      <a:tailEnd type="none" w="med" len="med"/>
+                    </a:lnB>
+                    <a:solidFill>
+                      <a:srgbClr val="FFFFFF"/>
+                    </a:solidFill>
+                  </a:tcPr>
+                </a:tc>
+              </a:tr>
+              <a:tr h="420624">
+                <a:tc>
+                  <a:txBody>
+                    <a:bodyPr/>
+                    <a:lstStyle/>
+                    <a:p>
+                      <a:pPr algn="ctr" indent="0" marL="0">
+                        <a:buNone/>
+                      </a:pPr>
+                      <a:r>
+                        <a:rPr lang="en-US" sz="1500" dirty="0">
+                          <a:solidFill>
+                            <a:srgbClr val="1F2329"/>
+                          </a:solidFill>
+                          <a:latin typeface="微软雅黑" pitchFamily="34" charset="0"/>
+                          <a:ea typeface="微软雅黑" pitchFamily="34" charset="-122"/>
+                          <a:cs typeface="微软雅黑" pitchFamily="34" charset="-120"/>
+                        </a:rPr>
+                        <a:t>编译</a:t>
+                      </a:r>
+                      <a:endParaRPr lang="en-US" sz="1500" dirty="0">
+                        <a:latin typeface="微软雅黑" charset="0"/>
+                        <a:ea typeface="微软雅黑" charset="0"/>
+                        <a:cs typeface="微软雅黑" charset="0"/>
+                      </a:endParaRPr>
+                    </a:p>
+                  </a:txBody>
+                  <a:tcPr marL="91440" marR="91440" marT="45720" marB="45720" anchor="ctr">
+                    <a:lnL w="9525" cap="flat" cmpd="sng" algn="ctr">
+                      <a:solidFill>
+                        <a:srgbClr val="D8DBE0"/>
+                      </a:solidFill>
+                      <a:prstDash val="solid"/>
+                      <a:round/>
+                      <a:headEnd type="none" w="med" len="med"/>
+                      <a:tailEnd type="none" w="med" len="med"/>
+                    </a:lnL>
+                    <a:lnR w="9525" cap="flat" cmpd="sng" algn="ctr">
+                      <a:solidFill>
+                        <a:srgbClr val="D8DBE0"/>
+                      </a:solidFill>
+                      <a:prstDash val="solid"/>
+                      <a:round/>
+                      <a:headEnd type="none" w="med" len="med"/>
+                      <a:tailEnd type="none" w="med" len="med"/>
+                    </a:lnR>
+                    <a:lnT w="9525" cap="flat" cmpd="sng" algn="ctr">
+                      <a:solidFill>
+                        <a:srgbClr val="D8DBE0"/>
+                      </a:solidFill>
+                      <a:prstDash val="solid"/>
+                      <a:round/>
+                      <a:headEnd type="none" w="med" len="med"/>
+                      <a:tailEnd type="none" w="med" len="med"/>
+                    </a:lnT>
+                    <a:lnB w="9525" cap="flat" cmpd="sng" algn="ctr">
+                      <a:solidFill>
+                        <a:srgbClr val="D8DBE0"/>
+                      </a:solidFill>
+                      <a:prstDash val="solid"/>
+                      <a:round/>
+                      <a:headEnd type="none" w="med" len="med"/>
+                      <a:tailEnd type="none" w="med" len="med"/>
+                    </a:lnB>
+                    <a:solidFill>
+                      <a:srgbClr val="FFFFFF"/>
+                    </a:solidFill>
+                  </a:tcPr>
+                </a:tc>
+                <a:tc>
+                  <a:txBody>
+                    <a:bodyPr/>
+                    <a:lstStyle/>
+                    <a:p>
+                      <a:pPr algn="ctr" indent="0" marL="0">
+                        <a:buNone/>
+                      </a:pPr>
+                      <a:r>
+                        <a:rPr lang="en-US" sz="1500" dirty="0">
+                          <a:solidFill>
+                            <a:srgbClr val="1F2329"/>
+                          </a:solidFill>
+                          <a:latin typeface="微软雅黑" pitchFamily="34" charset="0"/>
+                          <a:ea typeface="微软雅黑" pitchFamily="34" charset="-122"/>
+                          <a:cs typeface="微软雅黑" pitchFamily="34" charset="-120"/>
+                        </a:rPr>
+                        <a:t>hello.exe（可执行文件）</a:t>
+                      </a:r>
+                      <a:endParaRPr lang="en-US" sz="1500" dirty="0">
+                        <a:latin typeface="微软雅黑" charset="0"/>
+                        <a:ea typeface="微软雅黑" charset="0"/>
+                        <a:cs typeface="微软雅黑" charset="0"/>
+                      </a:endParaRPr>
+                    </a:p>
+                  </a:txBody>
+                  <a:tcPr marL="91440" marR="91440" marT="45720" marB="45720" anchor="ctr">
+                    <a:lnL w="9525" cap="flat" cmpd="sng" algn="ctr">
+                      <a:solidFill>
+                        <a:srgbClr val="D8DBE0"/>
+                      </a:solidFill>
+                      <a:prstDash val="solid"/>
+                      <a:round/>
+                      <a:headEnd type="none" w="med" len="med"/>
+                      <a:tailEnd type="none" w="med" len="med"/>
+                    </a:lnL>
+                    <a:lnR w="9525" cap="flat" cmpd="sng" algn="ctr">
+                      <a:solidFill>
+                        <a:srgbClr val="D8DBE0"/>
+                      </a:solidFill>
+                      <a:prstDash val="solid"/>
+                      <a:round/>
+                      <a:headEnd type="none" w="med" len="med"/>
+                      <a:tailEnd type="none" w="med" len="med"/>
+                    </a:lnR>
+                    <a:lnT w="9525" cap="flat" cmpd="sng" algn="ctr">
+                      <a:solidFill>
+                        <a:srgbClr val="D8DBE0"/>
+                      </a:solidFill>
+                      <a:prstDash val="solid"/>
+                      <a:round/>
+                      <a:headEnd type="none" w="med" len="med"/>
+                      <a:tailEnd type="none" w="med" len="med"/>
+                    </a:lnT>
+                    <a:lnB w="9525" cap="flat" cmpd="sng" algn="ctr">
+                      <a:solidFill>
+                        <a:srgbClr val="D8DBE0"/>
+                      </a:solidFill>
+                      <a:prstDash val="solid"/>
+                      <a:round/>
+                      <a:headEnd type="none" w="med" len="med"/>
+                      <a:tailEnd type="none" w="med" len="med"/>
+                    </a:lnB>
+                    <a:solidFill>
+                      <a:srgbClr val="FFFFFF"/>
+                    </a:solidFill>
+                  </a:tcPr>
+                </a:tc>
+                <a:tc>
+                  <a:txBody>
+                    <a:bodyPr/>
+                    <a:lstStyle/>
+                    <a:p>
+                      <a:pPr algn="ctr" indent="0" marL="0">
+                        <a:buNone/>
+                      </a:pPr>
+                      <a:r>
+                        <a:rPr lang="en-US" sz="1500" dirty="0">
+                          <a:solidFill>
+                            <a:srgbClr val="1F2329"/>
+                          </a:solidFill>
+                          <a:latin typeface="微软雅黑" pitchFamily="34" charset="0"/>
+                          <a:ea typeface="微软雅黑" pitchFamily="34" charset="-122"/>
+                          <a:cs typeface="微软雅黑" pitchFamily="34" charset="-120"/>
+                        </a:rPr>
+                        <a:t>编译器把C代码翻译成机器能执行的指令</a:t>
+                      </a:r>
+                      <a:endParaRPr lang="en-US" sz="1500" dirty="0">
+                        <a:latin typeface="微软雅黑" charset="0"/>
+                        <a:ea typeface="微软雅黑" charset="0"/>
+                        <a:cs typeface="微软雅黑" charset="0"/>
+                      </a:endParaRPr>
+                    </a:p>
+                  </a:txBody>
+                  <a:tcPr marL="91440" marR="91440" marT="45720" marB="45720" anchor="ctr">
+                    <a:lnL w="9525" cap="flat" cmpd="sng" algn="ctr">
+                      <a:solidFill>
+                        <a:srgbClr val="D8DBE0"/>
+                      </a:solidFill>
+                      <a:prstDash val="solid"/>
+                      <a:round/>
+                      <a:headEnd type="none" w="med" len="med"/>
+                      <a:tailEnd type="none" w="med" len="med"/>
+                    </a:lnL>
+                    <a:lnR w="9525" cap="flat" cmpd="sng" algn="ctr">
+                      <a:solidFill>
+                        <a:srgbClr val="D8DBE0"/>
+                      </a:solidFill>
+                      <a:prstDash val="solid"/>
+                      <a:round/>
+                      <a:headEnd type="none" w="med" len="med"/>
+                      <a:tailEnd type="none" w="med" len="med"/>
+                    </a:lnR>
+                    <a:lnT w="9525" cap="flat" cmpd="sng" algn="ctr">
+                      <a:solidFill>
+                        <a:srgbClr val="D8DBE0"/>
+                      </a:solidFill>
+                      <a:prstDash val="solid"/>
+                      <a:round/>
+                      <a:headEnd type="none" w="med" len="med"/>
+                      <a:tailEnd type="none" w="med" len="med"/>
+                    </a:lnT>
+                    <a:lnB w="9525" cap="flat" cmpd="sng" algn="ctr">
+                      <a:solidFill>
+                        <a:srgbClr val="D8DBE0"/>
+                      </a:solidFill>
+                      <a:prstDash val="solid"/>
+                      <a:round/>
+                      <a:headEnd type="none" w="med" len="med"/>
+                      <a:tailEnd type="none" w="med" len="med"/>
+                    </a:lnB>
+                    <a:solidFill>
+                      <a:srgbClr val="FFFFFF"/>
+                    </a:solidFill>
+                  </a:tcPr>
+                </a:tc>
+              </a:tr>
+              <a:tr h="420624">
+                <a:tc>
+                  <a:txBody>
+                    <a:bodyPr/>
+                    <a:lstStyle/>
+                    <a:p>
+                      <a:pPr algn="ctr" indent="0" marL="0">
+                        <a:buNone/>
+                      </a:pPr>
+                      <a:r>
+                        <a:rPr lang="en-US" sz="1500" dirty="0">
+                          <a:solidFill>
+                            <a:srgbClr val="1F2329"/>
+                          </a:solidFill>
+                          <a:latin typeface="微软雅黑" pitchFamily="34" charset="0"/>
+                          <a:ea typeface="微软雅黑" pitchFamily="34" charset="-122"/>
+                          <a:cs typeface="微软雅黑" pitchFamily="34" charset="-120"/>
+                        </a:rPr>
+                        <a:t>运行</a:t>
+                      </a:r>
+                      <a:endParaRPr lang="en-US" sz="1500" dirty="0">
+                        <a:latin typeface="微软雅黑" charset="0"/>
+                        <a:ea typeface="微软雅黑" charset="0"/>
+                        <a:cs typeface="微软雅黑" charset="0"/>
+                      </a:endParaRPr>
+                    </a:p>
+                  </a:txBody>
+                  <a:tcPr marL="91440" marR="91440" marT="45720" marB="45720" anchor="ctr">
+                    <a:lnL w="9525" cap="flat" cmpd="sng" algn="ctr">
+                      <a:solidFill>
+                        <a:srgbClr val="D8DBE0"/>
+                      </a:solidFill>
+                      <a:prstDash val="solid"/>
+                      <a:round/>
+                      <a:headEnd type="none" w="med" len="med"/>
+                      <a:tailEnd type="none" w="med" len="med"/>
+                    </a:lnL>
+                    <a:lnR w="9525" cap="flat" cmpd="sng" algn="ctr">
+                      <a:solidFill>
+                        <a:srgbClr val="D8DBE0"/>
+                      </a:solidFill>
+                      <a:prstDash val="solid"/>
+                      <a:round/>
+                      <a:headEnd type="none" w="med" len="med"/>
+                      <a:tailEnd type="none" w="med" len="med"/>
+                    </a:lnR>
+                    <a:lnT w="9525" cap="flat" cmpd="sng" algn="ctr">
+                      <a:solidFill>
+                        <a:srgbClr val="D8DBE0"/>
+                      </a:solidFill>
+                      <a:prstDash val="solid"/>
+                      <a:round/>
+                      <a:headEnd type="none" w="med" len="med"/>
+                      <a:tailEnd type="none" w="med" len="med"/>
+                    </a:lnT>
+                    <a:lnB w="9525" cap="flat" cmpd="sng" algn="ctr">
+                      <a:solidFill>
+                        <a:srgbClr val="D8DBE0"/>
+                      </a:solidFill>
+                      <a:prstDash val="solid"/>
+                      <a:round/>
+                      <a:headEnd type="none" w="med" len="med"/>
+                      <a:tailEnd type="none" w="med" len="med"/>
+                    </a:lnB>
+                    <a:solidFill>
+                      <a:srgbClr val="FFFFFF"/>
+                    </a:solidFill>
+                  </a:tcPr>
+                </a:tc>
+                <a:tc>
+                  <a:txBody>
+                    <a:bodyPr/>
+                    <a:lstStyle/>
+                    <a:p>
+                      <a:pPr algn="ctr" indent="0" marL="0">
+                        <a:buNone/>
+                      </a:pPr>
+                      <a:r>
+                        <a:rPr lang="en-US" sz="1500" dirty="0">
+                          <a:solidFill>
+                            <a:srgbClr val="1F2329"/>
+                          </a:solidFill>
+                          <a:latin typeface="微软雅黑" pitchFamily="34" charset="0"/>
+                          <a:ea typeface="微软雅黑" pitchFamily="34" charset="-122"/>
+                          <a:cs typeface="微软雅黑" pitchFamily="34" charset="-120"/>
+                        </a:rPr>
+                        <a:t>屏幕输出</a:t>
+                      </a:r>
+                      <a:endParaRPr lang="en-US" sz="1500" dirty="0">
+                        <a:latin typeface="微软雅黑" charset="0"/>
+                        <a:ea typeface="微软雅黑" charset="0"/>
+                        <a:cs typeface="微软雅黑" charset="0"/>
+                      </a:endParaRPr>
+                    </a:p>
+                  </a:txBody>
+                  <a:tcPr marL="91440" marR="91440" marT="45720" marB="45720" anchor="ctr">
+                    <a:lnL w="9525" cap="flat" cmpd="sng" algn="ctr">
+                      <a:solidFill>
+                        <a:srgbClr val="D8DBE0"/>
+                      </a:solidFill>
+                      <a:prstDash val="solid"/>
+                      <a:round/>
+                      <a:headEnd type="none" w="med" len="med"/>
+                      <a:tailEnd type="none" w="med" len="med"/>
+                    </a:lnL>
+                    <a:lnR w="9525" cap="flat" cmpd="sng" algn="ctr">
+                      <a:solidFill>
+                        <a:srgbClr val="D8DBE0"/>
+                      </a:solidFill>
+                      <a:prstDash val="solid"/>
+                      <a:round/>
+                      <a:headEnd type="none" w="med" len="med"/>
+                      <a:tailEnd type="none" w="med" len="med"/>
+                    </a:lnR>
+                    <a:lnT w="9525" cap="flat" cmpd="sng" algn="ctr">
+                      <a:solidFill>
+                        <a:srgbClr val="D8DBE0"/>
+                      </a:solidFill>
+                      <a:prstDash val="solid"/>
+                      <a:round/>
+                      <a:headEnd type="none" w="med" len="med"/>
+                      <a:tailEnd type="none" w="med" len="med"/>
+                    </a:lnT>
+                    <a:lnB w="9525" cap="flat" cmpd="sng" algn="ctr">
+                      <a:solidFill>
+                        <a:srgbClr val="D8DBE0"/>
+                      </a:solidFill>
+                      <a:prstDash val="solid"/>
+                      <a:round/>
+                      <a:headEnd type="none" w="med" len="med"/>
+                      <a:tailEnd type="none" w="med" len="med"/>
+                    </a:lnB>
+                    <a:solidFill>
+                      <a:srgbClr val="FFFFFF"/>
+                    </a:solidFill>
+                  </a:tcPr>
+                </a:tc>
+                <a:tc>
+                  <a:txBody>
+                    <a:bodyPr/>
+                    <a:lstStyle/>
+                    <a:p>
+                      <a:pPr algn="ctr" indent="0" marL="0">
+                        <a:buNone/>
+                      </a:pPr>
+                      <a:r>
+                        <a:rPr lang="en-US" sz="1500" dirty="0">
+                          <a:solidFill>
+                            <a:srgbClr val="1F2329"/>
+                          </a:solidFill>
+                          <a:latin typeface="微软雅黑" pitchFamily="34" charset="0"/>
+                          <a:ea typeface="微软雅黑" pitchFamily="34" charset="-122"/>
+                          <a:cs typeface="微软雅黑" pitchFamily="34" charset="-120"/>
+                        </a:rPr>
+                        <a:t>电脑执行可执行文件，打出两行字</a:t>
+                      </a:r>
+                      <a:endParaRPr lang="en-US" sz="1500" dirty="0">
+                        <a:latin typeface="微软雅黑" charset="0"/>
+                        <a:ea typeface="微软雅黑" charset="0"/>
+                        <a:cs typeface="微软雅黑" charset="0"/>
+                      </a:endParaRPr>
+                    </a:p>
+                  </a:txBody>
+                  <a:tcPr marL="91440" marR="91440" marT="45720" marB="45720" anchor="ctr">
+                    <a:lnL w="9525" cap="flat" cmpd="sng" algn="ctr">
+                      <a:solidFill>
+                        <a:srgbClr val="D8DBE0"/>
+                      </a:solidFill>
+                      <a:prstDash val="solid"/>
+                      <a:round/>
+                      <a:headEnd type="none" w="med" len="med"/>
+                      <a:tailEnd type="none" w="med" len="med"/>
+                    </a:lnL>
+                    <a:lnR w="9525" cap="flat" cmpd="sng" algn="ctr">
+                      <a:solidFill>
+                        <a:srgbClr val="D8DBE0"/>
+                      </a:solidFill>
+                      <a:prstDash val="solid"/>
+                      <a:round/>
+                      <a:headEnd type="none" w="med" len="med"/>
+                      <a:tailEnd type="none" w="med" len="med"/>
+                    </a:lnR>
+                    <a:lnT w="9525" cap="flat" cmpd="sng" algn="ctr">
+                      <a:solidFill>
+                        <a:srgbClr val="D8DBE0"/>
+                      </a:solidFill>
+                      <a:prstDash val="solid"/>
+                      <a:round/>
+                      <a:headEnd type="none" w="med" len="med"/>
+                      <a:tailEnd type="none" w="med" len="med"/>
+                    </a:lnT>
+                    <a:lnB w="9525" cap="flat" cmpd="sng" algn="ctr">
+                      <a:solidFill>
+                        <a:srgbClr val="D8DBE0"/>
+                      </a:solidFill>
+                      <a:prstDash val="solid"/>
+                      <a:round/>
+                      <a:headEnd type="none" w="med" len="med"/>
+                      <a:tailEnd type="none" w="med" len="med"/>
+                    </a:lnB>
+                    <a:solidFill>
+                      <a:srgbClr val="FFFFFF"/>
+                    </a:solidFill>
+                  </a:tcPr>
+                </a:tc>
+              </a:tr>
+            </a:tbl>
+          </a:graphicData>
+        </a:graphic>
+      </p:graphicFrame>
+      <p:sp>
+        <p:nvSpPr>
+          <p:cNvPr id="6" name="Text 3"/>
           <p:cNvSpPr/>
           <p:nvPr/>
         </p:nvSpPr>
         <p:spPr>
           <a:xfrm>
-            <a:off x="822960" y="2395728"/>
-            <a:ext cx="10545775" cy="3172968"/>
-          </a:xfrm>
-          <a:prstGeom prst="rect">
-            <a:avLst/>
-          </a:prstGeom>
-          <a:solidFill>
-            <a:srgbClr val="F5F6F7"/>
-          </a:solidFill>
-          <a:ln w="9525">
-            <a:solidFill>
-              <a:srgbClr val="D8DBE0"/>
-            </a:solidFill>
-            <a:prstDash val="solid"/>
-          </a:ln>
-        </p:spPr>
-      </p:sp>
-      <p:sp>
-        <p:nvSpPr>
-          <p:cNvPr id="6" name="Text 4"/>
-          <p:cNvSpPr/>
-          <p:nvPr/>
-        </p:nvSpPr>
-        <p:spPr>
-          <a:xfrm>
-            <a:off x="1078992" y="2505456"/>
-            <a:ext cx="10033711" cy="2953512"/>
+            <a:off x="896112" y="4306824"/>
+            <a:ext cx="10454335" cy="397764"/>
           </a:xfrm>
           <a:prstGeom prst="rect">
             <a:avLst/>
@@ -9709,46 +12396,63 @@
           <a:p>
             <a:pPr algn="l" indent="0" marL="0">
               <a:lnSpc>
-                <a:spcPct val="125000"/>
+                <a:spcPct val="115000"/>
               </a:lnSpc>
               <a:buNone/>
             </a:pPr>
             <a:r>
-              <a:rPr lang="en-US" sz="1300" dirty="0">
-                <a:solidFill>
-                  <a:srgbClr val="1F2329"/>
-                </a:solidFill>
-                <a:latin typeface="Consolas" pitchFamily="34" charset="0"/>
-                <a:ea typeface="Consolas" pitchFamily="34" charset="-122"/>
-                <a:cs typeface="Consolas" pitchFamily="34" charset="-120"/>
-              </a:rPr>
-              <a:t>// 头文件：引入别人写好的工具（printf在这里）
-#include &lt;stdio.h&gt;
-// 宏定义：给常量起名字
-#define MaxSize 1000
-// 主函数：程序从这里开始执行
-int main(){
-    // 函数体：一条条指令
-    printf("你好，重邮802！\n");
-    // return 0：告诉系统"正常结束"
-    return 0;
-}
-</a:t>
-            </a:r>
-            <a:endParaRPr lang="en-US" sz="1300" dirty="0"/>
-          </a:p>
-        </p:txBody>
-      </p:sp>
-      <p:sp>
-        <p:nvSpPr>
-          <p:cNvPr id="7" name="Text 5"/>
+              <a:rPr lang="en-US" sz="1800" b="1" dirty="0">
+                <a:solidFill>
+                  <a:srgbClr val="1F4E9C"/>
+                </a:solidFill>
+                <a:latin typeface="微软雅黑" pitchFamily="34" charset="0"/>
+                <a:ea typeface="微软雅黑" pitchFamily="34" charset="-122"/>
+                <a:cs typeface="微软雅黑" pitchFamily="34" charset="-120"/>
+              </a:rPr>
+              <a:t>•  </a:t>
+            </a:r>
+            <a:pPr algn="l" indent="0" marL="0">
+              <a:lnSpc>
+                <a:spcPct val="115000"/>
+              </a:lnSpc>
+              <a:buNone/>
+            </a:pPr>
+            <a:r>
+              <a:rPr lang="en-US" sz="1800" b="1" dirty="0">
+                <a:solidFill>
+                  <a:srgbClr val="000000"/>
+                </a:solidFill>
+              </a:rPr>
+              <a:t>改了源代码必须重新编译</a:t>
+            </a:r>
+            <a:pPr algn="l" indent="0" marL="0">
+              <a:lnSpc>
+                <a:spcPct val="115000"/>
+              </a:lnSpc>
+              <a:buNone/>
+            </a:pPr>
+            <a:r>
+              <a:rPr lang="en-US" sz="1800" dirty="0">
+                <a:solidFill>
+                  <a:srgbClr val="000000"/>
+                </a:solidFill>
+              </a:rPr>
+              <a:t>，exe不会自己跟着变</a:t>
+            </a:r>
+            <a:endParaRPr lang="en-US" sz="1800" dirty="0"/>
+          </a:p>
+        </p:txBody>
+      </p:sp>
+      <p:sp>
+        <p:nvSpPr>
+          <p:cNvPr id="7" name="Text 4"/>
           <p:cNvSpPr/>
           <p:nvPr/>
         </p:nvSpPr>
         <p:spPr>
           <a:xfrm>
-            <a:off x="822960" y="5769864"/>
-            <a:ext cx="10545775" cy="339852"/>
+            <a:off x="896112" y="4777740"/>
+            <a:ext cx="10454335" cy="397764"/>
           </a:xfrm>
           <a:prstGeom prst="rect">
             <a:avLst/>
@@ -9761,20 +12465,65 @@
           <a:lstStyle/>
           <a:p>
             <a:pPr algn="l" indent="0" marL="0">
-              <a:buNone/>
-            </a:pPr>
-            <a:r>
-              <a:rPr lang="en-US" sz="1400" dirty="0">
-                <a:solidFill>
-                  <a:srgbClr val="8A9099"/>
+              <a:lnSpc>
+                <a:spcPct val="115000"/>
+              </a:lnSpc>
+              <a:buNone/>
+            </a:pPr>
+            <a:r>
+              <a:rPr lang="en-US" sz="1800" b="1" dirty="0">
+                <a:solidFill>
+                  <a:srgbClr val="1F4E9C"/>
                 </a:solidFill>
                 <a:latin typeface="微软雅黑" pitchFamily="34" charset="0"/>
                 <a:ea typeface="微软雅黑" pitchFamily="34" charset="-122"/>
                 <a:cs typeface="微软雅黑" pitchFamily="34" charset="-120"/>
               </a:rPr>
-              <a:t>先记五个名字，后面的课逐个拆开讲</a:t>
-            </a:r>
-            <a:endParaRPr lang="en-US" sz="1400" dirty="0"/>
+              <a:t>•  </a:t>
+            </a:r>
+            <a:pPr algn="l" indent="0" marL="0">
+              <a:lnSpc>
+                <a:spcPct val="115000"/>
+              </a:lnSpc>
+              <a:buNone/>
+            </a:pPr>
+            <a:r>
+              <a:rPr lang="en-US" sz="1800" dirty="0">
+                <a:solidFill>
+                  <a:srgbClr val="000000"/>
+                </a:solidFill>
+              </a:rPr>
+              <a:t>编译器很严格：</a:t>
+            </a:r>
+            <a:pPr algn="l" indent="0" marL="0">
+              <a:lnSpc>
+                <a:spcPct val="115000"/>
+              </a:lnSpc>
+              <a:buNone/>
+            </a:pPr>
+            <a:r>
+              <a:rPr lang="en-US" sz="1800" b="1" dirty="0">
+                <a:solidFill>
+                  <a:srgbClr val="000000"/>
+                </a:solidFill>
+              </a:rPr>
+              <a:t>少一个分号，它就拒绝编译</a:t>
+            </a:r>
+            <a:pPr algn="l" indent="0" marL="0">
+              <a:lnSpc>
+                <a:spcPct val="115000"/>
+              </a:lnSpc>
+              <a:buNone/>
+            </a:pPr>
+            <a:r>
+              <a:rPr lang="en-US" sz="1800" dirty="0">
+                <a:solidFill>
+                  <a:srgbClr val="000000"/>
+                </a:solidFill>
+              </a:rPr>
+              <a:t>，一行都跑不起来</a:t>
+            </a:r>
+            <a:endParaRPr lang="en-US" sz="1800" dirty="0"/>
           </a:p>
         </p:txBody>
       </p:sp>

--- a/课件/C1/C1-A-01/C1-A-01.pptx
+++ b/课件/C1/C1-A-01/C1-A-01.pptx
@@ -22,9 +22,11 @@
     <p:sldId id="270" r:id="rId16"/>
     <p:sldId id="271" r:id="rId17"/>
     <p:sldId id="272" r:id="rId18"/>
+    <p:sldId id="273" r:id="rId19"/>
+    <p:sldId id="274" r:id="rId20"/>
   </p:sldIdLst>
   <p:notesMasterIdLst>
-    <p:notesMasterId r:id="rId19"/>
+    <p:notesMasterId r:id="rId21"/>
   </p:notesMasterIdLst>
   <p:sldSz cx="12191695" cy="6858000"/>
   <p:notesSz cx="6858000" cy="12191695"/>
@@ -1246,6 +1248,182 @@
             <a:fld id="{F7021451-1387-4CA6-816F-3879F97B5CBC}" type="slidenum">
               <a:rPr lang="en-US"/>
               <a:t>17</a:t>
+            </a:fld>
+            <a:endParaRPr lang="en-US"/>
+          </a:p>
+        </p:txBody>
+      </p:sp>
+    </p:spTree>
+    <p:extLst>
+      <p:ext uri="{BB962C8B-B14F-4D97-AF65-F5344CB8AC3E}">
+        <p14:creationId xmlns:p14="http://schemas.microsoft.com/office/powerpoint/2010/main" val="1024086991"/>
+      </p:ext>
+    </p:extLst>
+  </p:cSld>
+  <p:clrMapOvr>
+    <a:masterClrMapping/>
+  </p:clrMapOvr>
+</p:notes>
+</file>
+
+<file path=ppt/notesSlides/notesSlide18.xml><?xml version="1.0" encoding="utf-8"?>
+<p:notes xmlns:a="http://schemas.openxmlformats.org/drawingml/2006/main" xmlns:r="http://schemas.openxmlformats.org/officeDocument/2006/relationships" xmlns:p="http://schemas.openxmlformats.org/presentationml/2006/main">
+  <p:cSld>
+    <p:spTree>
+      <p:nvGrpSpPr>
+        <p:cNvPr id="1" name=""/>
+        <p:cNvGrpSpPr/>
+        <p:nvPr/>
+      </p:nvGrpSpPr>
+      <p:grpSpPr>
+        <a:xfrm>
+          <a:off x="0" y="0"/>
+          <a:ext cx="0" cy="0"/>
+          <a:chOff x="0" y="0"/>
+          <a:chExt cx="0" cy="0"/>
+        </a:xfrm>
+      </p:grpSpPr>
+      <p:sp>
+        <p:nvSpPr>
+          <p:cNvPr id="2" name="Slide Image Placeholder 1"/>
+          <p:cNvSpPr>
+            <a:spLocks noGrp="1" noRot="1" noChangeAspect="1"/>
+          </p:cNvSpPr>
+          <p:nvPr>
+            <p:ph type="sldImg"/>
+          </p:nvPr>
+        </p:nvSpPr>
+        <p:spPr/>
+      </p:sp>
+      <p:sp>
+        <p:nvSpPr>
+          <p:cNvPr id="3" name="Notes Placeholder 2"/>
+          <p:cNvSpPr>
+            <a:spLocks noGrp="1"/>
+          </p:cNvSpPr>
+          <p:nvPr>
+            <p:ph type="body" idx="1"/>
+          </p:nvPr>
+        </p:nvSpPr>
+        <p:spPr/>
+        <p:txBody>
+          <a:bodyPr/>
+          <a:lstStyle/>
+          <a:p>
+            <a:r>
+              <a:rPr lang="en-US" dirty="0"/>
+              <a:t/>
+            </a:r>
+            <a:endParaRPr lang="en-US" dirty="0"/>
+          </a:p>
+        </p:txBody>
+      </p:sp>
+      <p:sp>
+        <p:nvSpPr>
+          <p:cNvPr id="4" name="Slide Number Placeholder 3"/>
+          <p:cNvSpPr>
+            <a:spLocks noGrp="1"/>
+          </p:cNvSpPr>
+          <p:nvPr>
+            <p:ph type="sldNum" sz="quarter" idx="10"/>
+          </p:nvPr>
+        </p:nvSpPr>
+        <p:spPr/>
+        <p:txBody>
+          <a:bodyPr/>
+          <a:lstStyle/>
+          <a:p>
+            <a:fld id="{F7021451-1387-4CA6-816F-3879F97B5CBC}" type="slidenum">
+              <a:rPr lang="en-US"/>
+              <a:t>18</a:t>
+            </a:fld>
+            <a:endParaRPr lang="en-US"/>
+          </a:p>
+        </p:txBody>
+      </p:sp>
+    </p:spTree>
+    <p:extLst>
+      <p:ext uri="{BB962C8B-B14F-4D97-AF65-F5344CB8AC3E}">
+        <p14:creationId xmlns:p14="http://schemas.microsoft.com/office/powerpoint/2010/main" val="1024086991"/>
+      </p:ext>
+    </p:extLst>
+  </p:cSld>
+  <p:clrMapOvr>
+    <a:masterClrMapping/>
+  </p:clrMapOvr>
+</p:notes>
+</file>
+
+<file path=ppt/notesSlides/notesSlide19.xml><?xml version="1.0" encoding="utf-8"?>
+<p:notes xmlns:a="http://schemas.openxmlformats.org/drawingml/2006/main" xmlns:r="http://schemas.openxmlformats.org/officeDocument/2006/relationships" xmlns:p="http://schemas.openxmlformats.org/presentationml/2006/main">
+  <p:cSld>
+    <p:spTree>
+      <p:nvGrpSpPr>
+        <p:cNvPr id="1" name=""/>
+        <p:cNvGrpSpPr/>
+        <p:nvPr/>
+      </p:nvGrpSpPr>
+      <p:grpSpPr>
+        <a:xfrm>
+          <a:off x="0" y="0"/>
+          <a:ext cx="0" cy="0"/>
+          <a:chOff x="0" y="0"/>
+          <a:chExt cx="0" cy="0"/>
+        </a:xfrm>
+      </p:grpSpPr>
+      <p:sp>
+        <p:nvSpPr>
+          <p:cNvPr id="2" name="Slide Image Placeholder 1"/>
+          <p:cNvSpPr>
+            <a:spLocks noGrp="1" noRot="1" noChangeAspect="1"/>
+          </p:cNvSpPr>
+          <p:nvPr>
+            <p:ph type="sldImg"/>
+          </p:nvPr>
+        </p:nvSpPr>
+        <p:spPr/>
+      </p:sp>
+      <p:sp>
+        <p:nvSpPr>
+          <p:cNvPr id="3" name="Notes Placeholder 2"/>
+          <p:cNvSpPr>
+            <a:spLocks noGrp="1"/>
+          </p:cNvSpPr>
+          <p:nvPr>
+            <p:ph type="body" idx="1"/>
+          </p:nvPr>
+        </p:nvSpPr>
+        <p:spPr/>
+        <p:txBody>
+          <a:bodyPr/>
+          <a:lstStyle/>
+          <a:p>
+            <a:r>
+              <a:rPr lang="en-US" dirty="0"/>
+              <a:t/>
+            </a:r>
+            <a:endParaRPr lang="en-US" dirty="0"/>
+          </a:p>
+        </p:txBody>
+      </p:sp>
+      <p:sp>
+        <p:nvSpPr>
+          <p:cNvPr id="4" name="Slide Number Placeholder 3"/>
+          <p:cNvSpPr>
+            <a:spLocks noGrp="1"/>
+          </p:cNvSpPr>
+          <p:nvPr>
+            <p:ph type="sldNum" sz="quarter" idx="10"/>
+          </p:nvPr>
+        </p:nvSpPr>
+        <p:spPr/>
+        <p:txBody>
+          <a:bodyPr/>
+          <a:lstStyle/>
+          <a:p>
+            <a:fld id="{F7021451-1387-4CA6-816F-3879F97B5CBC}" type="slidenum">
+              <a:rPr lang="en-US"/>
+              <a:t>19</a:t>
             </a:fld>
             <a:endParaRPr lang="en-US"/>
           </a:p>
@@ -2339,7 +2517,7 @@
                 <a:ea typeface="微软雅黑" pitchFamily="34" charset="-122"/>
                 <a:cs typeface="微软雅黑" pitchFamily="34" charset="-120"/>
               </a:rPr>
-              <a:t>1 / 17</a:t>
+              <a:t>1 / 19</a:t>
             </a:r>
             <a:endParaRPr lang="en-US" sz="1000" dirty="0"/>
           </a:p>
@@ -2573,7 +2751,7 @@
                 <a:ea typeface="微软雅黑" pitchFamily="34" charset="-122"/>
                 <a:cs typeface="微软雅黑" pitchFamily="34" charset="-120"/>
               </a:rPr>
-              <a:t>10 / 17</a:t>
+              <a:t>10 / 19</a:t>
             </a:r>
             <a:endParaRPr lang="en-US" sz="1000" dirty="0"/>
           </a:p>
@@ -2666,32 +2844,47 @@
         <p:spPr>
           <a:xfrm>
             <a:off x="822960" y="2395728"/>
-            <a:ext cx="10545775" cy="3172968"/>
+            <a:ext cx="10545775" cy="2545324"/>
           </a:xfrm>
           <a:prstGeom prst="rect">
             <a:avLst/>
           </a:prstGeom>
           <a:solidFill>
-            <a:srgbClr val="F5F6F7"/>
+            <a:srgbClr val="F7F9FC"/>
           </a:solidFill>
-          <a:ln w="9525">
-            <a:solidFill>
-              <a:srgbClr val="D8DBE0"/>
-            </a:solidFill>
-            <a:prstDash val="solid"/>
-          </a:ln>
+          <a:ln/>
         </p:spPr>
       </p:sp>
       <p:sp>
         <p:nvSpPr>
-          <p:cNvPr id="6" name="Text 4"/>
+          <p:cNvPr id="6" name="Shape 4"/>
+          <p:cNvSpPr/>
+          <p:nvPr/>
+        </p:nvSpPr>
+        <p:spPr>
+          <a:xfrm>
+            <a:off x="822960" y="2395728"/>
+            <a:ext cx="50292" cy="2545324"/>
+          </a:xfrm>
+          <a:prstGeom prst="rect">
+            <a:avLst/>
+          </a:prstGeom>
+          <a:solidFill>
+            <a:srgbClr val="1F4E9C"/>
+          </a:solidFill>
+          <a:ln/>
+        </p:spPr>
+      </p:sp>
+      <p:sp>
+        <p:nvSpPr>
+          <p:cNvPr id="7" name="Text 5"/>
           <p:cNvSpPr/>
           <p:nvPr/>
         </p:nvSpPr>
         <p:spPr>
           <a:xfrm>
             <a:off x="1078992" y="2505456"/>
-            <a:ext cx="10033711" cy="2953512"/>
+            <a:ext cx="10033711" cy="2325868"/>
           </a:xfrm>
           <a:prstGeom prst="rect">
             <a:avLst/>
@@ -2737,13 +2930,13 @@
       </p:sp>
       <p:sp>
         <p:nvSpPr>
-          <p:cNvPr id="7" name="Text 5"/>
+          <p:cNvPr id="8" name="Text 6"/>
           <p:cNvSpPr/>
           <p:nvPr/>
         </p:nvSpPr>
         <p:spPr>
           <a:xfrm>
-            <a:off x="896112" y="5769864"/>
+            <a:off x="896112" y="5142220"/>
             <a:ext cx="10454335" cy="321564"/>
           </a:xfrm>
           <a:prstGeom prst="rect">
@@ -2807,13 +3000,13 @@
       </p:sp>
       <p:sp>
         <p:nvSpPr>
-          <p:cNvPr id="8" name="Text 6"/>
+          <p:cNvPr id="9" name="Text 7"/>
           <p:cNvSpPr/>
           <p:nvPr/>
         </p:nvSpPr>
         <p:spPr>
           <a:xfrm>
-            <a:off x="896112" y="6164580"/>
+            <a:off x="896112" y="5536936"/>
             <a:ext cx="10454335" cy="321564"/>
           </a:xfrm>
           <a:prstGeom prst="rect">
@@ -2877,13 +3070,13 @@
       </p:sp>
       <p:sp>
         <p:nvSpPr>
-          <p:cNvPr id="9" name="Text 7"/>
+          <p:cNvPr id="10" name="Text 8"/>
           <p:cNvSpPr/>
           <p:nvPr/>
         </p:nvSpPr>
         <p:spPr>
           <a:xfrm>
-            <a:off x="896112" y="6559296"/>
+            <a:off x="896112" y="5931652"/>
             <a:ext cx="10454335" cy="321564"/>
           </a:xfrm>
           <a:prstGeom prst="rect">
@@ -2947,13 +3140,13 @@
       </p:sp>
       <p:sp>
         <p:nvSpPr>
-          <p:cNvPr id="10" name="Text 8"/>
+          <p:cNvPr id="11" name="Text 9"/>
           <p:cNvSpPr/>
           <p:nvPr/>
         </p:nvSpPr>
         <p:spPr>
           <a:xfrm>
-            <a:off x="896112" y="6954012"/>
+            <a:off x="896112" y="6326368"/>
             <a:ext cx="10454335" cy="321564"/>
           </a:xfrm>
           <a:prstGeom prst="rect">
@@ -3017,13 +3210,13 @@
       </p:sp>
       <p:sp>
         <p:nvSpPr>
-          <p:cNvPr id="11" name="Text 9"/>
+          <p:cNvPr id="12" name="Text 10"/>
           <p:cNvSpPr/>
           <p:nvPr/>
         </p:nvSpPr>
         <p:spPr>
           <a:xfrm>
-            <a:off x="896112" y="7348728"/>
+            <a:off x="896112" y="6721084"/>
             <a:ext cx="10454335" cy="321564"/>
           </a:xfrm>
           <a:prstGeom prst="rect">
@@ -3157,7 +3350,7 @@
                 <a:ea typeface="微软雅黑" pitchFamily="34" charset="-122"/>
                 <a:cs typeface="微软雅黑" pitchFamily="34" charset="-120"/>
               </a:rPr>
-              <a:t>11 / 17</a:t>
+              <a:t>11 / 19</a:t>
             </a:r>
             <a:endParaRPr lang="en-US" sz="1000" dirty="0"/>
           </a:p>
@@ -4374,7 +4567,7 @@
                 <a:ea typeface="微软雅黑" pitchFamily="34" charset="-122"/>
                 <a:cs typeface="微软雅黑" pitchFamily="34" charset="-120"/>
               </a:rPr>
-              <a:t>12 / 17</a:t>
+              <a:t>12 / 19</a:t>
             </a:r>
             <a:endParaRPr lang="en-US" sz="1000" dirty="0"/>
           </a:p>
@@ -4473,19 +4666,34 @@
             <a:avLst/>
           </a:prstGeom>
           <a:solidFill>
-            <a:srgbClr val="F5F6F7"/>
+            <a:srgbClr val="F7F9FC"/>
           </a:solidFill>
-          <a:ln w="9525">
-            <a:solidFill>
-              <a:srgbClr val="D8DBE0"/>
-            </a:solidFill>
-            <a:prstDash val="solid"/>
-          </a:ln>
+          <a:ln/>
         </p:spPr>
       </p:sp>
       <p:sp>
         <p:nvSpPr>
-          <p:cNvPr id="6" name="Text 4"/>
+          <p:cNvPr id="6" name="Shape 4"/>
+          <p:cNvSpPr/>
+          <p:nvPr/>
+        </p:nvSpPr>
+        <p:spPr>
+          <a:xfrm>
+            <a:off x="822960" y="2395728"/>
+            <a:ext cx="50292" cy="1984248"/>
+          </a:xfrm>
+          <a:prstGeom prst="rect">
+            <a:avLst/>
+          </a:prstGeom>
+          <a:solidFill>
+            <a:srgbClr val="1F4E9C"/>
+          </a:solidFill>
+          <a:ln/>
+        </p:spPr>
+      </p:sp>
+      <p:sp>
+        <p:nvSpPr>
+          <p:cNvPr id="7" name="Text 5"/>
           <p:cNvSpPr/>
           <p:nvPr/>
         </p:nvSpPr>
@@ -4532,7 +4740,7 @@
       </p:sp>
       <p:sp>
         <p:nvSpPr>
-          <p:cNvPr id="7" name="Text 5"/>
+          <p:cNvPr id="8" name="Text 6"/>
           <p:cNvSpPr/>
           <p:nvPr/>
         </p:nvSpPr>
@@ -4602,7 +4810,7 @@
       </p:sp>
       <p:sp>
         <p:nvSpPr>
-          <p:cNvPr id="8" name="Text 6"/>
+          <p:cNvPr id="9" name="Text 7"/>
           <p:cNvSpPr/>
           <p:nvPr/>
         </p:nvSpPr>
@@ -4742,7 +4950,7 @@
                 <a:ea typeface="微软雅黑" pitchFamily="34" charset="-122"/>
                 <a:cs typeface="微软雅黑" pitchFamily="34" charset="-120"/>
               </a:rPr>
-              <a:t>13 / 17</a:t>
+              <a:t>13 / 19</a:t>
             </a:r>
             <a:endParaRPr lang="en-US" sz="1000" dirty="0"/>
           </a:p>
@@ -4841,19 +5049,34 @@
             <a:avLst/>
           </a:prstGeom>
           <a:solidFill>
-            <a:srgbClr val="F5F6F7"/>
+            <a:srgbClr val="F7F9FC"/>
           </a:solidFill>
-          <a:ln w="9525">
-            <a:solidFill>
-              <a:srgbClr val="D8DBE0"/>
-            </a:solidFill>
-            <a:prstDash val="solid"/>
-          </a:ln>
+          <a:ln/>
         </p:spPr>
       </p:sp>
       <p:sp>
         <p:nvSpPr>
-          <p:cNvPr id="6" name="Text 4"/>
+          <p:cNvPr id="6" name="Shape 4"/>
+          <p:cNvSpPr/>
+          <p:nvPr/>
+        </p:nvSpPr>
+        <p:spPr>
+          <a:xfrm>
+            <a:off x="822960" y="2395728"/>
+            <a:ext cx="50292" cy="1508760"/>
+          </a:xfrm>
+          <a:prstGeom prst="rect">
+            <a:avLst/>
+          </a:prstGeom>
+          <a:solidFill>
+            <a:srgbClr val="1F4E9C"/>
+          </a:solidFill>
+          <a:ln/>
+        </p:spPr>
+      </p:sp>
+      <p:sp>
+        <p:nvSpPr>
+          <p:cNvPr id="7" name="Text 5"/>
           <p:cNvSpPr/>
           <p:nvPr/>
         </p:nvSpPr>
@@ -4899,7 +5122,7 @@
       </p:sp>
       <p:sp>
         <p:nvSpPr>
-          <p:cNvPr id="7" name="Text 5"/>
+          <p:cNvPr id="8" name="Text 6"/>
           <p:cNvSpPr/>
           <p:nvPr/>
         </p:nvSpPr>
@@ -4983,7 +5206,7 @@
       </p:sp>
       <p:sp>
         <p:nvSpPr>
-          <p:cNvPr id="8" name="Text 6"/>
+          <p:cNvPr id="9" name="Text 7"/>
           <p:cNvSpPr/>
           <p:nvPr/>
         </p:nvSpPr>
@@ -5137,7 +5360,7 @@
                 <a:ea typeface="微软雅黑" pitchFamily="34" charset="-122"/>
                 <a:cs typeface="微软雅黑" pitchFamily="34" charset="-120"/>
               </a:rPr>
-              <a:t>14 / 17</a:t>
+              <a:t>14 / 19</a:t>
             </a:r>
             <a:endParaRPr lang="en-US" sz="1000" dirty="0"/>
           </a:p>
@@ -5396,7 +5619,7 @@
                 <a:ea typeface="微软雅黑" pitchFamily="34" charset="-122"/>
                 <a:cs typeface="微软雅黑" pitchFamily="34" charset="-120"/>
               </a:rPr>
-              <a:t>15 / 17</a:t>
+              <a:t>15 / 19</a:t>
             </a:r>
             <a:endParaRPr lang="en-US" sz="1000" dirty="0"/>
           </a:p>
@@ -5489,32 +5712,47 @@
         <p:spPr>
           <a:xfrm>
             <a:off x="822960" y="2395728"/>
-            <a:ext cx="10545775" cy="1984248"/>
+            <a:ext cx="10545775" cy="1978792"/>
           </a:xfrm>
           <a:prstGeom prst="rect">
             <a:avLst/>
           </a:prstGeom>
           <a:solidFill>
-            <a:srgbClr val="F5F6F7"/>
+            <a:srgbClr val="F7F9FC"/>
           </a:solidFill>
-          <a:ln w="9525">
-            <a:solidFill>
-              <a:srgbClr val="D8DBE0"/>
-            </a:solidFill>
-            <a:prstDash val="solid"/>
-          </a:ln>
+          <a:ln/>
         </p:spPr>
       </p:sp>
       <p:sp>
         <p:nvSpPr>
-          <p:cNvPr id="6" name="Text 4"/>
+          <p:cNvPr id="6" name="Shape 4"/>
+          <p:cNvSpPr/>
+          <p:nvPr/>
+        </p:nvSpPr>
+        <p:spPr>
+          <a:xfrm>
+            <a:off x="822960" y="2395728"/>
+            <a:ext cx="50292" cy="1978792"/>
+          </a:xfrm>
+          <a:prstGeom prst="rect">
+            <a:avLst/>
+          </a:prstGeom>
+          <a:solidFill>
+            <a:srgbClr val="1F4E9C"/>
+          </a:solidFill>
+          <a:ln/>
+        </p:spPr>
+      </p:sp>
+      <p:sp>
+        <p:nvSpPr>
+          <p:cNvPr id="7" name="Text 5"/>
           <p:cNvSpPr/>
           <p:nvPr/>
         </p:nvSpPr>
         <p:spPr>
           <a:xfrm>
             <a:off x="1078992" y="2505456"/>
-            <a:ext cx="10033711" cy="1764792"/>
+            <a:ext cx="10033711" cy="1759336"/>
           </a:xfrm>
           <a:prstGeom prst="rect">
             <a:avLst/>
@@ -5555,13 +5793,13 @@
       </p:sp>
       <p:sp>
         <p:nvSpPr>
-          <p:cNvPr id="7" name="Text 5"/>
+          <p:cNvPr id="8" name="Text 6"/>
           <p:cNvSpPr/>
           <p:nvPr/>
         </p:nvSpPr>
         <p:spPr>
           <a:xfrm>
-            <a:off x="822960" y="4581144"/>
+            <a:off x="822960" y="4575688"/>
             <a:ext cx="10545775" cy="358902"/>
           </a:xfrm>
           <a:prstGeom prst="rect">
@@ -5594,39 +5832,54 @@
       </p:sp>
       <p:sp>
         <p:nvSpPr>
-          <p:cNvPr id="8" name="Shape 6"/>
+          <p:cNvPr id="9" name="Shape 7"/>
           <p:cNvSpPr/>
           <p:nvPr/>
         </p:nvSpPr>
         <p:spPr>
           <a:xfrm>
-            <a:off x="822960" y="5049774"/>
-            <a:ext cx="10545775" cy="1033272"/>
+            <a:off x="822960" y="5044318"/>
+            <a:ext cx="10545775" cy="1030934"/>
           </a:xfrm>
           <a:prstGeom prst="rect">
             <a:avLst/>
           </a:prstGeom>
           <a:solidFill>
-            <a:srgbClr val="F5F6F7"/>
+            <a:srgbClr val="F7F9FC"/>
           </a:solidFill>
-          <a:ln w="9525">
-            <a:solidFill>
-              <a:srgbClr val="D8DBE0"/>
-            </a:solidFill>
-            <a:prstDash val="solid"/>
-          </a:ln>
+          <a:ln/>
         </p:spPr>
       </p:sp>
       <p:sp>
         <p:nvSpPr>
-          <p:cNvPr id="9" name="Text 7"/>
+          <p:cNvPr id="10" name="Shape 8"/>
           <p:cNvSpPr/>
           <p:nvPr/>
         </p:nvSpPr>
         <p:spPr>
           <a:xfrm>
-            <a:off x="1078992" y="5159502"/>
-            <a:ext cx="10033711" cy="813816"/>
+            <a:off x="822960" y="5044318"/>
+            <a:ext cx="50292" cy="1030934"/>
+          </a:xfrm>
+          <a:prstGeom prst="rect">
+            <a:avLst/>
+          </a:prstGeom>
+          <a:solidFill>
+            <a:srgbClr val="1F4E9C"/>
+          </a:solidFill>
+          <a:ln/>
+        </p:spPr>
+      </p:sp>
+      <p:sp>
+        <p:nvSpPr>
+          <p:cNvPr id="11" name="Text 9"/>
+          <p:cNvSpPr/>
+          <p:nvPr/>
+        </p:nvSpPr>
+        <p:spPr>
+          <a:xfrm>
+            <a:off x="1078992" y="5154046"/>
+            <a:ext cx="10033711" cy="811478"/>
           </a:xfrm>
           <a:prstGeom prst="rect">
             <a:avLst/>
@@ -5733,7 +5986,7 @@
                 <a:ea typeface="微软雅黑" pitchFamily="34" charset="-122"/>
                 <a:cs typeface="微软雅黑" pitchFamily="34" charset="-120"/>
               </a:rPr>
-              <a:t>16 / 17</a:t>
+              <a:t>16 / 19</a:t>
             </a:r>
             <a:endParaRPr lang="en-US" sz="1000" dirty="0"/>
           </a:p>
@@ -6085,7 +6338,7 @@
                 <a:ea typeface="微软雅黑" pitchFamily="34" charset="-122"/>
                 <a:cs typeface="微软雅黑" pitchFamily="34" charset="-120"/>
               </a:rPr>
-              <a:t>17 / 17</a:t>
+              <a:t>17 / 19</a:t>
             </a:r>
             <a:endParaRPr lang="en-US" sz="1000" dirty="0"/>
           </a:p>
@@ -6359,9 +6612,721 @@
                 <a:ea typeface="微软雅黑" pitchFamily="34" charset="-122"/>
                 <a:cs typeface="微软雅黑" pitchFamily="34" charset="-120"/>
               </a:rPr>
-              <a:t>写完对照讲稿附录的参考答案；要求：合上笔记能默写main框架</a:t>
+              <a:t>参考答案在本PPT最后两页，课后自行对照；要求：合上笔记能默写main框架</a:t>
             </a:r>
             <a:endParaRPr lang="en-US" sz="1500" dirty="0"/>
+          </a:p>
+        </p:txBody>
+      </p:sp>
+    </p:spTree>
+  </p:cSld>
+  <p:clrMapOvr>
+    <a:masterClrMapping/>
+  </p:clrMapOvr>
+</p:sld>
+</file>
+
+<file path=ppt/slides/slide18.xml><?xml version="1.0" encoding="utf-8"?>
+<p:sld xmlns:a="http://schemas.openxmlformats.org/drawingml/2006/main" xmlns:r="http://schemas.openxmlformats.org/officeDocument/2006/relationships" xmlns:p="http://schemas.openxmlformats.org/presentationml/2006/main">
+  <p:cSld name="Slide 18">
+    <p:bg>
+      <p:bgPr>
+        <a:blipFill dpi="0" rotWithShape="1">
+          <a:blip r:embed="rId1">
+            <a:lum/>
+          </a:blip>
+          <a:srcRect/>
+          <a:stretch>
+            <a:fillRect/>
+          </a:stretch>
+        </a:blipFill>
+        <a:effectLst/>
+      </p:bgPr>
+    </p:bg>
+    <p:spTree>
+      <p:nvGrpSpPr>
+        <p:cNvPr id="1" name=""/>
+        <p:cNvGrpSpPr/>
+        <p:nvPr/>
+      </p:nvGrpSpPr>
+      <p:grpSpPr>
+        <a:xfrm>
+          <a:off x="0" y="0"/>
+          <a:ext cx="0" cy="0"/>
+          <a:chOff x="0" y="0"/>
+          <a:chExt cx="0" cy="0"/>
+        </a:xfrm>
+      </p:grpSpPr>
+      <p:sp>
+        <p:nvSpPr>
+          <p:cNvPr id="2" name="Text 0"/>
+          <p:cNvSpPr/>
+          <p:nvPr/>
+        </p:nvSpPr>
+        <p:spPr>
+          <a:xfrm>
+            <a:off x="10362895" y="6016752"/>
+            <a:ext cx="1463040" cy="320040"/>
+          </a:xfrm>
+          <a:prstGeom prst="rect">
+            <a:avLst/>
+          </a:prstGeom>
+          <a:noFill/>
+          <a:ln/>
+        </p:spPr>
+        <p:txBody>
+          <a:bodyPr wrap="square" rtlCol="0" anchor="ctr"/>
+          <a:lstStyle/>
+          <a:p>
+            <a:pPr algn="r" indent="0" marL="0">
+              <a:buNone/>
+            </a:pPr>
+            <a:r>
+              <a:rPr lang="en-US" sz="1000" dirty="0">
+                <a:solidFill>
+                  <a:srgbClr val="8A9099"/>
+                </a:solidFill>
+                <a:latin typeface="微软雅黑" pitchFamily="34" charset="0"/>
+                <a:ea typeface="微软雅黑" pitchFamily="34" charset="-122"/>
+                <a:cs typeface="微软雅黑" pitchFamily="34" charset="-120"/>
+              </a:rPr>
+              <a:t>18 / 19</a:t>
+            </a:r>
+            <a:endParaRPr lang="en-US" sz="1000" dirty="0"/>
+          </a:p>
+        </p:txBody>
+      </p:sp>
+      <p:sp>
+        <p:nvSpPr>
+          <p:cNvPr id="3" name="Text 1"/>
+          <p:cNvSpPr/>
+          <p:nvPr/>
+        </p:nvSpPr>
+        <p:spPr>
+          <a:xfrm>
+            <a:off x="822960" y="960120"/>
+            <a:ext cx="10545775" cy="365760"/>
+          </a:xfrm>
+          <a:prstGeom prst="rect">
+            <a:avLst/>
+          </a:prstGeom>
+          <a:noFill/>
+          <a:ln/>
+        </p:spPr>
+        <p:txBody>
+          <a:bodyPr wrap="square" rtlCol="0" anchor="ctr"/>
+          <a:lstStyle/>
+          <a:p>
+            <a:pPr algn="l" indent="0" marL="0">
+              <a:buNone/>
+            </a:pPr>
+            <a:r>
+              <a:rPr lang="en-US" sz="1400" b="1" dirty="0">
+                <a:solidFill>
+                  <a:srgbClr val="1F4E9C"/>
+                </a:solidFill>
+                <a:latin typeface="微软雅黑" pitchFamily="34" charset="0"/>
+                <a:ea typeface="微软雅黑" pitchFamily="34" charset="-122"/>
+                <a:cs typeface="微软雅黑" pitchFamily="34" charset="-120"/>
+              </a:rPr>
+              <a:t>参考答案 · 跟练题</a:t>
+            </a:r>
+            <a:endParaRPr lang="en-US" sz="1400" dirty="0"/>
+          </a:p>
+        </p:txBody>
+      </p:sp>
+      <p:sp>
+        <p:nvSpPr>
+          <p:cNvPr id="4" name="Text 2"/>
+          <p:cNvSpPr/>
+          <p:nvPr/>
+        </p:nvSpPr>
+        <p:spPr>
+          <a:xfrm>
+            <a:off x="822960" y="1344168"/>
+            <a:ext cx="10545775" cy="731520"/>
+          </a:xfrm>
+          <a:prstGeom prst="rect">
+            <a:avLst/>
+          </a:prstGeom>
+          <a:noFill/>
+          <a:ln/>
+        </p:spPr>
+        <p:txBody>
+          <a:bodyPr wrap="square" rtlCol="0" anchor="ctr"/>
+          <a:lstStyle/>
+          <a:p>
+            <a:pPr algn="l" indent="0" marL="0">
+              <a:buNone/>
+            </a:pPr>
+            <a:r>
+              <a:rPr lang="en-US" sz="2800" b="1" dirty="0">
+                <a:solidFill>
+                  <a:srgbClr val="1F2329"/>
+                </a:solidFill>
+                <a:latin typeface="微软雅黑" pitchFamily="34" charset="0"/>
+                <a:ea typeface="微软雅黑" pitchFamily="34" charset="-122"/>
+                <a:cs typeface="微软雅黑" pitchFamily="34" charset="-120"/>
+              </a:rPr>
+              <a:t>跟练题参考答案（自行对照）</a:t>
+            </a:r>
+            <a:endParaRPr lang="en-US" sz="2800" dirty="0"/>
+          </a:p>
+        </p:txBody>
+      </p:sp>
+      <p:sp>
+        <p:nvSpPr>
+          <p:cNvPr id="5" name="Shape 3"/>
+          <p:cNvSpPr/>
+          <p:nvPr/>
+        </p:nvSpPr>
+        <p:spPr>
+          <a:xfrm>
+            <a:off x="822960" y="2395728"/>
+            <a:ext cx="10545775" cy="2221992"/>
+          </a:xfrm>
+          <a:prstGeom prst="rect">
+            <a:avLst/>
+          </a:prstGeom>
+          <a:solidFill>
+            <a:srgbClr val="F7F9FC"/>
+          </a:solidFill>
+          <a:ln/>
+        </p:spPr>
+      </p:sp>
+      <p:sp>
+        <p:nvSpPr>
+          <p:cNvPr id="6" name="Shape 4"/>
+          <p:cNvSpPr/>
+          <p:nvPr/>
+        </p:nvSpPr>
+        <p:spPr>
+          <a:xfrm>
+            <a:off x="822960" y="2395728"/>
+            <a:ext cx="50292" cy="2221992"/>
+          </a:xfrm>
+          <a:prstGeom prst="rect">
+            <a:avLst/>
+          </a:prstGeom>
+          <a:solidFill>
+            <a:srgbClr val="1F4E9C"/>
+          </a:solidFill>
+          <a:ln/>
+        </p:spPr>
+      </p:sp>
+      <p:sp>
+        <p:nvSpPr>
+          <p:cNvPr id="7" name="Text 5"/>
+          <p:cNvSpPr/>
+          <p:nvPr/>
+        </p:nvSpPr>
+        <p:spPr>
+          <a:xfrm>
+            <a:off x="1078992" y="2505456"/>
+            <a:ext cx="10033711" cy="2002536"/>
+          </a:xfrm>
+          <a:prstGeom prst="rect">
+            <a:avLst/>
+          </a:prstGeom>
+          <a:noFill/>
+          <a:ln/>
+        </p:spPr>
+        <p:txBody>
+          <a:bodyPr wrap="square" rtlCol="0" anchor="t"/>
+          <a:lstStyle/>
+          <a:p>
+            <a:pPr algn="l" indent="0" marL="0">
+              <a:lnSpc>
+                <a:spcPct val="125000"/>
+              </a:lnSpc>
+              <a:buNone/>
+            </a:pPr>
+            <a:r>
+              <a:rPr lang="en-US" sz="1400" dirty="0">
+                <a:solidFill>
+                  <a:srgbClr val="1F2329"/>
+                </a:solidFill>
+                <a:latin typeface="Consolas" pitchFamily="34" charset="0"/>
+                <a:ea typeface="Consolas" pitchFamily="34" charset="-122"/>
+                <a:cs typeface="Consolas" pitchFamily="34" charset="-120"/>
+              </a:rPr>
+              <a:t>#include &lt;stdio.h&gt;
+int main(){
+    printf("张三\n");
+    printf("某大学\n");
+    printf("重庆邮电大学\n");
+    return 0;
+}
+</a:t>
+            </a:r>
+            <a:endParaRPr lang="en-US" sz="1400" dirty="0"/>
+          </a:p>
+        </p:txBody>
+      </p:sp>
+      <p:sp>
+        <p:nvSpPr>
+          <p:cNvPr id="8" name="Text 6"/>
+          <p:cNvSpPr/>
+          <p:nvPr/>
+        </p:nvSpPr>
+        <p:spPr>
+          <a:xfrm>
+            <a:off x="896112" y="4818888"/>
+            <a:ext cx="10454335" cy="397764"/>
+          </a:xfrm>
+          <a:prstGeom prst="rect">
+            <a:avLst/>
+          </a:prstGeom>
+          <a:noFill/>
+          <a:ln/>
+        </p:spPr>
+        <p:txBody>
+          <a:bodyPr wrap="square" rtlCol="0" anchor="t"/>
+          <a:lstStyle/>
+          <a:p>
+            <a:pPr algn="l" indent="0" marL="0">
+              <a:lnSpc>
+                <a:spcPct val="115000"/>
+              </a:lnSpc>
+              <a:buNone/>
+            </a:pPr>
+            <a:r>
+              <a:rPr lang="en-US" sz="1800" b="1" dirty="0">
+                <a:solidFill>
+                  <a:srgbClr val="1F4E9C"/>
+                </a:solidFill>
+                <a:latin typeface="微软雅黑" pitchFamily="34" charset="0"/>
+                <a:ea typeface="微软雅黑" pitchFamily="34" charset="-122"/>
+                <a:cs typeface="微软雅黑" pitchFamily="34" charset="-120"/>
+              </a:rPr>
+              <a:t>•  </a:t>
+            </a:r>
+            <a:pPr algn="l" indent="0" marL="0">
+              <a:lnSpc>
+                <a:spcPct val="115000"/>
+              </a:lnSpc>
+              <a:buNone/>
+            </a:pPr>
+            <a:r>
+              <a:rPr lang="en-US" sz="1800" dirty="0">
+                <a:solidFill>
+                  <a:srgbClr val="000000"/>
+                </a:solidFill>
+              </a:rPr>
+              <a:t>三行 printf，每行末尾各带一个换行符；把内容换成你自己的姓名、学校、目标</a:t>
+            </a:r>
+            <a:endParaRPr lang="en-US" sz="1800" dirty="0"/>
+          </a:p>
+        </p:txBody>
+      </p:sp>
+      <p:sp>
+        <p:nvSpPr>
+          <p:cNvPr id="9" name="Text 7"/>
+          <p:cNvSpPr/>
+          <p:nvPr/>
+        </p:nvSpPr>
+        <p:spPr>
+          <a:xfrm>
+            <a:off x="896112" y="5289804"/>
+            <a:ext cx="10454335" cy="397764"/>
+          </a:xfrm>
+          <a:prstGeom prst="rect">
+            <a:avLst/>
+          </a:prstGeom>
+          <a:noFill/>
+          <a:ln/>
+        </p:spPr>
+        <p:txBody>
+          <a:bodyPr wrap="square" rtlCol="0" anchor="t"/>
+          <a:lstStyle/>
+          <a:p>
+            <a:pPr algn="l" indent="0" marL="0">
+              <a:lnSpc>
+                <a:spcPct val="115000"/>
+              </a:lnSpc>
+              <a:buNone/>
+            </a:pPr>
+            <a:r>
+              <a:rPr lang="en-US" sz="1800" b="1" dirty="0">
+                <a:solidFill>
+                  <a:srgbClr val="1F4E9C"/>
+                </a:solidFill>
+                <a:latin typeface="微软雅黑" pitchFamily="34" charset="0"/>
+                <a:ea typeface="微软雅黑" pitchFamily="34" charset="-122"/>
+                <a:cs typeface="微软雅黑" pitchFamily="34" charset="-120"/>
+              </a:rPr>
+              <a:t>•  </a:t>
+            </a:r>
+            <a:pPr algn="l" indent="0" marL="0">
+              <a:lnSpc>
+                <a:spcPct val="115000"/>
+              </a:lnSpc>
+              <a:buNone/>
+            </a:pPr>
+            <a:r>
+              <a:rPr lang="en-US" sz="1800" dirty="0">
+                <a:solidFill>
+                  <a:srgbClr val="000000"/>
+                </a:solidFill>
+              </a:rPr>
+              <a:t>一个 printf 管一行，分号、双引号、换行符一样都不能少</a:t>
+            </a:r>
+            <a:endParaRPr lang="en-US" sz="1800" dirty="0"/>
+          </a:p>
+        </p:txBody>
+      </p:sp>
+    </p:spTree>
+  </p:cSld>
+  <p:clrMapOvr>
+    <a:masterClrMapping/>
+  </p:clrMapOvr>
+</p:sld>
+</file>
+
+<file path=ppt/slides/slide19.xml><?xml version="1.0" encoding="utf-8"?>
+<p:sld xmlns:a="http://schemas.openxmlformats.org/drawingml/2006/main" xmlns:r="http://schemas.openxmlformats.org/officeDocument/2006/relationships" xmlns:p="http://schemas.openxmlformats.org/presentationml/2006/main">
+  <p:cSld name="Slide 19">
+    <p:bg>
+      <p:bgPr>
+        <a:blipFill dpi="0" rotWithShape="1">
+          <a:blip r:embed="rId1">
+            <a:lum/>
+          </a:blip>
+          <a:srcRect/>
+          <a:stretch>
+            <a:fillRect/>
+          </a:stretch>
+        </a:blipFill>
+        <a:effectLst/>
+      </p:bgPr>
+    </p:bg>
+    <p:spTree>
+      <p:nvGrpSpPr>
+        <p:cNvPr id="1" name=""/>
+        <p:cNvGrpSpPr/>
+        <p:nvPr/>
+      </p:nvGrpSpPr>
+      <p:grpSpPr>
+        <a:xfrm>
+          <a:off x="0" y="0"/>
+          <a:ext cx="0" cy="0"/>
+          <a:chOff x="0" y="0"/>
+          <a:chExt cx="0" cy="0"/>
+        </a:xfrm>
+      </p:grpSpPr>
+      <p:sp>
+        <p:nvSpPr>
+          <p:cNvPr id="2" name="Text 0"/>
+          <p:cNvSpPr/>
+          <p:nvPr/>
+        </p:nvSpPr>
+        <p:spPr>
+          <a:xfrm>
+            <a:off x="10362895" y="6016752"/>
+            <a:ext cx="1463040" cy="320040"/>
+          </a:xfrm>
+          <a:prstGeom prst="rect">
+            <a:avLst/>
+          </a:prstGeom>
+          <a:noFill/>
+          <a:ln/>
+        </p:spPr>
+        <p:txBody>
+          <a:bodyPr wrap="square" rtlCol="0" anchor="ctr"/>
+          <a:lstStyle/>
+          <a:p>
+            <a:pPr algn="r" indent="0" marL="0">
+              <a:buNone/>
+            </a:pPr>
+            <a:r>
+              <a:rPr lang="en-US" sz="1000" dirty="0">
+                <a:solidFill>
+                  <a:srgbClr val="8A9099"/>
+                </a:solidFill>
+                <a:latin typeface="微软雅黑" pitchFamily="34" charset="0"/>
+                <a:ea typeface="微软雅黑" pitchFamily="34" charset="-122"/>
+                <a:cs typeface="微软雅黑" pitchFamily="34" charset="-120"/>
+              </a:rPr>
+              <a:t>19 / 19</a:t>
+            </a:r>
+            <a:endParaRPr lang="en-US" sz="1000" dirty="0"/>
+          </a:p>
+        </p:txBody>
+      </p:sp>
+      <p:sp>
+        <p:nvSpPr>
+          <p:cNvPr id="3" name="Text 1"/>
+          <p:cNvSpPr/>
+          <p:nvPr/>
+        </p:nvSpPr>
+        <p:spPr>
+          <a:xfrm>
+            <a:off x="822960" y="960120"/>
+            <a:ext cx="10545775" cy="365760"/>
+          </a:xfrm>
+          <a:prstGeom prst="rect">
+            <a:avLst/>
+          </a:prstGeom>
+          <a:noFill/>
+          <a:ln/>
+        </p:spPr>
+        <p:txBody>
+          <a:bodyPr wrap="square" rtlCol="0" anchor="ctr"/>
+          <a:lstStyle/>
+          <a:p>
+            <a:pPr algn="l" indent="0" marL="0">
+              <a:buNone/>
+            </a:pPr>
+            <a:r>
+              <a:rPr lang="en-US" sz="1400" b="1" dirty="0">
+                <a:solidFill>
+                  <a:srgbClr val="1F4E9C"/>
+                </a:solidFill>
+                <a:latin typeface="微软雅黑" pitchFamily="34" charset="0"/>
+                <a:ea typeface="微软雅黑" pitchFamily="34" charset="-122"/>
+                <a:cs typeface="微软雅黑" pitchFamily="34" charset="-120"/>
+              </a:rPr>
+              <a:t>参考答案 · 模仿题</a:t>
+            </a:r>
+            <a:endParaRPr lang="en-US" sz="1400" dirty="0"/>
+          </a:p>
+        </p:txBody>
+      </p:sp>
+      <p:sp>
+        <p:nvSpPr>
+          <p:cNvPr id="4" name="Text 2"/>
+          <p:cNvSpPr/>
+          <p:nvPr/>
+        </p:nvSpPr>
+        <p:spPr>
+          <a:xfrm>
+            <a:off x="822960" y="1344168"/>
+            <a:ext cx="10545775" cy="731520"/>
+          </a:xfrm>
+          <a:prstGeom prst="rect">
+            <a:avLst/>
+          </a:prstGeom>
+          <a:noFill/>
+          <a:ln/>
+        </p:spPr>
+        <p:txBody>
+          <a:bodyPr wrap="square" rtlCol="0" anchor="ctr"/>
+          <a:lstStyle/>
+          <a:p>
+            <a:pPr algn="l" indent="0" marL="0">
+              <a:buNone/>
+            </a:pPr>
+            <a:r>
+              <a:rPr lang="en-US" sz="2800" b="1" dirty="0">
+                <a:solidFill>
+                  <a:srgbClr val="1F2329"/>
+                </a:solidFill>
+                <a:latin typeface="微软雅黑" pitchFamily="34" charset="0"/>
+                <a:ea typeface="微软雅黑" pitchFamily="34" charset="-122"/>
+                <a:cs typeface="微软雅黑" pitchFamily="34" charset="-120"/>
+              </a:rPr>
+              <a:t>模仿题参考答案（自行对照）</a:t>
+            </a:r>
+            <a:endParaRPr lang="en-US" sz="2800" dirty="0"/>
+          </a:p>
+        </p:txBody>
+      </p:sp>
+      <p:sp>
+        <p:nvSpPr>
+          <p:cNvPr id="5" name="Shape 3"/>
+          <p:cNvSpPr/>
+          <p:nvPr/>
+        </p:nvSpPr>
+        <p:spPr>
+          <a:xfrm>
+            <a:off x="822960" y="2395728"/>
+            <a:ext cx="10545775" cy="1746504"/>
+          </a:xfrm>
+          <a:prstGeom prst="rect">
+            <a:avLst/>
+          </a:prstGeom>
+          <a:solidFill>
+            <a:srgbClr val="F7F9FC"/>
+          </a:solidFill>
+          <a:ln/>
+        </p:spPr>
+      </p:sp>
+      <p:sp>
+        <p:nvSpPr>
+          <p:cNvPr id="6" name="Shape 4"/>
+          <p:cNvSpPr/>
+          <p:nvPr/>
+        </p:nvSpPr>
+        <p:spPr>
+          <a:xfrm>
+            <a:off x="822960" y="2395728"/>
+            <a:ext cx="50292" cy="1746504"/>
+          </a:xfrm>
+          <a:prstGeom prst="rect">
+            <a:avLst/>
+          </a:prstGeom>
+          <a:solidFill>
+            <a:srgbClr val="1F4E9C"/>
+          </a:solidFill>
+          <a:ln/>
+        </p:spPr>
+      </p:sp>
+      <p:sp>
+        <p:nvSpPr>
+          <p:cNvPr id="7" name="Text 5"/>
+          <p:cNvSpPr/>
+          <p:nvPr/>
+        </p:nvSpPr>
+        <p:spPr>
+          <a:xfrm>
+            <a:off x="1078992" y="2505456"/>
+            <a:ext cx="10033711" cy="1527048"/>
+          </a:xfrm>
+          <a:prstGeom prst="rect">
+            <a:avLst/>
+          </a:prstGeom>
+          <a:noFill/>
+          <a:ln/>
+        </p:spPr>
+        <p:txBody>
+          <a:bodyPr wrap="square" rtlCol="0" anchor="t"/>
+          <a:lstStyle/>
+          <a:p>
+            <a:pPr algn="l" indent="0" marL="0">
+              <a:lnSpc>
+                <a:spcPct val="125000"/>
+              </a:lnSpc>
+              <a:buNone/>
+            </a:pPr>
+            <a:r>
+              <a:rPr lang="en-US" sz="1400" dirty="0">
+                <a:solidFill>
+                  <a:srgbClr val="1F2329"/>
+                </a:solidFill>
+                <a:latin typeface="Consolas" pitchFamily="34" charset="0"/>
+                <a:ea typeface="Consolas" pitchFamily="34" charset="-122"/>
+                <a:cs typeface="Consolas" pitchFamily="34" charset="-120"/>
+              </a:rPr>
+              <a:t>#include &lt;stdio.h&gt;
+int main(){
+    printf("第一行诗\n第二行诗\n第三行诗\n");
+    return 0;
+}
+</a:t>
+            </a:r>
+            <a:endParaRPr lang="en-US" sz="1400" dirty="0"/>
+          </a:p>
+        </p:txBody>
+      </p:sp>
+      <p:sp>
+        <p:nvSpPr>
+          <p:cNvPr id="8" name="Text 6"/>
+          <p:cNvSpPr/>
+          <p:nvPr/>
+        </p:nvSpPr>
+        <p:spPr>
+          <a:xfrm>
+            <a:off x="896112" y="4343400"/>
+            <a:ext cx="10454335" cy="397764"/>
+          </a:xfrm>
+          <a:prstGeom prst="rect">
+            <a:avLst/>
+          </a:prstGeom>
+          <a:noFill/>
+          <a:ln/>
+        </p:spPr>
+        <p:txBody>
+          <a:bodyPr wrap="square" rtlCol="0" anchor="t"/>
+          <a:lstStyle/>
+          <a:p>
+            <a:pPr algn="l" indent="0" marL="0">
+              <a:lnSpc>
+                <a:spcPct val="115000"/>
+              </a:lnSpc>
+              <a:buNone/>
+            </a:pPr>
+            <a:r>
+              <a:rPr lang="en-US" sz="1800" b="1" dirty="0">
+                <a:solidFill>
+                  <a:srgbClr val="1F4E9C"/>
+                </a:solidFill>
+                <a:latin typeface="微软雅黑" pitchFamily="34" charset="0"/>
+                <a:ea typeface="微软雅黑" pitchFamily="34" charset="-122"/>
+                <a:cs typeface="微软雅黑" pitchFamily="34" charset="-120"/>
+              </a:rPr>
+              <a:t>•  </a:t>
+            </a:r>
+            <a:pPr algn="l" indent="0" marL="0">
+              <a:lnSpc>
+                <a:spcPct val="115000"/>
+              </a:lnSpc>
+              <a:buNone/>
+            </a:pPr>
+            <a:r>
+              <a:rPr lang="en-US" sz="1800" dirty="0">
+                <a:solidFill>
+                  <a:srgbClr val="000000"/>
+                </a:solidFill>
+              </a:rPr>
+              <a:t>只用一条 printf 也能出三行：换行符放进字符串中间照样换行</a:t>
+            </a:r>
+            <a:endParaRPr lang="en-US" sz="1800" dirty="0"/>
+          </a:p>
+        </p:txBody>
+      </p:sp>
+      <p:sp>
+        <p:nvSpPr>
+          <p:cNvPr id="9" name="Text 7"/>
+          <p:cNvSpPr/>
+          <p:nvPr/>
+        </p:nvSpPr>
+        <p:spPr>
+          <a:xfrm>
+            <a:off x="896112" y="4814316"/>
+            <a:ext cx="10454335" cy="397764"/>
+          </a:xfrm>
+          <a:prstGeom prst="rect">
+            <a:avLst/>
+          </a:prstGeom>
+          <a:noFill/>
+          <a:ln/>
+        </p:spPr>
+        <p:txBody>
+          <a:bodyPr wrap="square" rtlCol="0" anchor="t"/>
+          <a:lstStyle/>
+          <a:p>
+            <a:pPr algn="l" indent="0" marL="0">
+              <a:lnSpc>
+                <a:spcPct val="115000"/>
+              </a:lnSpc>
+              <a:buNone/>
+            </a:pPr>
+            <a:r>
+              <a:rPr lang="en-US" sz="1800" b="1" dirty="0">
+                <a:solidFill>
+                  <a:srgbClr val="1F4E9C"/>
+                </a:solidFill>
+                <a:latin typeface="微软雅黑" pitchFamily="34" charset="0"/>
+                <a:ea typeface="微软雅黑" pitchFamily="34" charset="-122"/>
+                <a:cs typeface="微软雅黑" pitchFamily="34" charset="-120"/>
+              </a:rPr>
+              <a:t>•  </a:t>
+            </a:r>
+            <a:pPr algn="l" indent="0" marL="0">
+              <a:lnSpc>
+                <a:spcPct val="115000"/>
+              </a:lnSpc>
+              <a:buNone/>
+            </a:pPr>
+            <a:r>
+              <a:rPr lang="en-US" sz="1800" dirty="0">
+                <a:solidFill>
+                  <a:srgbClr val="000000"/>
+                </a:solidFill>
+              </a:rPr>
+              <a:t>换行符是反斜杠加字母 n 两字符组成的整体，别拆开、别写成斜杠</a:t>
+            </a:r>
+            <a:endParaRPr lang="en-US" sz="1800" dirty="0"/>
           </a:p>
         </p:txBody>
       </p:sp>
@@ -6437,7 +7402,7 @@
                 <a:ea typeface="微软雅黑" pitchFamily="34" charset="-122"/>
                 <a:cs typeface="微软雅黑" pitchFamily="34" charset="-120"/>
               </a:rPr>
-              <a:t>2 / 17</a:t>
+              <a:t>2 / 19</a:t>
             </a:r>
             <a:endParaRPr lang="en-US" sz="1000" dirty="0"/>
           </a:p>
@@ -7361,7 +8326,7 @@
                 <a:ea typeface="微软雅黑" pitchFamily="34" charset="-122"/>
                 <a:cs typeface="微软雅黑" pitchFamily="34" charset="-120"/>
               </a:rPr>
-              <a:t>3 / 17</a:t>
+              <a:t>3 / 19</a:t>
             </a:r>
             <a:endParaRPr lang="en-US" sz="1000" dirty="0"/>
           </a:p>
@@ -8823,7 +9788,7 @@
                 <a:ea typeface="微软雅黑" pitchFamily="34" charset="-122"/>
                 <a:cs typeface="微软雅黑" pitchFamily="34" charset="-120"/>
               </a:rPr>
-              <a:t>4 / 17</a:t>
+              <a:t>4 / 19</a:t>
             </a:r>
             <a:endParaRPr lang="en-US" sz="1000" dirty="0"/>
           </a:p>
@@ -9561,7 +10526,7 @@
                 <a:ea typeface="微软雅黑" pitchFamily="34" charset="-122"/>
                 <a:cs typeface="微软雅黑" pitchFamily="34" charset="-120"/>
               </a:rPr>
-              <a:t>5 / 17</a:t>
+              <a:t>5 / 19</a:t>
             </a:r>
             <a:endParaRPr lang="en-US" sz="1000" dirty="0"/>
           </a:p>
@@ -10055,7 +11020,7 @@
                 <a:ea typeface="微软雅黑" pitchFamily="34" charset="-122"/>
                 <a:cs typeface="微软雅黑" pitchFamily="34" charset="-120"/>
               </a:rPr>
-              <a:t>6 / 17</a:t>
+              <a:t>6 / 19</a:t>
             </a:r>
             <a:endParaRPr lang="en-US" sz="1000" dirty="0"/>
           </a:p>
@@ -10250,7 +11215,7 @@
                 <a:ea typeface="微软雅黑" pitchFamily="34" charset="-122"/>
                 <a:cs typeface="微软雅黑" pitchFamily="34" charset="-120"/>
               </a:rPr>
-              <a:t>7 / 17</a:t>
+              <a:t>7 / 19</a:t>
             </a:r>
             <a:endParaRPr lang="en-US" sz="1000" dirty="0"/>
           </a:p>
@@ -10415,19 +11380,34 @@
             <a:avLst/>
           </a:prstGeom>
           <a:solidFill>
-            <a:srgbClr val="F5F6F7"/>
+            <a:srgbClr val="F7F9FC"/>
           </a:solidFill>
-          <a:ln w="9525">
-            <a:solidFill>
-              <a:srgbClr val="D8DBE0"/>
-            </a:solidFill>
-            <a:prstDash val="solid"/>
-          </a:ln>
+          <a:ln/>
         </p:spPr>
       </p:sp>
       <p:sp>
         <p:nvSpPr>
-          <p:cNvPr id="8" name="Text 6"/>
+          <p:cNvPr id="8" name="Shape 6"/>
+          <p:cNvSpPr/>
+          <p:nvPr/>
+        </p:nvSpPr>
+        <p:spPr>
+          <a:xfrm>
+            <a:off x="822960" y="2395728"/>
+            <a:ext cx="50292" cy="1033272"/>
+          </a:xfrm>
+          <a:prstGeom prst="rect">
+            <a:avLst/>
+          </a:prstGeom>
+          <a:solidFill>
+            <a:srgbClr val="1F4E9C"/>
+          </a:solidFill>
+          <a:ln/>
+        </p:spPr>
+      </p:sp>
+      <p:sp>
+        <p:nvSpPr>
+          <p:cNvPr id="9" name="Text 7"/>
           <p:cNvSpPr/>
           <p:nvPr/>
         </p:nvSpPr>
@@ -10471,7 +11451,7 @@
       </p:sp>
       <p:sp>
         <p:nvSpPr>
-          <p:cNvPr id="9" name="Text 7"/>
+          <p:cNvPr id="10" name="Text 8"/>
           <p:cNvSpPr/>
           <p:nvPr/>
         </p:nvSpPr>
@@ -10599,7 +11579,7 @@
                 <a:ea typeface="微软雅黑" pitchFamily="34" charset="-122"/>
                 <a:cs typeface="微软雅黑" pitchFamily="34" charset="-120"/>
               </a:rPr>
-              <a:t>8 / 17</a:t>
+              <a:t>8 / 19</a:t>
             </a:r>
             <a:endParaRPr lang="en-US" sz="1000" dirty="0"/>
           </a:p>
@@ -11434,7 +12414,7 @@
                 <a:ea typeface="微软雅黑" pitchFamily="34" charset="-122"/>
                 <a:cs typeface="微软雅黑" pitchFamily="34" charset="-120"/>
               </a:rPr>
-              <a:t>9 / 17</a:t>
+              <a:t>9 / 19</a:t>
             </a:r>
             <a:endParaRPr lang="en-US" sz="1000" dirty="0"/>
           </a:p>
